--- a/sprints/sprint-03/banca-de-modelagem/entregaveis/Banca_Modelagem_Kairos_Antevia.pptx
+++ b/sprints/sprint-03/banca-de-modelagem/entregaveis/Banca_Modelagem_Kairos_Antevia.pptx
@@ -4,6 +4,9 @@
   <p:sldMasterIdLst>
     <p:sldMasterId id="2147483648" r:id="rId1"/>
   </p:sldMasterIdLst>
+  <p:notesMasterIdLst>
+    <p:notesMasterId r:id="rId12"/>
+  </p:notesMasterIdLst>
   <p:sldIdLst>
     <p:sldId id="256" r:id="rId2"/>
     <p:sldId id="257" r:id="rId3"/>
@@ -16,9 +19,6 @@
     <p:sldId id="264" r:id="rId10"/>
     <p:sldId id="265" r:id="rId11"/>
   </p:sldIdLst>
-  <p:notesMasterIdLst>
-    <p:notesMasterId r:id="rId12"/>
-  </p:notesMasterIdLst>
   <p:sldSz cx="12192000" cy="6858000"/>
   <p:notesSz cx="6858000" cy="12192000"/>
   <p:defaultTextStyle>
@@ -113,6 +113,11 @@
       </a:defRPr>
     </a:lvl9pPr>
   </p:defaultTextStyle>
+  <p:extLst>
+    <p:ext uri="{EFAFB233-063F-42B5-8137-9DF3F51BA10A}">
+      <p15:sldGuideLst xmlns:p15="http://schemas.microsoft.com/office/powerpoint/2012/main"/>
+    </p:ext>
+  </p:extLst>
 </p:presentation>
 </file>
 
@@ -138,234 +143,10 @@
           <a:chExt cx="0" cy="0"/>
         </a:xfrm>
       </p:grpSpPr>
-      <p:sp>
-        <p:nvSpPr>
-          <p:cNvPr id="2" name="Header Placeholder 1"/>
-          <p:cNvSpPr>
-            <a:spLocks noGrp="1"/>
-          </p:cNvSpPr>
-          <p:nvPr>
-            <p:ph type="hdr" sz="quarter"/>
-          </p:nvPr>
-        </p:nvSpPr>
-        <p:spPr>
-          <a:xfrm>
-            <a:off x="0" y="0"/>
-            <a:ext cx="2971800" cy="458788"/>
-          </a:xfrm>
-          <a:prstGeom prst="rect">
-            <a:avLst/>
-          </a:prstGeom>
-        </p:spPr>
-        <p:txBody>
-          <a:bodyPr vert="horz" lIns="91440" tIns="45720" rIns="91440" bIns="45720" rtlCol="0"/>
-          <a:lstStyle>
-            <a:lvl1pPr algn="l">
-              <a:defRPr sz="1200"/>
-            </a:lvl1pPr>
-          </a:lstStyle>
-          <a:p>
-            <a:endParaRPr lang="en-US"/>
-          </a:p>
-        </p:txBody>
-      </p:sp>
-      <p:sp>
-        <p:nvSpPr>
-          <p:cNvPr id="3" name="Date Placeholder 2"/>
-          <p:cNvSpPr>
-            <a:spLocks noGrp="1"/>
-          </p:cNvSpPr>
-          <p:nvPr>
-            <p:ph type="dt" idx="1"/>
-          </p:nvPr>
-        </p:nvSpPr>
-        <p:spPr>
-          <a:xfrm>
-            <a:off x="3884613" y="0"/>
-            <a:ext cx="2971800" cy="458788"/>
-          </a:xfrm>
-          <a:prstGeom prst="rect">
-            <a:avLst/>
-          </a:prstGeom>
-        </p:spPr>
-        <p:txBody>
-          <a:bodyPr vert="horz" lIns="91440" tIns="45720" rIns="91440" bIns="45720" rtlCol="0"/>
-          <a:lstStyle>
-            <a:lvl1pPr algn="r">
-              <a:defRPr sz="1200"/>
-            </a:lvl1pPr>
-          </a:lstStyle>
-          <a:p>
-            <a:fld id="{5282F153-3F37-0F45-9E97-73ACFA13230C}" type="datetimeFigureOut">
-              <a:rPr lang="en-US"/>
-              <a:t>7/23/19</a:t>
-            </a:fld>
-            <a:endParaRPr lang="en-US"/>
-          </a:p>
-        </p:txBody>
-      </p:sp>
-      <p:sp>
-        <p:nvSpPr>
-          <p:cNvPr id="4" name="Slide Image Placeholder 3"/>
-          <p:cNvSpPr>
-            <a:spLocks noGrp="1" noRot="1" noChangeAspect="1"/>
-          </p:cNvSpPr>
-          <p:nvPr>
-            <p:ph type="sldImg" idx="2"/>
-          </p:nvPr>
-        </p:nvSpPr>
-        <p:spPr>
-          <a:xfrm>
-            <a:off x="685800" y="1143000"/>
-            <a:ext cx="5486400" cy="3086100"/>
-          </a:xfrm>
-          <a:prstGeom prst="rect">
-            <a:avLst/>
-          </a:prstGeom>
-          <a:noFill/>
-          <a:ln w="12700">
-            <a:solidFill>
-              <a:prstClr val="black"/>
-            </a:solidFill>
-          </a:ln>
-        </p:spPr>
-        <p:txBody>
-          <a:bodyPr vert="horz" lIns="91440" tIns="45720" rIns="91440" bIns="45720" rtlCol="0" anchor="ctr"/>
-          <a:lstStyle/>
-          <a:p>
-            <a:endParaRPr lang="en-US"/>
-          </a:p>
-        </p:txBody>
-      </p:sp>
-      <p:sp>
-        <p:nvSpPr>
-          <p:cNvPr id="5" name="Notes Placeholder 4"/>
-          <p:cNvSpPr>
-            <a:spLocks noGrp="1"/>
-          </p:cNvSpPr>
-          <p:nvPr>
-            <p:ph type="body" sz="quarter" idx="3"/>
-          </p:nvPr>
-        </p:nvSpPr>
-        <p:spPr>
-          <a:xfrm>
-            <a:off x="685800" y="4400550"/>
-            <a:ext cx="5486400" cy="3600450"/>
-          </a:xfrm>
-          <a:prstGeom prst="rect">
-            <a:avLst/>
-          </a:prstGeom>
-        </p:spPr>
-        <p:txBody>
-          <a:bodyPr vert="horz" lIns="91440" tIns="45720" rIns="91440" bIns="45720" rtlCol="0"/>
-          <a:lstStyle/>
-          <a:p>
-            <a:pPr lvl="0"/>
-            <a:r>
-              <a:rPr lang="en-US"/>
-              <a:t>Click to edit Master text styles</a:t>
-            </a:r>
-          </a:p>
-          <a:p>
-            <a:pPr lvl="1"/>
-            <a:r>
-              <a:rPr lang="en-US"/>
-              <a:t>Second level</a:t>
-            </a:r>
-          </a:p>
-          <a:p>
-            <a:pPr lvl="2"/>
-            <a:r>
-              <a:rPr lang="en-US"/>
-              <a:t>Third level</a:t>
-            </a:r>
-          </a:p>
-          <a:p>
-            <a:pPr lvl="3"/>
-            <a:r>
-              <a:rPr lang="en-US"/>
-              <a:t>Fourth level</a:t>
-            </a:r>
-          </a:p>
-          <a:p>
-            <a:pPr lvl="4"/>
-            <a:r>
-              <a:rPr lang="en-US"/>
-              <a:t>Fifth level</a:t>
-            </a:r>
-          </a:p>
-        </p:txBody>
-      </p:sp>
-      <p:sp>
-        <p:nvSpPr>
-          <p:cNvPr id="6" name="Footer Placeholder 5"/>
-          <p:cNvSpPr>
-            <a:spLocks noGrp="1"/>
-          </p:cNvSpPr>
-          <p:nvPr>
-            <p:ph type="ftr" sz="quarter" idx="4"/>
-          </p:nvPr>
-        </p:nvSpPr>
-        <p:spPr>
-          <a:xfrm>
-            <a:off x="0" y="8685213"/>
-            <a:ext cx="2971800" cy="458787"/>
-          </a:xfrm>
-          <a:prstGeom prst="rect">
-            <a:avLst/>
-          </a:prstGeom>
-        </p:spPr>
-        <p:txBody>
-          <a:bodyPr vert="horz" lIns="91440" tIns="45720" rIns="91440" bIns="45720" rtlCol="0" anchor="b"/>
-          <a:lstStyle>
-            <a:lvl1pPr algn="l">
-              <a:defRPr sz="1200"/>
-            </a:lvl1pPr>
-          </a:lstStyle>
-          <a:p>
-            <a:endParaRPr lang="en-US"/>
-          </a:p>
-        </p:txBody>
-      </p:sp>
-      <p:sp>
-        <p:nvSpPr>
-          <p:cNvPr id="7" name="Slide Number Placeholder 6"/>
-          <p:cNvSpPr>
-            <a:spLocks noGrp="1"/>
-          </p:cNvSpPr>
-          <p:nvPr>
-            <p:ph type="sldNum" sz="quarter" idx="5"/>
-          </p:nvPr>
-        </p:nvSpPr>
-        <p:spPr>
-          <a:xfrm>
-            <a:off x="3884613" y="8685213"/>
-            <a:ext cx="2971800" cy="458787"/>
-          </a:xfrm>
-          <a:prstGeom prst="rect">
-            <a:avLst/>
-          </a:prstGeom>
-        </p:spPr>
-        <p:txBody>
-          <a:bodyPr vert="horz" lIns="91440" tIns="45720" rIns="91440" bIns="45720" rtlCol="0" anchor="b"/>
-          <a:lstStyle>
-            <a:lvl1pPr algn="r">
-              <a:defRPr sz="1200"/>
-            </a:lvl1pPr>
-          </a:lstStyle>
-          <a:p>
-            <a:fld id="{CE5E9CC1-C706-0F49-92D6-E571CC5EEA8F}" type="slidenum">
-              <a:rPr lang="en-US"/>
-              <a:t>‹#›</a:t>
-            </a:fld>
-            <a:endParaRPr lang="en-US"/>
-          </a:p>
-        </p:txBody>
-      </p:sp>
     </p:spTree>
     <p:extLst>
       <p:ext uri="{BB962C8B-B14F-4D97-AF65-F5344CB8AC3E}">
-        <p14:creationId xmlns:p14="http://schemas.microsoft.com/office/powerpoint/2010/main" val="1024086991"/>
+        <p14:creationId xmlns:p14="http://schemas.microsoft.com/office/powerpoint/2010/main" val="3475457626"/>
       </p:ext>
     </p:extLst>
   </p:cSld>
@@ -509,10 +290,6 @@
           <a:bodyPr/>
           <a:lstStyle/>
           <a:p>
-            <a:r>
-              <a:rPr lang="en-US" dirty="0"/>
-              <a:t/>
-            </a:r>
             <a:endParaRPr lang="en-US" dirty="0"/>
           </a:p>
         </p:txBody>
@@ -597,10 +374,6 @@
           <a:bodyPr/>
           <a:lstStyle/>
           <a:p>
-            <a:r>
-              <a:rPr lang="en-US" dirty="0"/>
-              <a:t/>
-            </a:r>
             <a:endParaRPr lang="en-US" dirty="0"/>
           </a:p>
         </p:txBody>
@@ -685,10 +458,6 @@
           <a:bodyPr/>
           <a:lstStyle/>
           <a:p>
-            <a:r>
-              <a:rPr lang="en-US" dirty="0"/>
-              <a:t/>
-            </a:r>
             <a:endParaRPr lang="en-US" dirty="0"/>
           </a:p>
         </p:txBody>
@@ -773,10 +542,6 @@
           <a:bodyPr/>
           <a:lstStyle/>
           <a:p>
-            <a:r>
-              <a:rPr lang="en-US" dirty="0"/>
-              <a:t/>
-            </a:r>
             <a:endParaRPr lang="en-US" dirty="0"/>
           </a:p>
         </p:txBody>
@@ -861,10 +626,6 @@
           <a:bodyPr/>
           <a:lstStyle/>
           <a:p>
-            <a:r>
-              <a:rPr lang="en-US" dirty="0"/>
-              <a:t/>
-            </a:r>
             <a:endParaRPr lang="en-US" dirty="0"/>
           </a:p>
         </p:txBody>
@@ -949,10 +710,6 @@
           <a:bodyPr/>
           <a:lstStyle/>
           <a:p>
-            <a:r>
-              <a:rPr lang="en-US" dirty="0"/>
-              <a:t/>
-            </a:r>
             <a:endParaRPr lang="en-US" dirty="0"/>
           </a:p>
         </p:txBody>
@@ -1037,10 +794,6 @@
           <a:bodyPr/>
           <a:lstStyle/>
           <a:p>
-            <a:r>
-              <a:rPr lang="en-US" dirty="0"/>
-              <a:t/>
-            </a:r>
             <a:endParaRPr lang="en-US" dirty="0"/>
           </a:p>
         </p:txBody>
@@ -1125,10 +878,6 @@
           <a:bodyPr/>
           <a:lstStyle/>
           <a:p>
-            <a:r>
-              <a:rPr lang="en-US" dirty="0"/>
-              <a:t/>
-            </a:r>
             <a:endParaRPr lang="en-US" dirty="0"/>
           </a:p>
         </p:txBody>
@@ -1213,10 +962,6 @@
           <a:bodyPr/>
           <a:lstStyle/>
           <a:p>
-            <a:r>
-              <a:rPr lang="en-US" dirty="0"/>
-              <a:t/>
-            </a:r>
             <a:endParaRPr lang="en-US" dirty="0"/>
           </a:p>
         </p:txBody>
@@ -1301,10 +1046,6 @@
           <a:bodyPr/>
           <a:lstStyle/>
           <a:p>
-            <a:r>
-              <a:rPr lang="en-US" dirty="0"/>
-              <a:t/>
-            </a:r>
             <a:endParaRPr lang="en-US" dirty="0"/>
           </a:p>
         </p:txBody>
@@ -1378,6 +1119,11 @@
 <file path=ppt/slideMasters/slideMaster1.xml><?xml version="1.0" encoding="utf-8"?>
 <p:sldMaster xmlns:a="http://schemas.openxmlformats.org/drawingml/2006/main" xmlns:r="http://schemas.openxmlformats.org/officeDocument/2006/relationships" xmlns:p="http://schemas.openxmlformats.org/presentationml/2006/main">
   <p:cSld>
+    <p:bg>
+      <p:bgRef idx="1001">
+        <a:schemeClr val="bg1"/>
+      </p:bgRef>
+    </p:bg>
     <p:spTree>
       <p:nvGrpSpPr>
         <p:cNvPr id="1" name=""/>
@@ -1660,6 +1406,7 @@
         <a:solidFill>
           <a:srgbClr val="0B1220"/>
         </a:solidFill>
+        <a:effectLst/>
       </p:bgPr>
     </p:bg>
     <p:spTree>
@@ -1705,11 +1452,11 @@
           <a:bodyPr wrap="square" lIns="0" tIns="0" rIns="0" bIns="0" rtlCol="0" anchor="ctr"/>
           <a:lstStyle/>
           <a:p>
-            <a:pPr algn="ctr" indent="0" marL="0">
-              <a:buNone/>
-            </a:pPr>
-            <a:r>
-              <a:rPr lang="en-US" sz="850" spc="160" kern="0" dirty="0">
+            <a:pPr marL="0" indent="0" algn="ctr">
+              <a:buNone/>
+            </a:pPr>
+            <a:r>
+              <a:rPr lang="en-US" sz="850" kern="0" spc="160" dirty="0">
                 <a:solidFill>
                   <a:srgbClr val="F2B705"/>
                 </a:solidFill>
@@ -1744,7 +1491,7 @@
           <a:bodyPr wrap="square" lIns="0" tIns="0" rIns="0" bIns="0" rtlCol="0" anchor="ctr"/>
           <a:lstStyle/>
           <a:p>
-            <a:pPr algn="ctr" indent="0" marL="0">
+            <a:pPr marL="0" indent="0" algn="ctr">
               <a:buNone/>
             </a:pPr>
             <a:r>
@@ -1758,9 +1505,6 @@
               </a:rPr>
               <a:t>Ant</a:t>
             </a:r>
-            <a:pPr algn="ctr" indent="0" marL="0">
-              <a:buNone/>
-            </a:pPr>
             <a:r>
               <a:rPr lang="en-US" sz="7200" b="1" dirty="0">
                 <a:solidFill>
@@ -1772,9 +1516,6 @@
               </a:rPr>
               <a:t>é</a:t>
             </a:r>
-            <a:pPr algn="ctr" indent="0" marL="0">
-              <a:buNone/>
-            </a:pPr>
             <a:r>
               <a:rPr lang="en-US" sz="7200" b="1" dirty="0">
                 <a:solidFill>
@@ -1811,11 +1552,11 @@
           <a:bodyPr wrap="square" lIns="0" tIns="0" rIns="0" bIns="0" rtlCol="0" anchor="ctr"/>
           <a:lstStyle/>
           <a:p>
-            <a:pPr algn="ctr" indent="0" marL="0">
-              <a:buNone/>
-            </a:pPr>
-            <a:r>
-              <a:rPr lang="en-US" sz="1100" spc="300" kern="0" dirty="0">
+            <a:pPr marL="0" indent="0" algn="ctr">
+              <a:buNone/>
+            </a:pPr>
+            <a:r>
+              <a:rPr lang="en-US" sz="1100" kern="0" spc="300" dirty="0">
                 <a:solidFill>
                   <a:srgbClr val="E6E8F0"/>
                 </a:solidFill>
@@ -1851,6 +1592,13 @@
             <a:prstDash val="solid"/>
           </a:ln>
         </p:spPr>
+        <p:txBody>
+          <a:bodyPr/>
+          <a:lstStyle/>
+          <a:p>
+            <a:endParaRPr lang="pt-BR"/>
+          </a:p>
+        </p:txBody>
       </p:sp>
       <p:sp>
         <p:nvSpPr>
@@ -1873,7 +1621,7 @@
           <a:bodyPr wrap="square" lIns="0" tIns="0" rIns="0" bIns="0" rtlCol="0" anchor="ctr"/>
           <a:lstStyle/>
           <a:p>
-            <a:pPr algn="ctr" indent="0" marL="0">
+            <a:pPr marL="0" indent="0" algn="ctr">
               <a:buNone/>
             </a:pPr>
             <a:r>
@@ -1912,7 +1660,7 @@
           <a:bodyPr wrap="square" lIns="0" tIns="0" rIns="0" bIns="0" rtlCol="0" anchor="ctr"/>
           <a:lstStyle/>
           <a:p>
-            <a:pPr algn="ctr" indent="0" marL="0">
+            <a:pPr marL="0" indent="0" algn="ctr">
               <a:buNone/>
             </a:pPr>
             <a:r>
@@ -1951,11 +1699,11 @@
           <a:bodyPr wrap="square" lIns="0" tIns="0" rIns="0" bIns="0" rtlCol="0" anchor="ctr"/>
           <a:lstStyle/>
           <a:p>
-            <a:pPr algn="l" indent="0" marL="0">
-              <a:buNone/>
-            </a:pPr>
-            <a:r>
-              <a:rPr lang="en-US" sz="650" spc="120" kern="0" dirty="0">
+            <a:pPr marL="0" indent="0" algn="l">
+              <a:buNone/>
+            </a:pPr>
+            <a:r>
+              <a:rPr lang="en-US" sz="650" kern="0" spc="120" dirty="0">
                 <a:solidFill>
                   <a:srgbClr val="8A93A6"/>
                 </a:solidFill>
@@ -1990,7 +1738,7 @@
           <a:bodyPr wrap="square" lIns="0" tIns="0" rIns="0" bIns="0" rtlCol="0" anchor="ctr"/>
           <a:lstStyle/>
           <a:p>
-            <a:pPr algn="r" indent="0" marL="0">
+            <a:pPr marL="0" indent="0" algn="r">
               <a:buNone/>
             </a:pPr>
             <a:r>
@@ -2024,6 +1772,7 @@
         <a:solidFill>
           <a:srgbClr val="0B1220"/>
         </a:solidFill>
+        <a:effectLst/>
       </p:bgPr>
     </p:bg>
     <p:spTree>
@@ -2061,7 +1810,7 @@
           <a:bodyPr wrap="square" lIns="0" tIns="0" rIns="0" bIns="0" rtlCol="0" anchor="ctr"/>
           <a:lstStyle/>
           <a:p>
-            <a:pPr algn="l" indent="0" marL="0">
+            <a:pPr marL="0" indent="0" algn="l">
               <a:buNone/>
             </a:pPr>
             <a:r>
@@ -2075,9 +1824,6 @@
               </a:rPr>
               <a:t>09  </a:t>
             </a:r>
-            <a:pPr algn="l" indent="0" marL="0">
-              <a:buNone/>
-            </a:pPr>
             <a:r>
               <a:rPr lang="en-US" sz="2300" b="1" dirty="0">
                 <a:solidFill>
@@ -2114,7 +1860,7 @@
           <a:bodyPr wrap="square" lIns="0" tIns="0" rIns="0" bIns="0" rtlCol="0" anchor="ctr"/>
           <a:lstStyle/>
           <a:p>
-            <a:pPr algn="ctr" indent="0" marL="0">
+            <a:pPr marL="0" indent="0" algn="ctr">
               <a:lnSpc>
                 <a:spcPct val="125000"/>
               </a:lnSpc>
@@ -2129,14 +1875,52 @@
                 <a:ea typeface="Sora" pitchFamily="34" charset="-122"/>
                 <a:cs typeface="Sora" pitchFamily="34" charset="-120"/>
               </a:rPr>
-              <a:t>Compramos a viagem certa, na hora certa, pelo aluno — </a:t>
-            </a:r>
-            <a:pPr algn="ctr" indent="0" marL="0">
-              <a:lnSpc>
-                <a:spcPct val="125000"/>
-              </a:lnSpc>
-              <a:buNone/>
-            </a:pPr>
+              <a:t>Compramos a viagem certa, na hora certa, </a:t>
+            </a:r>
+            <a:r>
+              <a:rPr lang="en-US" sz="2400" b="1" dirty="0" err="1">
+                <a:solidFill>
+                  <a:srgbClr val="FFFFFF"/>
+                </a:solidFill>
+                <a:latin typeface="Sora" pitchFamily="34" charset="0"/>
+                <a:ea typeface="Sora" pitchFamily="34" charset="-122"/>
+                <a:cs typeface="Sora" pitchFamily="34" charset="-120"/>
+              </a:rPr>
+              <a:t>pelo</a:t>
+            </a:r>
+            <a:r>
+              <a:rPr lang="en-US" sz="2400" b="1" dirty="0">
+                <a:solidFill>
+                  <a:srgbClr val="FFFFFF"/>
+                </a:solidFill>
+                <a:latin typeface="Sora" pitchFamily="34" charset="0"/>
+                <a:ea typeface="Sora" pitchFamily="34" charset="-122"/>
+                <a:cs typeface="Sora" pitchFamily="34" charset="-120"/>
+              </a:rPr>
+              <a:t> </a:t>
+            </a:r>
+            <a:r>
+              <a:rPr lang="en-US" sz="2400" b="1" dirty="0" err="1">
+                <a:solidFill>
+                  <a:srgbClr val="FFFFFF"/>
+                </a:solidFill>
+                <a:latin typeface="Sora" pitchFamily="34" charset="0"/>
+                <a:ea typeface="Sora" pitchFamily="34" charset="-122"/>
+                <a:cs typeface="Sora" pitchFamily="34" charset="-120"/>
+              </a:rPr>
+              <a:t>aluno</a:t>
+            </a:r>
+            <a:r>
+              <a:rPr lang="en-US" sz="2400" b="1" dirty="0">
+                <a:solidFill>
+                  <a:srgbClr val="FFFFFF"/>
+                </a:solidFill>
+                <a:latin typeface="Sora" pitchFamily="34" charset="0"/>
+                <a:ea typeface="Sora" pitchFamily="34" charset="-122"/>
+                <a:cs typeface="Sora" pitchFamily="34" charset="-120"/>
+              </a:rPr>
+              <a:t>, </a:t>
+            </a:r>
             <a:r>
               <a:rPr lang="en-US" sz="2400" b="1" dirty="0">
                 <a:solidFill>
@@ -2178,13 +1962,20 @@
             <a:prstDash val="solid"/>
           </a:ln>
           <a:effectLst>
-            <a:outerShdw sx="100000" sy="100000" kx="0" ky="0" algn="bl" rotWithShape="0" blurRad="63500" dist="25400" dir="5400000">
+            <a:outerShdw blurRad="63500" dist="25400" dir="5400000" algn="bl" rotWithShape="0">
               <a:srgbClr val="0B1220">
                 <a:alpha val="16000"/>
               </a:srgbClr>
             </a:outerShdw>
           </a:effectLst>
         </p:spPr>
+        <p:txBody>
+          <a:bodyPr/>
+          <a:lstStyle/>
+          <a:p>
+            <a:endParaRPr lang="pt-BR" dirty="0"/>
+          </a:p>
+        </p:txBody>
       </p:sp>
       <p:sp>
         <p:nvSpPr>
@@ -2194,7 +1985,7 @@
         </p:nvSpPr>
         <p:spPr>
           <a:xfrm>
-            <a:off x="1295248" y="3063240"/>
+            <a:off x="1295248" y="2980112"/>
             <a:ext cx="4434840" cy="228600"/>
           </a:xfrm>
           <a:prstGeom prst="rect">
@@ -2207,11 +1998,11 @@
           <a:bodyPr wrap="square" lIns="0" tIns="0" rIns="0" bIns="0" rtlCol="0" anchor="ctr"/>
           <a:lstStyle/>
           <a:p>
-            <a:pPr indent="0" marL="0">
-              <a:buNone/>
-            </a:pPr>
-            <a:r>
-              <a:rPr lang="en-US" sz="950" spc="160" kern="0" dirty="0">
+            <a:pPr marL="0" indent="0">
+              <a:buNone/>
+            </a:pPr>
+            <a:r>
+              <a:rPr lang="en-US" sz="1050" kern="0" spc="160" dirty="0">
                 <a:solidFill>
                   <a:srgbClr val="F2B705"/>
                 </a:solidFill>
@@ -2221,7 +2012,7 @@
               </a:rPr>
               <a:t>PARA O ALUNO</a:t>
             </a:r>
-            <a:endParaRPr lang="en-US" sz="950" dirty="0"/>
+            <a:endParaRPr lang="en-US" sz="1050" dirty="0"/>
           </a:p>
         </p:txBody>
       </p:sp>
@@ -2244,6 +2035,13 @@
           </a:solidFill>
           <a:ln/>
         </p:spPr>
+        <p:txBody>
+          <a:bodyPr/>
+          <a:lstStyle/>
+          <a:p>
+            <a:endParaRPr lang="pt-BR"/>
+          </a:p>
+        </p:txBody>
       </p:sp>
       <p:sp>
         <p:nvSpPr>
@@ -2253,7 +2051,7 @@
         </p:nvSpPr>
         <p:spPr>
           <a:xfrm>
-            <a:off x="1505560" y="3429000"/>
+            <a:off x="1505560" y="3356263"/>
             <a:ext cx="4206240" cy="658368"/>
           </a:xfrm>
           <a:prstGeom prst="rect">
@@ -2266,14 +2064,14 @@
           <a:bodyPr wrap="square" lIns="0" tIns="0" rIns="0" bIns="0" rtlCol="0" anchor="t"/>
           <a:lstStyle/>
           <a:p>
-            <a:pPr indent="0" marL="0">
+            <a:pPr marL="0" indent="0">
               <a:lnSpc>
                 <a:spcPct val="115000"/>
               </a:lnSpc>
               <a:buNone/>
             </a:pPr>
             <a:r>
-              <a:rPr lang="en-US" sz="950" dirty="0">
+              <a:rPr lang="en-US" sz="1400" dirty="0">
                 <a:solidFill>
                   <a:srgbClr val="E6E8F0"/>
                 </a:solidFill>
@@ -2283,7 +2081,7 @@
               </a:rPr>
               <a:t>Todos os módulos resolvidos num só lugar, com custo previsível desde a matrícula</a:t>
             </a:r>
-            <a:endParaRPr lang="en-US" sz="950" dirty="0"/>
+            <a:endParaRPr lang="en-US" sz="1400" dirty="0"/>
           </a:p>
         </p:txBody>
       </p:sp>
@@ -2306,6 +2104,13 @@
           </a:solidFill>
           <a:ln/>
         </p:spPr>
+        <p:txBody>
+          <a:bodyPr/>
+          <a:lstStyle/>
+          <a:p>
+            <a:endParaRPr lang="pt-BR"/>
+          </a:p>
+        </p:txBody>
       </p:sp>
       <p:sp>
         <p:nvSpPr>
@@ -2315,7 +2120,7 @@
         </p:nvSpPr>
         <p:spPr>
           <a:xfrm>
-            <a:off x="1505560" y="4142232"/>
+            <a:off x="1505560" y="4069495"/>
             <a:ext cx="4206240" cy="658368"/>
           </a:xfrm>
           <a:prstGeom prst="rect">
@@ -2328,14 +2133,14 @@
           <a:bodyPr wrap="square" lIns="0" tIns="0" rIns="0" bIns="0" rtlCol="0" anchor="t"/>
           <a:lstStyle/>
           <a:p>
-            <a:pPr indent="0" marL="0">
+            <a:pPr marL="0" indent="0">
               <a:lnSpc>
                 <a:spcPct val="115000"/>
               </a:lnSpc>
               <a:buNone/>
             </a:pPr>
             <a:r>
-              <a:rPr lang="en-US" sz="950" dirty="0">
+              <a:rPr lang="en-US" sz="1400" dirty="0">
                 <a:solidFill>
                   <a:srgbClr val="E6E8F0"/>
                 </a:solidFill>
@@ -2345,7 +2150,7 @@
               </a:rPr>
               <a:t>20–30% de economia comprando na janela certa — sem abrir mão de companhia e milhas</a:t>
             </a:r>
-            <a:endParaRPr lang="en-US" sz="950" dirty="0"/>
+            <a:endParaRPr lang="en-US" sz="1400" dirty="0"/>
           </a:p>
         </p:txBody>
       </p:sp>
@@ -2368,6 +2173,13 @@
           </a:solidFill>
           <a:ln/>
         </p:spPr>
+        <p:txBody>
+          <a:bodyPr/>
+          <a:lstStyle/>
+          <a:p>
+            <a:endParaRPr lang="pt-BR"/>
+          </a:p>
+        </p:txBody>
       </p:sp>
       <p:sp>
         <p:nvSpPr>
@@ -2377,7 +2189,7 @@
         </p:nvSpPr>
         <p:spPr>
           <a:xfrm>
-            <a:off x="1505560" y="4855464"/>
+            <a:off x="1505560" y="4782727"/>
             <a:ext cx="4206240" cy="658368"/>
           </a:xfrm>
           <a:prstGeom prst="rect">
@@ -2390,14 +2202,14 @@
           <a:bodyPr wrap="square" lIns="0" tIns="0" rIns="0" bIns="0" rtlCol="0" anchor="t"/>
           <a:lstStyle/>
           <a:p>
-            <a:pPr indent="0" marL="0">
+            <a:pPr marL="0" indent="0">
               <a:lnSpc>
                 <a:spcPct val="115000"/>
               </a:lnSpc>
               <a:buNone/>
             </a:pPr>
             <a:r>
-              <a:rPr lang="en-US" sz="950" dirty="0">
+              <a:rPr lang="en-US" sz="1400" dirty="0">
                 <a:solidFill>
                   <a:srgbClr val="E6E8F0"/>
                 </a:solidFill>
@@ -2407,7 +2219,7 @@
               </a:rPr>
               <a:t>Chega a cada encontro tranquilo e focado no que importa: a aula</a:t>
             </a:r>
-            <a:endParaRPr lang="en-US" sz="950" dirty="0"/>
+            <a:endParaRPr lang="en-US" sz="1400" dirty="0"/>
           </a:p>
         </p:txBody>
       </p:sp>
@@ -2437,13 +2249,20 @@
             <a:prstDash val="solid"/>
           </a:ln>
           <a:effectLst>
-            <a:outerShdw sx="100000" sy="100000" kx="0" ky="0" algn="bl" rotWithShape="0" blurRad="63500" dist="25400" dir="5400000">
+            <a:outerShdw blurRad="63500" dist="25400" dir="5400000" algn="bl" rotWithShape="0">
               <a:srgbClr val="0B1220">
                 <a:alpha val="16000"/>
               </a:srgbClr>
             </a:outerShdw>
           </a:effectLst>
         </p:spPr>
+        <p:txBody>
+          <a:bodyPr/>
+          <a:lstStyle/>
+          <a:p>
+            <a:endParaRPr lang="pt-BR"/>
+          </a:p>
+        </p:txBody>
       </p:sp>
       <p:sp>
         <p:nvSpPr>
@@ -2453,7 +2272,7 @@
         </p:nvSpPr>
         <p:spPr>
           <a:xfrm>
-            <a:off x="6461608" y="3063240"/>
+            <a:off x="6461608" y="2980112"/>
             <a:ext cx="4434840" cy="228600"/>
           </a:xfrm>
           <a:prstGeom prst="rect">
@@ -2466,11 +2285,11 @@
           <a:bodyPr wrap="square" lIns="0" tIns="0" rIns="0" bIns="0" rtlCol="0" anchor="ctr"/>
           <a:lstStyle/>
           <a:p>
-            <a:pPr indent="0" marL="0">
-              <a:buNone/>
-            </a:pPr>
-            <a:r>
-              <a:rPr lang="en-US" sz="950" spc="160" kern="0" dirty="0">
+            <a:pPr marL="0" indent="0">
+              <a:buNone/>
+            </a:pPr>
+            <a:r>
+              <a:rPr lang="en-US" sz="1050" kern="0" spc="160" dirty="0">
                 <a:solidFill>
                   <a:srgbClr val="F2B705"/>
                 </a:solidFill>
@@ -2480,7 +2299,7 @@
               </a:rPr>
               <a:t>PARA A ESCOLA</a:t>
             </a:r>
-            <a:endParaRPr lang="en-US" sz="950" dirty="0"/>
+            <a:endParaRPr lang="en-US" sz="1050" dirty="0"/>
           </a:p>
         </p:txBody>
       </p:sp>
@@ -2503,6 +2322,13 @@
           </a:solidFill>
           <a:ln/>
         </p:spPr>
+        <p:txBody>
+          <a:bodyPr/>
+          <a:lstStyle/>
+          <a:p>
+            <a:endParaRPr lang="pt-BR"/>
+          </a:p>
+        </p:txBody>
       </p:sp>
       <p:sp>
         <p:nvSpPr>
@@ -2512,7 +2338,7 @@
         </p:nvSpPr>
         <p:spPr>
           <a:xfrm>
-            <a:off x="6671920" y="3429000"/>
+            <a:off x="6671920" y="3377045"/>
             <a:ext cx="4206240" cy="658368"/>
           </a:xfrm>
           <a:prstGeom prst="rect">
@@ -2525,14 +2351,14 @@
           <a:bodyPr wrap="square" lIns="0" tIns="0" rIns="0" bIns="0" rtlCol="0" anchor="t"/>
           <a:lstStyle/>
           <a:p>
-            <a:pPr indent="0" marL="0">
+            <a:pPr marL="0" indent="0">
               <a:lnSpc>
                 <a:spcPct val="115000"/>
               </a:lnSpc>
               <a:buNone/>
             </a:pPr>
             <a:r>
-              <a:rPr lang="en-US" sz="950" dirty="0">
+              <a:rPr lang="en-US" sz="1400" dirty="0">
                 <a:solidFill>
                   <a:srgbClr val="E6E8F0"/>
                 </a:solidFill>
@@ -2542,7 +2368,7 @@
               </a:rPr>
               <a:t>Aluno acolhido antes de cada módulo — NPS maior e menos reclamação na coordenação</a:t>
             </a:r>
-            <a:endParaRPr lang="en-US" sz="950" dirty="0"/>
+            <a:endParaRPr lang="en-US" sz="1400" dirty="0"/>
           </a:p>
         </p:txBody>
       </p:sp>
@@ -2565,6 +2391,13 @@
           </a:solidFill>
           <a:ln/>
         </p:spPr>
+        <p:txBody>
+          <a:bodyPr/>
+          <a:lstStyle/>
+          <a:p>
+            <a:endParaRPr lang="pt-BR"/>
+          </a:p>
+        </p:txBody>
       </p:sp>
       <p:sp>
         <p:nvSpPr>
@@ -2574,7 +2407,7 @@
         </p:nvSpPr>
         <p:spPr>
           <a:xfrm>
-            <a:off x="6671920" y="4142232"/>
+            <a:off x="6671920" y="4059104"/>
             <a:ext cx="4206240" cy="658368"/>
           </a:xfrm>
           <a:prstGeom prst="rect">
@@ -2587,14 +2420,14 @@
           <a:bodyPr wrap="square" lIns="0" tIns="0" rIns="0" bIns="0" rtlCol="0" anchor="t"/>
           <a:lstStyle/>
           <a:p>
-            <a:pPr indent="0" marL="0">
+            <a:pPr marL="0" indent="0">
               <a:lnSpc>
                 <a:spcPct val="115000"/>
               </a:lnSpc>
               <a:buNone/>
             </a:pPr>
             <a:r>
-              <a:rPr lang="en-US" sz="950" dirty="0">
+              <a:rPr lang="en-US" sz="1400" dirty="0">
                 <a:solidFill>
                   <a:srgbClr val="E6E8F0"/>
                 </a:solidFill>
@@ -2604,7 +2437,7 @@
               </a:rPr>
               <a:t>Zero atrito operacional e nenhuma obrigação imposta ao aluno</a:t>
             </a:r>
-            <a:endParaRPr lang="en-US" sz="950" dirty="0"/>
+            <a:endParaRPr lang="en-US" sz="1400" dirty="0"/>
           </a:p>
         </p:txBody>
       </p:sp>
@@ -2627,6 +2460,13 @@
           </a:solidFill>
           <a:ln/>
         </p:spPr>
+        <p:txBody>
+          <a:bodyPr/>
+          <a:lstStyle/>
+          <a:p>
+            <a:endParaRPr lang="pt-BR"/>
+          </a:p>
+        </p:txBody>
       </p:sp>
       <p:sp>
         <p:nvSpPr>
@@ -2636,7 +2476,7 @@
         </p:nvSpPr>
         <p:spPr>
           <a:xfrm>
-            <a:off x="6671920" y="4855464"/>
+            <a:off x="6671920" y="4782727"/>
             <a:ext cx="4206240" cy="658368"/>
           </a:xfrm>
           <a:prstGeom prst="rect">
@@ -2649,14 +2489,14 @@
           <a:bodyPr wrap="square" lIns="0" tIns="0" rIns="0" bIns="0" rtlCol="0" anchor="t"/>
           <a:lstStyle/>
           <a:p>
-            <a:pPr indent="0" marL="0">
+            <a:pPr marL="0" indent="0">
               <a:lnSpc>
                 <a:spcPct val="115000"/>
               </a:lnSpc>
               <a:buNone/>
             </a:pPr>
             <a:r>
-              <a:rPr lang="en-US" sz="950" dirty="0">
+              <a:rPr lang="en-US" sz="1400" dirty="0">
                 <a:solidFill>
                   <a:srgbClr val="E6E8F0"/>
                 </a:solidFill>
@@ -2666,7 +2506,7 @@
               </a:rPr>
               <a:t>Posicionamento premium: a experiência começa antes da sala de aula</a:t>
             </a:r>
-            <a:endParaRPr lang="en-US" sz="950" dirty="0"/>
+            <a:endParaRPr lang="en-US" sz="1400" dirty="0"/>
           </a:p>
         </p:txBody>
       </p:sp>
@@ -2691,7 +2531,7 @@
           <a:bodyPr wrap="square" lIns="0" tIns="0" rIns="0" bIns="0" rtlCol="0" anchor="ctr"/>
           <a:lstStyle/>
           <a:p>
-            <a:pPr algn="ctr" indent="0" marL="0">
+            <a:pPr marL="0" indent="0" algn="ctr">
               <a:buNone/>
             </a:pPr>
             <a:r>
@@ -2705,9 +2545,6 @@
               </a:rPr>
               <a:t>Ant</a:t>
             </a:r>
-            <a:pPr algn="ctr" indent="0" marL="0">
-              <a:buNone/>
-            </a:pPr>
             <a:r>
               <a:rPr lang="en-US" sz="2200" b="1" dirty="0">
                 <a:solidFill>
@@ -2719,9 +2556,6 @@
               </a:rPr>
               <a:t>é</a:t>
             </a:r>
-            <a:pPr algn="ctr" indent="0" marL="0">
-              <a:buNone/>
-            </a:pPr>
             <a:r>
               <a:rPr lang="en-US" sz="2200" b="1" dirty="0">
                 <a:solidFill>
@@ -2758,11 +2592,11 @@
           <a:bodyPr wrap="square" lIns="0" tIns="0" rIns="0" bIns="0" rtlCol="0" anchor="ctr"/>
           <a:lstStyle/>
           <a:p>
-            <a:pPr algn="ctr" indent="0" marL="0">
-              <a:buNone/>
-            </a:pPr>
-            <a:r>
-              <a:rPr lang="en-US" sz="750" spc="220" kern="0" dirty="0">
+            <a:pPr marL="0" indent="0" algn="ctr">
+              <a:buNone/>
+            </a:pPr>
+            <a:r>
+              <a:rPr lang="en-US" sz="750" kern="0" spc="220" dirty="0">
                 <a:solidFill>
                   <a:srgbClr val="E6E8F0"/>
                 </a:solidFill>
@@ -2797,11 +2631,11 @@
           <a:bodyPr wrap="square" lIns="0" tIns="0" rIns="0" bIns="0" rtlCol="0" anchor="ctr"/>
           <a:lstStyle/>
           <a:p>
-            <a:pPr algn="l" indent="0" marL="0">
-              <a:buNone/>
-            </a:pPr>
-            <a:r>
-              <a:rPr lang="en-US" sz="650" spc="120" kern="0" dirty="0">
+            <a:pPr marL="0" indent="0" algn="l">
+              <a:buNone/>
+            </a:pPr>
+            <a:r>
+              <a:rPr lang="en-US" sz="650" kern="0" spc="120" dirty="0">
                 <a:solidFill>
                   <a:srgbClr val="8A93A6"/>
                 </a:solidFill>
@@ -2836,7 +2670,7 @@
           <a:bodyPr wrap="square" lIns="0" tIns="0" rIns="0" bIns="0" rtlCol="0" anchor="ctr"/>
           <a:lstStyle/>
           <a:p>
-            <a:pPr algn="r" indent="0" marL="0">
+            <a:pPr marL="0" indent="0" algn="r">
               <a:buNone/>
             </a:pPr>
             <a:r>
@@ -2870,6 +2704,7 @@
         <a:solidFill>
           <a:srgbClr val="F7F8FA"/>
         </a:solidFill>
+        <a:effectLst/>
       </p:bgPr>
     </p:bg>
     <p:spTree>
@@ -2907,7 +2742,7 @@
           <a:bodyPr wrap="square" lIns="0" tIns="0" rIns="0" bIns="0" rtlCol="0" anchor="ctr"/>
           <a:lstStyle/>
           <a:p>
-            <a:pPr algn="l" indent="0" marL="0">
+            <a:pPr marL="0" indent="0" algn="l">
               <a:buNone/>
             </a:pPr>
             <a:r>
@@ -2921,9 +2756,6 @@
               </a:rPr>
               <a:t>01  </a:t>
             </a:r>
-            <a:pPr algn="l" indent="0" marL="0">
-              <a:buNone/>
-            </a:pPr>
             <a:r>
               <a:rPr lang="en-US" sz="2300" b="1" dirty="0">
                 <a:solidFill>
@@ -2960,7 +2792,7 @@
           <a:bodyPr wrap="square" lIns="0" tIns="0" rIns="0" bIns="0" rtlCol="0" anchor="t"/>
           <a:lstStyle/>
           <a:p>
-            <a:pPr algn="l" indent="0" marL="0">
+            <a:pPr marL="0" indent="0" algn="l">
               <a:lnSpc>
                 <a:spcPct val="120000"/>
               </a:lnSpc>
@@ -2977,12 +2809,6 @@
               </a:rPr>
               <a:t>A educação executiva cresce no Brasil — e ela é presencial e periódica. </a:t>
             </a:r>
-            <a:pPr algn="l" indent="0" marL="0">
-              <a:lnSpc>
-                <a:spcPct val="120000"/>
-              </a:lnSpc>
-              <a:buNone/>
-            </a:pPr>
             <a:r>
               <a:rPr lang="en-US" sz="1500" dirty="0">
                 <a:solidFill>
@@ -3024,13 +2850,20 @@
             <a:prstDash val="solid"/>
           </a:ln>
           <a:effectLst>
-            <a:outerShdw sx="100000" sy="100000" kx="0" ky="0" algn="bl" rotWithShape="0" blurRad="63500" dist="25400" dir="5400000">
+            <a:outerShdw blurRad="63500" dist="25400" dir="5400000" algn="bl" rotWithShape="0">
               <a:srgbClr val="0B1220">
                 <a:alpha val="16000"/>
               </a:srgbClr>
             </a:outerShdw>
           </a:effectLst>
         </p:spPr>
+        <p:txBody>
+          <a:bodyPr/>
+          <a:lstStyle/>
+          <a:p>
+            <a:endParaRPr lang="pt-BR"/>
+          </a:p>
+        </p:txBody>
       </p:sp>
       <p:sp>
         <p:nvSpPr>
@@ -3053,7 +2886,7 @@
           <a:bodyPr wrap="square" lIns="0" tIns="0" rIns="0" bIns="0" rtlCol="0" anchor="ctr"/>
           <a:lstStyle/>
           <a:p>
-            <a:pPr indent="0" marL="0">
+            <a:pPr marL="0" indent="0">
               <a:buNone/>
             </a:pPr>
             <a:r>
@@ -3092,14 +2925,14 @@
           <a:bodyPr wrap="square" lIns="0" tIns="0" rIns="0" bIns="0" rtlCol="0" anchor="ctr"/>
           <a:lstStyle/>
           <a:p>
-            <a:pPr indent="0" marL="0">
+            <a:pPr marL="0" indent="0">
               <a:lnSpc>
                 <a:spcPct val="105000"/>
               </a:lnSpc>
               <a:buNone/>
             </a:pPr>
             <a:r>
-              <a:rPr lang="en-US" sz="1150" dirty="0">
+              <a:rPr lang="en-US" sz="1400" dirty="0">
                 <a:solidFill>
                   <a:srgbClr val="0B1220"/>
                 </a:solidFill>
@@ -3109,7 +2942,7 @@
               </a:rPr>
               <a:t>Mercado em expansão</a:t>
             </a:r>
-            <a:endParaRPr lang="en-US" sz="1150" dirty="0"/>
+            <a:endParaRPr lang="en-US" sz="1400" dirty="0"/>
           </a:p>
         </p:txBody>
       </p:sp>
@@ -3134,14 +2967,14 @@
           <a:bodyPr wrap="square" lIns="0" tIns="0" rIns="0" bIns="0" rtlCol="0" anchor="t"/>
           <a:lstStyle/>
           <a:p>
-            <a:pPr indent="0" marL="0">
+            <a:pPr marL="0" indent="0">
               <a:lnSpc>
                 <a:spcPct val="122000"/>
               </a:lnSpc>
               <a:buNone/>
             </a:pPr>
             <a:r>
-              <a:rPr lang="en-US" sz="950" dirty="0">
+              <a:rPr lang="en-US" sz="1050" dirty="0">
                 <a:solidFill>
                   <a:srgbClr val="1B2435"/>
                 </a:solidFill>
@@ -3151,7 +2984,7 @@
               </a:rPr>
               <a:t>A demanda por educação executiva cresce cerca de 30% no Brasil — mais turmas, mais alunos viajando com regularidade.</a:t>
             </a:r>
-            <a:endParaRPr lang="en-US" sz="950" dirty="0"/>
+            <a:endParaRPr lang="en-US" sz="1050" dirty="0"/>
           </a:p>
         </p:txBody>
       </p:sp>
@@ -3181,13 +3014,20 @@
             <a:prstDash val="solid"/>
           </a:ln>
           <a:effectLst>
-            <a:outerShdw sx="100000" sy="100000" kx="0" ky="0" algn="bl" rotWithShape="0" blurRad="63500" dist="25400" dir="5400000">
+            <a:outerShdw blurRad="63500" dist="25400" dir="5400000" algn="bl" rotWithShape="0">
               <a:srgbClr val="0B1220">
                 <a:alpha val="16000"/>
               </a:srgbClr>
             </a:outerShdw>
           </a:effectLst>
         </p:spPr>
+        <p:txBody>
+          <a:bodyPr/>
+          <a:lstStyle/>
+          <a:p>
+            <a:endParaRPr lang="pt-BR"/>
+          </a:p>
+        </p:txBody>
       </p:sp>
       <p:sp>
         <p:nvSpPr>
@@ -3210,7 +3050,7 @@
           <a:bodyPr wrap="square" lIns="0" tIns="0" rIns="0" bIns="0" rtlCol="0" anchor="ctr"/>
           <a:lstStyle/>
           <a:p>
-            <a:pPr indent="0" marL="0">
+            <a:pPr marL="0" indent="0">
               <a:buNone/>
             </a:pPr>
             <a:r>
@@ -3249,14 +3089,14 @@
           <a:bodyPr wrap="square" lIns="0" tIns="0" rIns="0" bIns="0" rtlCol="0" anchor="ctr"/>
           <a:lstStyle/>
           <a:p>
-            <a:pPr indent="0" marL="0">
+            <a:pPr marL="0" indent="0">
               <a:lnSpc>
                 <a:spcPct val="105000"/>
               </a:lnSpc>
               <a:buNone/>
             </a:pPr>
             <a:r>
-              <a:rPr lang="en-US" sz="1150" dirty="0">
+              <a:rPr lang="en-US" sz="1400" dirty="0">
                 <a:solidFill>
                   <a:srgbClr val="0B1220"/>
                 </a:solidFill>
@@ -3266,7 +3106,7 @@
               </a:rPr>
               <a:t>Viagem recorrente</a:t>
             </a:r>
-            <a:endParaRPr lang="en-US" sz="1150" dirty="0"/>
+            <a:endParaRPr lang="en-US" sz="1400" dirty="0"/>
           </a:p>
         </p:txBody>
       </p:sp>
@@ -3291,14 +3131,14 @@
           <a:bodyPr wrap="square" lIns="0" tIns="0" rIns="0" bIns="0" rtlCol="0" anchor="t"/>
           <a:lstStyle/>
           <a:p>
-            <a:pPr indent="0" marL="0">
+            <a:pPr marL="0" indent="0">
               <a:lnSpc>
                 <a:spcPct val="122000"/>
               </a:lnSpc>
               <a:buNone/>
             </a:pPr>
             <a:r>
-              <a:rPr lang="en-US" sz="950" dirty="0">
+              <a:rPr lang="en-US" sz="1050" dirty="0">
                 <a:solidFill>
                   <a:srgbClr val="1B2435"/>
                 </a:solidFill>
@@ -3308,7 +3148,7 @@
               </a:rPr>
               <a:t>O aluno de fora repete a mesma operação de viagem a cada módulo, durante todo o programa — não é uma viagem, é uma série delas.</a:t>
             </a:r>
-            <a:endParaRPr lang="en-US" sz="950" dirty="0"/>
+            <a:endParaRPr lang="en-US" sz="1050" dirty="0"/>
           </a:p>
         </p:txBody>
       </p:sp>
@@ -3338,13 +3178,20 @@
             <a:prstDash val="solid"/>
           </a:ln>
           <a:effectLst>
-            <a:outerShdw sx="100000" sy="100000" kx="0" ky="0" algn="bl" rotWithShape="0" blurRad="63500" dist="25400" dir="5400000">
+            <a:outerShdw blurRad="63500" dist="25400" dir="5400000" algn="bl" rotWithShape="0">
               <a:srgbClr val="0B1220">
                 <a:alpha val="16000"/>
               </a:srgbClr>
             </a:outerShdw>
           </a:effectLst>
         </p:spPr>
+        <p:txBody>
+          <a:bodyPr/>
+          <a:lstStyle/>
+          <a:p>
+            <a:endParaRPr lang="pt-BR"/>
+          </a:p>
+        </p:txBody>
       </p:sp>
       <p:sp>
         <p:nvSpPr>
@@ -3367,7 +3214,7 @@
           <a:bodyPr wrap="square" lIns="0" tIns="0" rIns="0" bIns="0" rtlCol="0" anchor="ctr"/>
           <a:lstStyle/>
           <a:p>
-            <a:pPr indent="0" marL="0">
+            <a:pPr marL="0" indent="0">
               <a:buNone/>
             </a:pPr>
             <a:r>
@@ -3406,14 +3253,14 @@
           <a:bodyPr wrap="square" lIns="0" tIns="0" rIns="0" bIns="0" rtlCol="0" anchor="ctr"/>
           <a:lstStyle/>
           <a:p>
-            <a:pPr indent="0" marL="0">
+            <a:pPr marL="0" indent="0">
               <a:lnSpc>
                 <a:spcPct val="105000"/>
               </a:lnSpc>
               <a:buNone/>
             </a:pPr>
             <a:r>
-              <a:rPr lang="en-US" sz="1150" dirty="0">
+              <a:rPr lang="en-US" sz="1400" dirty="0">
                 <a:solidFill>
                   <a:srgbClr val="0B1220"/>
                 </a:solidFill>
@@ -3423,7 +3270,7 @@
               </a:rPr>
               <a:t>Mercado aéreo concentrado</a:t>
             </a:r>
-            <a:endParaRPr lang="en-US" sz="1150" dirty="0"/>
+            <a:endParaRPr lang="en-US" sz="1400" dirty="0"/>
           </a:p>
         </p:txBody>
       </p:sp>
@@ -3448,14 +3295,14 @@
           <a:bodyPr wrap="square" lIns="0" tIns="0" rIns="0" bIns="0" rtlCol="0" anchor="t"/>
           <a:lstStyle/>
           <a:p>
-            <a:pPr indent="0" marL="0">
+            <a:pPr marL="0" indent="0">
               <a:lnSpc>
                 <a:spcPct val="122000"/>
               </a:lnSpc>
               <a:buNone/>
             </a:pPr>
             <a:r>
-              <a:rPr lang="en-US" sz="950" dirty="0">
+              <a:rPr lang="en-US" sz="1050" dirty="0">
                 <a:solidFill>
                   <a:srgbClr val="1B2435"/>
                 </a:solidFill>
@@ -3465,7 +3312,7 @@
               </a:rPr>
               <a:t>LATAM, GOL e Azul dominam a malha. Rotas do Norte e Centro-Oeste pagam mais para chegar ao Sudeste, onde estão os campi.</a:t>
             </a:r>
-            <a:endParaRPr lang="en-US" sz="950" dirty="0"/>
+            <a:endParaRPr lang="en-US" sz="1050" dirty="0"/>
           </a:p>
         </p:txBody>
       </p:sp>
@@ -3495,13 +3342,20 @@
             <a:prstDash val="solid"/>
           </a:ln>
           <a:effectLst>
-            <a:outerShdw sx="100000" sy="100000" kx="0" ky="0" algn="bl" rotWithShape="0" blurRad="63500" dist="25400" dir="5400000">
+            <a:outerShdw blurRad="63500" dist="25400" dir="5400000" algn="bl" rotWithShape="0">
               <a:srgbClr val="0B1220">
                 <a:alpha val="16000"/>
               </a:srgbClr>
             </a:outerShdw>
           </a:effectLst>
         </p:spPr>
+        <p:txBody>
+          <a:bodyPr/>
+          <a:lstStyle/>
+          <a:p>
+            <a:endParaRPr lang="pt-BR"/>
+          </a:p>
+        </p:txBody>
       </p:sp>
       <p:sp>
         <p:nvSpPr>
@@ -3524,7 +3378,7 @@
           <a:bodyPr wrap="square" lIns="0" tIns="0" rIns="0" bIns="0" rtlCol="0" anchor="ctr"/>
           <a:lstStyle/>
           <a:p>
-            <a:pPr indent="0" marL="0">
+            <a:pPr marL="0" indent="0">
               <a:buNone/>
             </a:pPr>
             <a:r>
@@ -3563,14 +3417,14 @@
           <a:bodyPr wrap="square" lIns="0" tIns="0" rIns="0" bIns="0" rtlCol="0" anchor="ctr"/>
           <a:lstStyle/>
           <a:p>
-            <a:pPr indent="0" marL="0">
+            <a:pPr marL="0" indent="0">
               <a:lnSpc>
                 <a:spcPct val="105000"/>
               </a:lnSpc>
               <a:buNone/>
             </a:pPr>
             <a:r>
-              <a:rPr lang="en-US" sz="1150" dirty="0">
+              <a:rPr lang="en-US" sz="1400" dirty="0">
                 <a:solidFill>
                   <a:srgbClr val="0B1220"/>
                 </a:solidFill>
@@ -3580,7 +3434,7 @@
               </a:rPr>
               <a:t>Um cliente sem dono</a:t>
             </a:r>
-            <a:endParaRPr lang="en-US" sz="1150" dirty="0"/>
+            <a:endParaRPr lang="en-US" sz="1400" dirty="0"/>
           </a:p>
         </p:txBody>
       </p:sp>
@@ -3605,14 +3459,14 @@
           <a:bodyPr wrap="square" lIns="0" tIns="0" rIns="0" bIns="0" rtlCol="0" anchor="t"/>
           <a:lstStyle/>
           <a:p>
-            <a:pPr indent="0" marL="0">
+            <a:pPr marL="0" indent="0">
               <a:lnSpc>
                 <a:spcPct val="122000"/>
               </a:lnSpc>
               <a:buNone/>
             </a:pPr>
             <a:r>
-              <a:rPr lang="en-US" sz="950" dirty="0">
+              <a:rPr lang="en-US" sz="1050" dirty="0">
                 <a:solidFill>
                   <a:srgbClr val="1B2435"/>
                 </a:solidFill>
@@ -3622,7 +3476,7 @@
               </a:rPr>
               <a:t>O aluno-executivo é um órfão estrutural: as plataformas corporativas exigem CNPJ, e o varejo de viagem o trata como turista avulso.</a:t>
             </a:r>
-            <a:endParaRPr lang="en-US" sz="950" dirty="0"/>
+            <a:endParaRPr lang="en-US" sz="1050" dirty="0"/>
           </a:p>
         </p:txBody>
       </p:sp>
@@ -3647,7 +3501,7 @@
           <a:bodyPr wrap="square" lIns="0" tIns="0" rIns="0" bIns="0" rtlCol="0" anchor="ctr"/>
           <a:lstStyle/>
           <a:p>
-            <a:pPr indent="0" marL="0">
+            <a:pPr marL="0" indent="0">
               <a:buNone/>
             </a:pPr>
             <a:r>
@@ -3686,11 +3540,11 @@
           <a:bodyPr wrap="square" lIns="0" tIns="0" rIns="0" bIns="0" rtlCol="0" anchor="ctr"/>
           <a:lstStyle/>
           <a:p>
-            <a:pPr algn="l" indent="0" marL="0">
-              <a:buNone/>
-            </a:pPr>
-            <a:r>
-              <a:rPr lang="en-US" sz="650" spc="120" kern="0" dirty="0">
+            <a:pPr marL="0" indent="0" algn="l">
+              <a:buNone/>
+            </a:pPr>
+            <a:r>
+              <a:rPr lang="en-US" sz="650" kern="0" spc="120" dirty="0">
                 <a:solidFill>
                   <a:srgbClr val="9AA1AD"/>
                 </a:solidFill>
@@ -3725,7 +3579,7 @@
           <a:bodyPr wrap="square" lIns="0" tIns="0" rIns="0" bIns="0" rtlCol="0" anchor="ctr"/>
           <a:lstStyle/>
           <a:p>
-            <a:pPr algn="r" indent="0" marL="0">
+            <a:pPr marL="0" indent="0" algn="r">
               <a:buNone/>
             </a:pPr>
             <a:r>
@@ -3759,6 +3613,7 @@
         <a:solidFill>
           <a:srgbClr val="F7F8FA"/>
         </a:solidFill>
+        <a:effectLst/>
       </p:bgPr>
     </p:bg>
     <p:spTree>
@@ -3796,7 +3651,7 @@
           <a:bodyPr wrap="square" lIns="0" tIns="0" rIns="0" bIns="0" rtlCol="0" anchor="ctr"/>
           <a:lstStyle/>
           <a:p>
-            <a:pPr algn="l" indent="0" marL="0">
+            <a:pPr marL="0" indent="0" algn="l">
               <a:buNone/>
             </a:pPr>
             <a:r>
@@ -3810,9 +3665,6 @@
               </a:rPr>
               <a:t>02  </a:t>
             </a:r>
-            <a:pPr algn="l" indent="0" marL="0">
-              <a:buNone/>
-            </a:pPr>
             <a:r>
               <a:rPr lang="en-US" sz="2300" b="1" dirty="0">
                 <a:solidFill>
@@ -3854,13 +3706,20 @@
             <a:prstDash val="solid"/>
           </a:ln>
           <a:effectLst>
-            <a:outerShdw sx="100000" sy="100000" kx="0" ky="0" algn="bl" rotWithShape="0" blurRad="63500" dist="25400" dir="5400000">
+            <a:outerShdw blurRad="63500" dist="25400" dir="5400000" algn="bl" rotWithShape="0">
               <a:srgbClr val="0B1220">
                 <a:alpha val="16000"/>
               </a:srgbClr>
             </a:outerShdw>
           </a:effectLst>
         </p:spPr>
+        <p:txBody>
+          <a:bodyPr/>
+          <a:lstStyle/>
+          <a:p>
+            <a:endParaRPr lang="pt-BR"/>
+          </a:p>
+        </p:txBody>
       </p:sp>
       <p:sp>
         <p:nvSpPr>
@@ -3883,7 +3742,7 @@
           <a:bodyPr wrap="square" lIns="0" tIns="0" rIns="0" bIns="0" rtlCol="0" anchor="ctr"/>
           <a:lstStyle/>
           <a:p>
-            <a:pPr algn="l" indent="0" marL="0">
+            <a:pPr marL="0" indent="0" algn="l">
               <a:lnSpc>
                 <a:spcPct val="125000"/>
               </a:lnSpc>
@@ -3900,12 +3759,6 @@
               </a:rPr>
               <a:t>A logística de viagem para programas executivos é </a:t>
             </a:r>
-            <a:pPr algn="l" indent="0" marL="0">
-              <a:lnSpc>
-                <a:spcPct val="125000"/>
-              </a:lnSpc>
-              <a:buNone/>
-            </a:pPr>
             <a:r>
               <a:rPr lang="en-US" sz="1550" b="1" dirty="0">
                 <a:solidFill>
@@ -3917,12 +3770,6 @@
               </a:rPr>
               <a:t>fragmentada e reativa</a:t>
             </a:r>
-            <a:pPr algn="l" indent="0" marL="0">
-              <a:lnSpc>
-                <a:spcPct val="125000"/>
-              </a:lnSpc>
-              <a:buNone/>
-            </a:pPr>
             <a:r>
               <a:rPr lang="en-US" sz="1550" dirty="0">
                 <a:solidFill>
@@ -3959,7 +3806,7 @@
           <a:bodyPr wrap="square" lIns="0" tIns="0" rIns="0" bIns="0" rtlCol="0" anchor="ctr"/>
           <a:lstStyle/>
           <a:p>
-            <a:pPr indent="0" marL="0">
+            <a:pPr marL="0" indent="0">
               <a:buNone/>
             </a:pPr>
             <a:r>
@@ -4003,13 +3850,20 @@
             <a:prstDash val="solid"/>
           </a:ln>
           <a:effectLst>
-            <a:outerShdw sx="100000" sy="100000" kx="0" ky="0" algn="bl" rotWithShape="0" blurRad="63500" dist="25400" dir="5400000">
+            <a:outerShdw blurRad="63500" dist="25400" dir="5400000" algn="bl" rotWithShape="0">
               <a:srgbClr val="0B1220">
                 <a:alpha val="16000"/>
               </a:srgbClr>
             </a:outerShdw>
           </a:effectLst>
         </p:spPr>
+        <p:txBody>
+          <a:bodyPr/>
+          <a:lstStyle/>
+          <a:p>
+            <a:endParaRPr lang="pt-BR"/>
+          </a:p>
+        </p:txBody>
       </p:sp>
       <p:sp>
         <p:nvSpPr>
@@ -4032,7 +3886,7 @@
           <a:bodyPr wrap="square" lIns="0" tIns="0" rIns="0" bIns="0" rtlCol="0" anchor="ctr"/>
           <a:lstStyle/>
           <a:p>
-            <a:pPr indent="0" marL="0">
+            <a:pPr marL="0" indent="0">
               <a:buNone/>
             </a:pPr>
             <a:r>
@@ -4071,14 +3925,14 @@
           <a:bodyPr wrap="square" lIns="0" tIns="0" rIns="0" bIns="0" rtlCol="0" anchor="ctr"/>
           <a:lstStyle/>
           <a:p>
-            <a:pPr indent="0" marL="0">
+            <a:pPr marL="0" indent="0">
               <a:lnSpc>
                 <a:spcPct val="105000"/>
               </a:lnSpc>
               <a:buNone/>
             </a:pPr>
             <a:r>
-              <a:rPr lang="en-US" sz="1100" dirty="0">
+              <a:rPr lang="en-US" sz="1400" dirty="0">
                 <a:solidFill>
                   <a:srgbClr val="0B1220"/>
                 </a:solidFill>
@@ -4088,7 +3942,7 @@
               </a:rPr>
               <a:t>Sabe a data, compra tarde</a:t>
             </a:r>
-            <a:endParaRPr lang="en-US" sz="1100" dirty="0"/>
+            <a:endParaRPr lang="en-US" sz="1400" dirty="0"/>
           </a:p>
         </p:txBody>
       </p:sp>
@@ -4113,14 +3967,14 @@
           <a:bodyPr wrap="square" lIns="0" tIns="0" rIns="0" bIns="0" rtlCol="0" anchor="t"/>
           <a:lstStyle/>
           <a:p>
-            <a:pPr indent="0" marL="0">
+            <a:pPr marL="0" indent="0">
               <a:lnSpc>
                 <a:spcPct val="122000"/>
               </a:lnSpc>
               <a:buNone/>
             </a:pPr>
             <a:r>
-              <a:rPr lang="en-US" sz="950" dirty="0">
+              <a:rPr lang="en-US" sz="1050" dirty="0">
                 <a:solidFill>
                   <a:srgbClr val="1B2435"/>
                 </a:solidFill>
@@ -4130,7 +3984,7 @@
               </a:rPr>
               <a:t>O aluno conhece o calendário desde a matrícula — e ainda assim compra com menos de 30 dias. “Brasileiro deixa tudo pra cima da hora”: é comportamento, não falta de ferramenta.</a:t>
             </a:r>
-            <a:endParaRPr lang="en-US" sz="950" dirty="0"/>
+            <a:endParaRPr lang="en-US" sz="1050" dirty="0"/>
           </a:p>
         </p:txBody>
       </p:sp>
@@ -4160,13 +4014,20 @@
             <a:prstDash val="solid"/>
           </a:ln>
           <a:effectLst>
-            <a:outerShdw sx="100000" sy="100000" kx="0" ky="0" algn="bl" rotWithShape="0" blurRad="63500" dist="25400" dir="5400000">
+            <a:outerShdw blurRad="63500" dist="25400" dir="5400000" algn="bl" rotWithShape="0">
               <a:srgbClr val="0B1220">
                 <a:alpha val="16000"/>
               </a:srgbClr>
             </a:outerShdw>
           </a:effectLst>
         </p:spPr>
+        <p:txBody>
+          <a:bodyPr/>
+          <a:lstStyle/>
+          <a:p>
+            <a:endParaRPr lang="pt-BR"/>
+          </a:p>
+        </p:txBody>
       </p:sp>
       <p:sp>
         <p:nvSpPr>
@@ -4189,7 +4050,7 @@
           <a:bodyPr wrap="square" lIns="0" tIns="0" rIns="0" bIns="0" rtlCol="0" anchor="ctr"/>
           <a:lstStyle/>
           <a:p>
-            <a:pPr indent="0" marL="0">
+            <a:pPr marL="0" indent="0">
               <a:buNone/>
             </a:pPr>
             <a:r>
@@ -4228,14 +4089,14 @@
           <a:bodyPr wrap="square" lIns="0" tIns="0" rIns="0" bIns="0" rtlCol="0" anchor="ctr"/>
           <a:lstStyle/>
           <a:p>
-            <a:pPr indent="0" marL="0">
+            <a:pPr marL="0" indent="0">
               <a:lnSpc>
                 <a:spcPct val="105000"/>
               </a:lnSpc>
               <a:buNone/>
             </a:pPr>
             <a:r>
-              <a:rPr lang="en-US" sz="1100" dirty="0">
+              <a:rPr lang="en-US" sz="1400" dirty="0">
                 <a:solidFill>
                   <a:srgbClr val="0B1220"/>
                 </a:solidFill>
@@ -4245,7 +4106,7 @@
               </a:rPr>
               <a:t>Pagando 2–3× mais</a:t>
             </a:r>
-            <a:endParaRPr lang="en-US" sz="1100" dirty="0"/>
+            <a:endParaRPr lang="en-US" sz="1400" dirty="0"/>
           </a:p>
         </p:txBody>
       </p:sp>
@@ -4270,14 +4131,14 @@
           <a:bodyPr wrap="square" lIns="0" tIns="0" rIns="0" bIns="0" rtlCol="0" anchor="t"/>
           <a:lstStyle/>
           <a:p>
-            <a:pPr indent="0" marL="0">
+            <a:pPr marL="0" indent="0">
               <a:lnSpc>
                 <a:spcPct val="122000"/>
               </a:lnSpc>
               <a:buNone/>
             </a:pPr>
             <a:r>
-              <a:rPr lang="en-US" sz="950" dirty="0">
+              <a:rPr lang="en-US" sz="1050" dirty="0">
                 <a:solidFill>
                   <a:srgbClr val="1B2435"/>
                 </a:solidFill>
@@ -4287,7 +4148,7 @@
               </a:rPr>
               <a:t>Comprar a menos de 7 dias do voo custa 2 a 3 vezes mais do que com 21+ dias de antecedência. A janela certa existe — mas ninguém a aciona pelo aluno.</a:t>
             </a:r>
-            <a:endParaRPr lang="en-US" sz="950" dirty="0"/>
+            <a:endParaRPr lang="en-US" sz="1050" dirty="0"/>
           </a:p>
         </p:txBody>
       </p:sp>
@@ -4317,13 +4178,20 @@
             <a:prstDash val="solid"/>
           </a:ln>
           <a:effectLst>
-            <a:outerShdw sx="100000" sy="100000" kx="0" ky="0" algn="bl" rotWithShape="0" blurRad="63500" dist="25400" dir="5400000">
+            <a:outerShdw blurRad="63500" dist="25400" dir="5400000" algn="bl" rotWithShape="0">
               <a:srgbClr val="0B1220">
                 <a:alpha val="16000"/>
               </a:srgbClr>
             </a:outerShdw>
           </a:effectLst>
         </p:spPr>
+        <p:txBody>
+          <a:bodyPr/>
+          <a:lstStyle/>
+          <a:p>
+            <a:endParaRPr lang="pt-BR"/>
+          </a:p>
+        </p:txBody>
       </p:sp>
       <p:sp>
         <p:nvSpPr>
@@ -4346,7 +4214,7 @@
           <a:bodyPr wrap="square" lIns="0" tIns="0" rIns="0" bIns="0" rtlCol="0" anchor="ctr"/>
           <a:lstStyle/>
           <a:p>
-            <a:pPr indent="0" marL="0">
+            <a:pPr marL="0" indent="0">
               <a:buNone/>
             </a:pPr>
             <a:r>
@@ -4385,14 +4253,14 @@
           <a:bodyPr wrap="square" lIns="0" tIns="0" rIns="0" bIns="0" rtlCol="0" anchor="ctr"/>
           <a:lstStyle/>
           <a:p>
-            <a:pPr indent="0" marL="0">
+            <a:pPr marL="0" indent="0">
               <a:lnSpc>
                 <a:spcPct val="105000"/>
               </a:lnSpc>
               <a:buNone/>
             </a:pPr>
             <a:r>
-              <a:rPr lang="en-US" sz="1100" dirty="0">
+              <a:rPr lang="en-US" sz="1400" dirty="0">
                 <a:solidFill>
                   <a:srgbClr val="0B1220"/>
                 </a:solidFill>
@@ -4402,7 +4270,7 @@
               </a:rPr>
               <a:t>Cada módulo, um projeto</a:t>
             </a:r>
-            <a:endParaRPr lang="en-US" sz="1100" dirty="0"/>
+            <a:endParaRPr lang="en-US" sz="1400" dirty="0"/>
           </a:p>
         </p:txBody>
       </p:sp>
@@ -4427,14 +4295,14 @@
           <a:bodyPr wrap="square" lIns="0" tIns="0" rIns="0" bIns="0" rtlCol="0" anchor="t"/>
           <a:lstStyle/>
           <a:p>
-            <a:pPr indent="0" marL="0">
+            <a:pPr marL="0" indent="0">
               <a:lnSpc>
                 <a:spcPct val="122000"/>
               </a:lnSpc>
               <a:buNone/>
             </a:pPr>
             <a:r>
-              <a:rPr lang="en-US" sz="950" dirty="0">
+              <a:rPr lang="en-US" sz="1050" dirty="0">
                 <a:solidFill>
                   <a:srgbClr val="1B2435"/>
                 </a:solidFill>
@@ -4444,7 +4312,7 @@
               </a:rPr>
               <a:t>Voo num app, hotel noutro, traslado num terceiro — e o reembolso fechado na planilha. A operação inteira se repete a cada encontro.</a:t>
             </a:r>
-            <a:endParaRPr lang="en-US" sz="950" dirty="0"/>
+            <a:endParaRPr lang="en-US" sz="1050" dirty="0"/>
           </a:p>
         </p:txBody>
       </p:sp>
@@ -4474,13 +4342,20 @@
             <a:prstDash val="solid"/>
           </a:ln>
           <a:effectLst>
-            <a:outerShdw sx="100000" sy="100000" kx="0" ky="0" algn="bl" rotWithShape="0" blurRad="63500" dist="25400" dir="5400000">
+            <a:outerShdw blurRad="63500" dist="25400" dir="5400000" algn="bl" rotWithShape="0">
               <a:srgbClr val="0B1220">
                 <a:alpha val="16000"/>
               </a:srgbClr>
             </a:outerShdw>
           </a:effectLst>
         </p:spPr>
+        <p:txBody>
+          <a:bodyPr/>
+          <a:lstStyle/>
+          <a:p>
+            <a:endParaRPr lang="pt-BR"/>
+          </a:p>
+        </p:txBody>
       </p:sp>
       <p:sp>
         <p:nvSpPr>
@@ -4503,7 +4378,7 @@
           <a:bodyPr wrap="square" lIns="0" tIns="0" rIns="0" bIns="0" rtlCol="0" anchor="ctr"/>
           <a:lstStyle/>
           <a:p>
-            <a:pPr indent="0" marL="0">
+            <a:pPr marL="0" indent="0">
               <a:buNone/>
             </a:pPr>
             <a:r>
@@ -4542,14 +4417,14 @@
           <a:bodyPr wrap="square" lIns="0" tIns="0" rIns="0" bIns="0" rtlCol="0" anchor="ctr"/>
           <a:lstStyle/>
           <a:p>
-            <a:pPr indent="0" marL="0">
+            <a:pPr marL="0" indent="0">
               <a:lnSpc>
                 <a:spcPct val="105000"/>
               </a:lnSpc>
               <a:buNone/>
             </a:pPr>
             <a:r>
-              <a:rPr lang="en-US" sz="1100" dirty="0">
+              <a:rPr lang="en-US" sz="1400" dirty="0">
                 <a:solidFill>
                   <a:srgbClr val="0B1220"/>
                 </a:solidFill>
@@ -4559,7 +4434,7 @@
               </a:rPr>
               <a:t>Custo sem visibilidade</a:t>
             </a:r>
-            <a:endParaRPr lang="en-US" sz="1100" dirty="0"/>
+            <a:endParaRPr lang="en-US" sz="1400" dirty="0"/>
           </a:p>
         </p:txBody>
       </p:sp>
@@ -4584,14 +4459,14 @@
           <a:bodyPr wrap="square" lIns="0" tIns="0" rIns="0" bIns="0" rtlCol="0" anchor="t"/>
           <a:lstStyle/>
           <a:p>
-            <a:pPr indent="0" marL="0">
+            <a:pPr marL="0" indent="0">
               <a:lnSpc>
                 <a:spcPct val="122000"/>
               </a:lnSpc>
               <a:buNone/>
             </a:pPr>
             <a:r>
-              <a:rPr lang="en-US" sz="950" dirty="0">
+              <a:rPr lang="en-US" sz="1050" dirty="0">
                 <a:solidFill>
                   <a:srgbClr val="1B2435"/>
                 </a:solidFill>
@@ -4601,7 +4476,7 @@
               </a:rPr>
               <a:t>Ninguém consegue dizer quanto o programa vai custar em viagens até o fim. O orçamento vira surpresa, módulo a módulo.</a:t>
             </a:r>
-            <a:endParaRPr lang="en-US" sz="950" dirty="0"/>
+            <a:endParaRPr lang="en-US" sz="1050" dirty="0"/>
           </a:p>
         </p:txBody>
       </p:sp>
@@ -4626,7 +4501,7 @@
           <a:bodyPr wrap="square" lIns="0" tIns="0" rIns="0" bIns="0" rtlCol="0" anchor="ctr"/>
           <a:lstStyle/>
           <a:p>
-            <a:pPr indent="0" marL="0">
+            <a:pPr marL="0" indent="0">
               <a:buNone/>
             </a:pPr>
             <a:r>
@@ -4665,11 +4540,11 @@
           <a:bodyPr wrap="square" lIns="0" tIns="0" rIns="0" bIns="0" rtlCol="0" anchor="ctr"/>
           <a:lstStyle/>
           <a:p>
-            <a:pPr algn="l" indent="0" marL="0">
-              <a:buNone/>
-            </a:pPr>
-            <a:r>
-              <a:rPr lang="en-US" sz="650" spc="120" kern="0" dirty="0">
+            <a:pPr marL="0" indent="0" algn="l">
+              <a:buNone/>
+            </a:pPr>
+            <a:r>
+              <a:rPr lang="en-US" sz="650" kern="0" spc="120" dirty="0">
                 <a:solidFill>
                   <a:srgbClr val="9AA1AD"/>
                 </a:solidFill>
@@ -4704,7 +4579,7 @@
           <a:bodyPr wrap="square" lIns="0" tIns="0" rIns="0" bIns="0" rtlCol="0" anchor="ctr"/>
           <a:lstStyle/>
           <a:p>
-            <a:pPr algn="r" indent="0" marL="0">
+            <a:pPr marL="0" indent="0" algn="r">
               <a:buNone/>
             </a:pPr>
             <a:r>
@@ -4738,6 +4613,7 @@
         <a:solidFill>
           <a:srgbClr val="0B1220"/>
         </a:solidFill>
+        <a:effectLst/>
       </p:bgPr>
     </p:bg>
     <p:spTree>
@@ -4775,7 +4651,7 @@
           <a:bodyPr wrap="square" lIns="0" tIns="0" rIns="0" bIns="0" rtlCol="0" anchor="ctr"/>
           <a:lstStyle/>
           <a:p>
-            <a:pPr algn="l" indent="0" marL="0">
+            <a:pPr marL="0" indent="0" algn="l">
               <a:buNone/>
             </a:pPr>
             <a:r>
@@ -4789,9 +4665,6 @@
               </a:rPr>
               <a:t>03  </a:t>
             </a:r>
-            <a:pPr algn="l" indent="0" marL="0">
-              <a:buNone/>
-            </a:pPr>
             <a:r>
               <a:rPr lang="en-US" sz="2300" b="1" dirty="0">
                 <a:solidFill>
@@ -4828,7 +4701,7 @@
           <a:bodyPr wrap="square" lIns="0" tIns="0" rIns="0" bIns="0" rtlCol="0" anchor="ctr"/>
           <a:lstStyle/>
           <a:p>
-            <a:pPr algn="l" indent="0" marL="0">
+            <a:pPr marL="0" indent="0" algn="l">
               <a:buNone/>
             </a:pPr>
             <a:r>
@@ -4842,9 +4715,6 @@
               </a:rPr>
               <a:t>Ant</a:t>
             </a:r>
-            <a:pPr algn="l" indent="0" marL="0">
-              <a:buNone/>
-            </a:pPr>
             <a:r>
               <a:rPr lang="en-US" sz="4800" b="1" dirty="0">
                 <a:solidFill>
@@ -4856,9 +4726,6 @@
               </a:rPr>
               <a:t>é</a:t>
             </a:r>
-            <a:pPr algn="l" indent="0" marL="0">
-              <a:buNone/>
-            </a:pPr>
             <a:r>
               <a:rPr lang="en-US" sz="4800" b="1" dirty="0">
                 <a:solidFill>
@@ -4895,11 +4762,11 @@
           <a:bodyPr wrap="square" lIns="0" tIns="0" rIns="0" bIns="0" rtlCol="0" anchor="ctr"/>
           <a:lstStyle/>
           <a:p>
-            <a:pPr algn="l" indent="0" marL="0">
-              <a:buNone/>
-            </a:pPr>
-            <a:r>
-              <a:rPr lang="en-US" sz="1000" spc="240" kern="0" dirty="0">
+            <a:pPr marL="0" indent="0" algn="l">
+              <a:buNone/>
+            </a:pPr>
+            <a:r>
+              <a:rPr lang="en-US" sz="1000" kern="0" spc="240" dirty="0">
                 <a:solidFill>
                   <a:srgbClr val="F2B705"/>
                 </a:solidFill>
@@ -4934,7 +4801,7 @@
           <a:bodyPr wrap="square" lIns="0" tIns="0" rIns="0" bIns="0" rtlCol="0" anchor="ctr"/>
           <a:lstStyle/>
           <a:p>
-            <a:pPr algn="l" indent="0" marL="0">
+            <a:pPr marL="0" indent="0" algn="l">
               <a:buNone/>
             </a:pPr>
             <a:r>
@@ -4948,9 +4815,6 @@
               </a:rPr>
               <a:t>Antévia = antes + via. </a:t>
             </a:r>
-            <a:pPr algn="l" indent="0" marL="0">
-              <a:buNone/>
-            </a:pPr>
             <a:r>
               <a:rPr lang="en-US" sz="850" dirty="0">
                 <a:solidFill>
@@ -4960,7 +4824,29 @@
                 <a:ea typeface="Inter" pitchFamily="34" charset="-122"/>
                 <a:cs typeface="Inter" pitchFamily="34" charset="-120"/>
               </a:rPr>
-              <a:t>O caminho resolvido antes da hora. Busca preliminar no INPI (jun/2026) sem registro conflitante.</a:t>
+              <a:t>O caminho </a:t>
+            </a:r>
+            <a:r>
+              <a:rPr lang="en-US" sz="900" dirty="0">
+                <a:solidFill>
+                  <a:srgbClr val="AEB6C6"/>
+                </a:solidFill>
+                <a:latin typeface="Inter" pitchFamily="34" charset="0"/>
+                <a:ea typeface="Inter" pitchFamily="34" charset="-122"/>
+                <a:cs typeface="Inter" pitchFamily="34" charset="-120"/>
+              </a:rPr>
+              <a:t>resolvido</a:t>
+            </a:r>
+            <a:r>
+              <a:rPr lang="en-US" sz="850" dirty="0">
+                <a:solidFill>
+                  <a:srgbClr val="AEB6C6"/>
+                </a:solidFill>
+                <a:latin typeface="Inter" pitchFamily="34" charset="0"/>
+                <a:ea typeface="Inter" pitchFamily="34" charset="-122"/>
+                <a:cs typeface="Inter" pitchFamily="34" charset="-120"/>
+              </a:rPr>
+              <a:t> antes da hora. Busca preliminar no INPI (jun/2026) sem registro conflitante.</a:t>
             </a:r>
             <a:endParaRPr lang="en-US" sz="850" dirty="0"/>
           </a:p>
@@ -4987,7 +4873,7 @@
           <a:bodyPr wrap="square" lIns="0" tIns="0" rIns="0" bIns="0" rtlCol="0" anchor="t"/>
           <a:lstStyle/>
           <a:p>
-            <a:pPr algn="l" indent="0" marL="0">
+            <a:pPr marL="0" indent="0" algn="just">
               <a:lnSpc>
                 <a:spcPct val="130000"/>
               </a:lnSpc>
@@ -5004,12 +4890,6 @@
               </a:rPr>
               <a:t>O concierge de viagem do aluno-executivo</a:t>
             </a:r>
-            <a:pPr algn="l" indent="0" marL="0">
-              <a:lnSpc>
-                <a:spcPct val="130000"/>
-              </a:lnSpc>
-              <a:buNone/>
-            </a:pPr>
             <a:r>
               <a:rPr lang="en-US" sz="1650" dirty="0">
                 <a:solidFill>
@@ -5019,7 +4899,51 @@
                 <a:ea typeface="Sora" pitchFamily="34" charset="-122"/>
                 <a:cs typeface="Sora" pitchFamily="34" charset="-120"/>
               </a:rPr>
-              <a:t>: uma plataforma integrada ao calendário acadêmico que antecipa e organiza passagem, hotel e traslado de todos os módulos em um só lugar — com custo previsível desde o início e a liberdade de manter companhia e milhas.</a:t>
+              <a:t>: uma plataforma integrada ao calendário acadêmico que antecipa e organiza passagem, hotel e traslado de todos os módulos em um </a:t>
+            </a:r>
+            <a:r>
+              <a:rPr lang="en-US" sz="1650" dirty="0" err="1">
+                <a:solidFill>
+                  <a:srgbClr val="FFFFFF"/>
+                </a:solidFill>
+                <a:latin typeface="Sora" pitchFamily="34" charset="0"/>
+                <a:ea typeface="Sora" pitchFamily="34" charset="-122"/>
+                <a:cs typeface="Sora" pitchFamily="34" charset="-120"/>
+              </a:rPr>
+              <a:t>só</a:t>
+            </a:r>
+            <a:r>
+              <a:rPr lang="en-US" sz="1650" dirty="0">
+                <a:solidFill>
+                  <a:srgbClr val="FFFFFF"/>
+                </a:solidFill>
+                <a:latin typeface="Sora" pitchFamily="34" charset="0"/>
+                <a:ea typeface="Sora" pitchFamily="34" charset="-122"/>
+                <a:cs typeface="Sora" pitchFamily="34" charset="-120"/>
+              </a:rPr>
+              <a:t> </a:t>
+            </a:r>
+            <a:r>
+              <a:rPr lang="en-US" sz="1650" dirty="0" err="1">
+                <a:solidFill>
+                  <a:srgbClr val="FFFFFF"/>
+                </a:solidFill>
+                <a:latin typeface="Sora" pitchFamily="34" charset="0"/>
+                <a:ea typeface="Sora" pitchFamily="34" charset="-122"/>
+                <a:cs typeface="Sora" pitchFamily="34" charset="-120"/>
+              </a:rPr>
+              <a:t>lugar</a:t>
+            </a:r>
+            <a:r>
+              <a:rPr lang="en-US" sz="1650" dirty="0">
+                <a:solidFill>
+                  <a:srgbClr val="FFFFFF"/>
+                </a:solidFill>
+                <a:latin typeface="Sora" pitchFamily="34" charset="0"/>
+                <a:ea typeface="Sora" pitchFamily="34" charset="-122"/>
+                <a:cs typeface="Sora" pitchFamily="34" charset="-120"/>
+              </a:rPr>
+              <a:t>. com custo previsível desde o início e a liberdade de manter companhia e milhas.</a:t>
             </a:r>
             <a:endParaRPr lang="en-US" sz="1650" dirty="0"/>
           </a:p>
@@ -5051,13 +4975,20 @@
             <a:prstDash val="solid"/>
           </a:ln>
           <a:effectLst>
-            <a:outerShdw sx="100000" sy="100000" kx="0" ky="0" algn="bl" rotWithShape="0" blurRad="63500" dist="25400" dir="5400000">
+            <a:outerShdw blurRad="63500" dist="25400" dir="5400000" algn="bl" rotWithShape="0">
               <a:srgbClr val="0B1220">
                 <a:alpha val="16000"/>
               </a:srgbClr>
             </a:outerShdw>
           </a:effectLst>
         </p:spPr>
+        <p:txBody>
+          <a:bodyPr/>
+          <a:lstStyle/>
+          <a:p>
+            <a:endParaRPr lang="pt-BR"/>
+          </a:p>
+        </p:txBody>
       </p:sp>
       <p:sp>
         <p:nvSpPr>
@@ -5080,11 +5011,11 @@
           <a:bodyPr wrap="square" lIns="0" tIns="0" rIns="0" bIns="0" rtlCol="0" anchor="ctr"/>
           <a:lstStyle/>
           <a:p>
-            <a:pPr indent="0" marL="0">
-              <a:buNone/>
-            </a:pPr>
-            <a:r>
-              <a:rPr lang="en-US" sz="900" spc="160" kern="0" dirty="0">
+            <a:pPr marL="0" indent="0">
+              <a:buNone/>
+            </a:pPr>
+            <a:r>
+              <a:rPr lang="en-US" sz="1100" kern="0" spc="160" dirty="0">
                 <a:solidFill>
                   <a:srgbClr val="F2B705"/>
                 </a:solidFill>
@@ -5094,7 +5025,7 @@
               </a:rPr>
               <a:t>ANTECIPAÇÃO</a:t>
             </a:r>
-            <a:endParaRPr lang="en-US" sz="900" dirty="0"/>
+            <a:endParaRPr lang="en-US" sz="1100" dirty="0"/>
           </a:p>
         </p:txBody>
       </p:sp>
@@ -5119,14 +5050,14 @@
           <a:bodyPr wrap="square" lIns="0" tIns="0" rIns="0" bIns="0" rtlCol="0" anchor="t"/>
           <a:lstStyle/>
           <a:p>
-            <a:pPr indent="0" marL="0">
+            <a:pPr marL="0" indent="0">
               <a:lnSpc>
                 <a:spcPct val="120000"/>
               </a:lnSpc>
               <a:buNone/>
             </a:pPr>
             <a:r>
-              <a:rPr lang="en-US" sz="900" dirty="0">
+              <a:rPr lang="en-US" sz="1100" dirty="0">
                 <a:solidFill>
                   <a:srgbClr val="E6E8F0"/>
                 </a:solidFill>
@@ -5136,7 +5067,7 @@
               </a:rPr>
               <a:t>Planejamos cada detalhe para que o aluno esteja sempre à frente — a compra acontece na janela certa, não em cima da hora.</a:t>
             </a:r>
-            <a:endParaRPr lang="en-US" sz="900" dirty="0"/>
+            <a:endParaRPr lang="en-US" sz="1100" dirty="0"/>
           </a:p>
         </p:txBody>
       </p:sp>
@@ -5166,13 +5097,20 @@
             <a:prstDash val="solid"/>
           </a:ln>
           <a:effectLst>
-            <a:outerShdw sx="100000" sy="100000" kx="0" ky="0" algn="bl" rotWithShape="0" blurRad="63500" dist="25400" dir="5400000">
+            <a:outerShdw blurRad="63500" dist="25400" dir="5400000" algn="bl" rotWithShape="0">
               <a:srgbClr val="0B1220">
                 <a:alpha val="16000"/>
               </a:srgbClr>
             </a:outerShdw>
           </a:effectLst>
         </p:spPr>
+        <p:txBody>
+          <a:bodyPr/>
+          <a:lstStyle/>
+          <a:p>
+            <a:endParaRPr lang="pt-BR"/>
+          </a:p>
+        </p:txBody>
       </p:sp>
       <p:sp>
         <p:nvSpPr>
@@ -5195,11 +5133,11 @@
           <a:bodyPr wrap="square" lIns="0" tIns="0" rIns="0" bIns="0" rtlCol="0" anchor="ctr"/>
           <a:lstStyle/>
           <a:p>
-            <a:pPr indent="0" marL="0">
-              <a:buNone/>
-            </a:pPr>
-            <a:r>
-              <a:rPr lang="en-US" sz="900" spc="160" kern="0" dirty="0">
+            <a:pPr marL="0" indent="0">
+              <a:buNone/>
+            </a:pPr>
+            <a:r>
+              <a:rPr lang="en-US" sz="1100" kern="0" spc="160" dirty="0">
                 <a:solidFill>
                   <a:srgbClr val="F2B705"/>
                 </a:solidFill>
@@ -5209,7 +5147,7 @@
               </a:rPr>
               <a:t>CAMINHO</a:t>
             </a:r>
-            <a:endParaRPr lang="en-US" sz="900" dirty="0"/>
+            <a:endParaRPr lang="en-US" sz="1100" dirty="0"/>
           </a:p>
         </p:txBody>
       </p:sp>
@@ -5234,14 +5172,14 @@
           <a:bodyPr wrap="square" lIns="0" tIns="0" rIns="0" bIns="0" rtlCol="0" anchor="t"/>
           <a:lstStyle/>
           <a:p>
-            <a:pPr indent="0" marL="0">
+            <a:pPr marL="0" indent="0">
               <a:lnSpc>
                 <a:spcPct val="120000"/>
               </a:lnSpc>
               <a:buNone/>
             </a:pPr>
             <a:r>
-              <a:rPr lang="en-US" sz="900" dirty="0">
+              <a:rPr lang="en-US" sz="1100" dirty="0">
                 <a:solidFill>
                   <a:srgbClr val="E6E8F0"/>
                 </a:solidFill>
@@ -5251,7 +5189,7 @@
               </a:rPr>
               <a:t>Conectamos etapas e pessoas — calendário, bloqueios, voo, hotel e traslado — para tornar a jornada simples do início ao fim.</a:t>
             </a:r>
-            <a:endParaRPr lang="en-US" sz="900" dirty="0"/>
+            <a:endParaRPr lang="en-US" sz="1100" dirty="0"/>
           </a:p>
         </p:txBody>
       </p:sp>
@@ -5281,13 +5219,20 @@
             <a:prstDash val="solid"/>
           </a:ln>
           <a:effectLst>
-            <a:outerShdw sx="100000" sy="100000" kx="0" ky="0" algn="bl" rotWithShape="0" blurRad="63500" dist="25400" dir="5400000">
+            <a:outerShdw blurRad="63500" dist="25400" dir="5400000" algn="bl" rotWithShape="0">
               <a:srgbClr val="0B1220">
                 <a:alpha val="16000"/>
               </a:srgbClr>
             </a:outerShdw>
           </a:effectLst>
         </p:spPr>
+        <p:txBody>
+          <a:bodyPr/>
+          <a:lstStyle/>
+          <a:p>
+            <a:endParaRPr lang="pt-BR"/>
+          </a:p>
+        </p:txBody>
       </p:sp>
       <p:sp>
         <p:nvSpPr>
@@ -5310,11 +5255,11 @@
           <a:bodyPr wrap="square" lIns="0" tIns="0" rIns="0" bIns="0" rtlCol="0" anchor="ctr"/>
           <a:lstStyle/>
           <a:p>
-            <a:pPr indent="0" marL="0">
-              <a:buNone/>
-            </a:pPr>
-            <a:r>
-              <a:rPr lang="en-US" sz="900" spc="160" kern="0" dirty="0">
+            <a:pPr marL="0" indent="0">
+              <a:buNone/>
+            </a:pPr>
+            <a:r>
+              <a:rPr lang="en-US" sz="1100" kern="0" spc="160" dirty="0">
                 <a:solidFill>
                   <a:srgbClr val="F2B705"/>
                 </a:solidFill>
@@ -5324,7 +5269,7 @@
               </a:rPr>
               <a:t>FACILITAÇÃO</a:t>
             </a:r>
-            <a:endParaRPr lang="en-US" sz="900" dirty="0"/>
+            <a:endParaRPr lang="en-US" sz="1100" dirty="0"/>
           </a:p>
         </p:txBody>
       </p:sp>
@@ -5349,14 +5294,14 @@
           <a:bodyPr wrap="square" lIns="0" tIns="0" rIns="0" bIns="0" rtlCol="0" anchor="t"/>
           <a:lstStyle/>
           <a:p>
-            <a:pPr indent="0" marL="0">
+            <a:pPr marL="0" indent="0">
               <a:lnSpc>
                 <a:spcPct val="120000"/>
               </a:lnSpc>
               <a:buNone/>
             </a:pPr>
             <a:r>
-              <a:rPr lang="en-US" sz="900" dirty="0">
+              <a:rPr lang="en-US" sz="1100" dirty="0">
                 <a:solidFill>
                   <a:srgbClr val="E6E8F0"/>
                 </a:solidFill>
@@ -5366,7 +5311,7 @@
               </a:rPr>
               <a:t>Tecnologia e especialistas trabalhando juntos para tirar o peso operacional do aluno, sem tirar dele o controle das escolhas.</a:t>
             </a:r>
-            <a:endParaRPr lang="en-US" sz="900" dirty="0"/>
+            <a:endParaRPr lang="en-US" sz="1100" dirty="0"/>
           </a:p>
         </p:txBody>
       </p:sp>
@@ -5391,11 +5336,11 @@
           <a:bodyPr wrap="square" lIns="0" tIns="0" rIns="0" bIns="0" rtlCol="0" anchor="ctr"/>
           <a:lstStyle/>
           <a:p>
-            <a:pPr algn="l" indent="0" marL="0">
-              <a:buNone/>
-            </a:pPr>
-            <a:r>
-              <a:rPr lang="en-US" sz="650" spc="120" kern="0" dirty="0">
+            <a:pPr marL="0" indent="0" algn="l">
+              <a:buNone/>
+            </a:pPr>
+            <a:r>
+              <a:rPr lang="en-US" sz="650" kern="0" spc="120" dirty="0">
                 <a:solidFill>
                   <a:srgbClr val="8A93A6"/>
                 </a:solidFill>
@@ -5430,7 +5375,7 @@
           <a:bodyPr wrap="square" lIns="0" tIns="0" rIns="0" bIns="0" rtlCol="0" anchor="ctr"/>
           <a:lstStyle/>
           <a:p>
-            <a:pPr algn="r" indent="0" marL="0">
+            <a:pPr marL="0" indent="0" algn="r">
               <a:buNone/>
             </a:pPr>
             <a:r>
@@ -5464,6 +5409,7 @@
         <a:solidFill>
           <a:srgbClr val="F7F8FA"/>
         </a:solidFill>
+        <a:effectLst/>
       </p:bgPr>
     </p:bg>
     <p:spTree>
@@ -5501,7 +5447,7 @@
           <a:bodyPr wrap="square" lIns="0" tIns="0" rIns="0" bIns="0" rtlCol="0" anchor="ctr"/>
           <a:lstStyle/>
           <a:p>
-            <a:pPr algn="l" indent="0" marL="0">
+            <a:pPr marL="0" indent="0" algn="l">
               <a:buNone/>
             </a:pPr>
             <a:r>
@@ -5515,9 +5461,6 @@
               </a:rPr>
               <a:t>04  </a:t>
             </a:r>
-            <a:pPr algn="l" indent="0" marL="0">
-              <a:buNone/>
-            </a:pPr>
             <a:r>
               <a:rPr lang="en-US" sz="2300" b="1" dirty="0">
                 <a:solidFill>
@@ -5554,7 +5497,7 @@
           <a:bodyPr wrap="square" lIns="0" tIns="0" rIns="0" bIns="0" rtlCol="0" anchor="ctr"/>
           <a:lstStyle/>
           <a:p>
-            <a:pPr indent="0" marL="0">
+            <a:pPr marL="0" indent="0">
               <a:buNone/>
             </a:pPr>
             <a:r>
@@ -5598,13 +5541,20 @@
             <a:prstDash val="solid"/>
           </a:ln>
           <a:effectLst>
-            <a:outerShdw sx="100000" sy="100000" kx="0" ky="0" algn="bl" rotWithShape="0" blurRad="63500" dist="25400" dir="5400000">
+            <a:outerShdw blurRad="63500" dist="25400" dir="5400000" algn="bl" rotWithShape="0">
               <a:srgbClr val="0B1220">
                 <a:alpha val="16000"/>
               </a:srgbClr>
             </a:outerShdw>
           </a:effectLst>
         </p:spPr>
+        <p:txBody>
+          <a:bodyPr/>
+          <a:lstStyle/>
+          <a:p>
+            <a:endParaRPr lang="pt-BR"/>
+          </a:p>
+        </p:txBody>
       </p:sp>
       <p:sp>
         <p:nvSpPr>
@@ -5627,6 +5577,13 @@
           </a:solidFill>
           <a:ln/>
         </p:spPr>
+        <p:txBody>
+          <a:bodyPr/>
+          <a:lstStyle/>
+          <a:p>
+            <a:endParaRPr lang="pt-BR"/>
+          </a:p>
+        </p:txBody>
       </p:sp>
       <p:sp>
         <p:nvSpPr>
@@ -5647,6 +5604,13 @@
           </a:solidFill>
           <a:ln/>
         </p:spPr>
+        <p:txBody>
+          <a:bodyPr/>
+          <a:lstStyle/>
+          <a:p>
+            <a:endParaRPr lang="pt-BR"/>
+          </a:p>
+        </p:txBody>
       </p:sp>
       <p:sp>
         <p:nvSpPr>
@@ -5673,11 +5637,11 @@
           <a:bodyPr wrap="square" lIns="0" tIns="0" rIns="0" bIns="0" rtlCol="0" anchor="ctr"/>
           <a:lstStyle/>
           <a:p>
-            <a:pPr algn="ctr" indent="0" marL="0">
-              <a:buNone/>
-            </a:pPr>
-            <a:r>
-              <a:rPr lang="en-US" sz="750" spc="80" kern="0" dirty="0">
+            <a:pPr marL="0" indent="0" algn="ctr">
+              <a:buNone/>
+            </a:pPr>
+            <a:r>
+              <a:rPr lang="en-US" sz="750" kern="0" spc="80" dirty="0">
                 <a:solidFill>
                   <a:srgbClr val="0B1220"/>
                 </a:solidFill>
@@ -5712,7 +5676,7 @@
           <a:bodyPr wrap="square" lIns="0" tIns="0" rIns="0" bIns="0" rtlCol="0" anchor="ctr"/>
           <a:lstStyle/>
           <a:p>
-            <a:pPr indent="0" marL="0">
+            <a:pPr marL="0" indent="0">
               <a:buNone/>
             </a:pPr>
             <a:r>
@@ -5751,7 +5715,7 @@
           <a:bodyPr wrap="square" lIns="0" tIns="0" rIns="0" bIns="0" rtlCol="0" anchor="t"/>
           <a:lstStyle/>
           <a:p>
-            <a:pPr indent="0" marL="0">
+            <a:pPr marL="0" indent="0">
               <a:lnSpc>
                 <a:spcPct val="115000"/>
               </a:lnSpc>
@@ -5791,6 +5755,13 @@
           </a:solidFill>
           <a:ln/>
         </p:spPr>
+        <p:txBody>
+          <a:bodyPr/>
+          <a:lstStyle/>
+          <a:p>
+            <a:endParaRPr lang="pt-BR"/>
+          </a:p>
+        </p:txBody>
       </p:sp>
       <p:sp>
         <p:nvSpPr>
@@ -5813,14 +5784,14 @@
           <a:bodyPr wrap="square" lIns="0" tIns="0" rIns="0" bIns="0" rtlCol="0" anchor="t"/>
           <a:lstStyle/>
           <a:p>
-            <a:pPr indent="0" marL="0">
+            <a:pPr marL="0" indent="0">
               <a:lnSpc>
                 <a:spcPct val="115000"/>
               </a:lnSpc>
               <a:buNone/>
             </a:pPr>
             <a:r>
-              <a:rPr lang="en-US" sz="950" dirty="0">
+              <a:rPr lang="en-US" sz="1200" dirty="0">
                 <a:solidFill>
                   <a:srgbClr val="0B1220"/>
                 </a:solidFill>
@@ -5830,14 +5801,88 @@
               </a:rPr>
               <a:t>Valoriza — </a:t>
             </a:r>
-            <a:pPr indent="0" marL="0">
+            <a:r>
+              <a:rPr lang="en-US" sz="1200" dirty="0">
+                <a:solidFill>
+                  <a:srgbClr val="1B2435"/>
+                </a:solidFill>
+                <a:latin typeface="Inter" pitchFamily="34" charset="0"/>
+                <a:ea typeface="Inter" pitchFamily="34" charset="-122"/>
+                <a:cs typeface="Inter" pitchFamily="34" charset="-120"/>
+              </a:rPr>
+              <a:t>rapidez, previsibilidade e a liberdade de manter a companhia de sempre e as milhas pessoais.</a:t>
+            </a:r>
+            <a:endParaRPr lang="en-US" sz="1200" dirty="0"/>
+          </a:p>
+        </p:txBody>
+      </p:sp>
+      <p:sp>
+        <p:nvSpPr>
+          <p:cNvPr id="12" name="Shape 10"/>
+          <p:cNvSpPr/>
+          <p:nvPr/>
+        </p:nvSpPr>
+        <p:spPr>
+          <a:xfrm>
+            <a:off x="539496" y="3429000"/>
+            <a:ext cx="73152" cy="73152"/>
+          </a:xfrm>
+          <a:prstGeom prst="ellipse">
+            <a:avLst/>
+          </a:prstGeom>
+          <a:solidFill>
+            <a:srgbClr val="F2B705"/>
+          </a:solidFill>
+          <a:ln/>
+        </p:spPr>
+        <p:txBody>
+          <a:bodyPr/>
+          <a:lstStyle/>
+          <a:p>
+            <a:endParaRPr lang="pt-BR"/>
+          </a:p>
+        </p:txBody>
+      </p:sp>
+      <p:sp>
+        <p:nvSpPr>
+          <p:cNvPr id="13" name="Text 11"/>
+          <p:cNvSpPr/>
+          <p:nvPr/>
+        </p:nvSpPr>
+        <p:spPr>
+          <a:xfrm>
+            <a:off x="731520" y="3364992"/>
+            <a:ext cx="4998568" cy="658368"/>
+          </a:xfrm>
+          <a:prstGeom prst="rect">
+            <a:avLst/>
+          </a:prstGeom>
+          <a:noFill/>
+          <a:ln/>
+        </p:spPr>
+        <p:txBody>
+          <a:bodyPr wrap="square" lIns="0" tIns="0" rIns="0" bIns="0" rtlCol="0" anchor="t"/>
+          <a:lstStyle/>
+          <a:p>
+            <a:pPr marL="0" indent="0">
               <a:lnSpc>
                 <a:spcPct val="115000"/>
               </a:lnSpc>
               <a:buNone/>
             </a:pPr>
             <a:r>
-              <a:rPr lang="en-US" sz="950" dirty="0">
+              <a:rPr lang="en-US" sz="1200" dirty="0">
+                <a:solidFill>
+                  <a:srgbClr val="0B1220"/>
+                </a:solidFill>
+                <a:latin typeface="Inter SemiBold" pitchFamily="34" charset="0"/>
+                <a:ea typeface="Inter SemiBold" pitchFamily="34" charset="-122"/>
+                <a:cs typeface="Inter SemiBold" pitchFamily="34" charset="-120"/>
+              </a:rPr>
+              <a:t>Evita — </a:t>
+            </a:r>
+            <a:r>
+              <a:rPr lang="en-US" sz="1200" dirty="0">
                 <a:solidFill>
                   <a:srgbClr val="1B2435"/>
                 </a:solidFill>
@@ -5845,21 +5890,21 @@
                 <a:ea typeface="Inter" pitchFamily="34" charset="-122"/>
                 <a:cs typeface="Inter" pitchFamily="34" charset="-120"/>
               </a:rPr>
-              <a:t>rapidez, previsibilidade e a liberdade de manter a companhia de sempre e as milhas pessoais.</a:t>
-            </a:r>
-            <a:endParaRPr lang="en-US" sz="950" dirty="0"/>
-          </a:p>
-        </p:txBody>
-      </p:sp>
-      <p:sp>
-        <p:nvSpPr>
-          <p:cNvPr id="12" name="Shape 10"/>
-          <p:cNvSpPr/>
-          <p:nvPr/>
-        </p:nvSpPr>
-        <p:spPr>
-          <a:xfrm>
-            <a:off x="539496" y="3429000"/>
+              <a:t>pagar 2–3× por decidir tarde, plataformas rígidas e a burocracia do reembolso.</a:t>
+            </a:r>
+            <a:endParaRPr lang="en-US" sz="1200" dirty="0"/>
+          </a:p>
+        </p:txBody>
+      </p:sp>
+      <p:sp>
+        <p:nvSpPr>
+          <p:cNvPr id="14" name="Shape 12"/>
+          <p:cNvSpPr/>
+          <p:nvPr/>
+        </p:nvSpPr>
+        <p:spPr>
+          <a:xfrm>
+            <a:off x="539496" y="4142232"/>
             <a:ext cx="73152" cy="73152"/>
           </a:xfrm>
           <a:prstGeom prst="ellipse">
@@ -5870,16 +5915,23 @@
           </a:solidFill>
           <a:ln/>
         </p:spPr>
-      </p:sp>
-      <p:sp>
-        <p:nvSpPr>
-          <p:cNvPr id="13" name="Text 11"/>
-          <p:cNvSpPr/>
-          <p:nvPr/>
-        </p:nvSpPr>
-        <p:spPr>
-          <a:xfrm>
-            <a:off x="731520" y="3364992"/>
+        <p:txBody>
+          <a:bodyPr/>
+          <a:lstStyle/>
+          <a:p>
+            <a:endParaRPr lang="pt-BR"/>
+          </a:p>
+        </p:txBody>
+      </p:sp>
+      <p:sp>
+        <p:nvSpPr>
+          <p:cNvPr id="15" name="Text 13"/>
+          <p:cNvSpPr/>
+          <p:nvPr/>
+        </p:nvSpPr>
+        <p:spPr>
+          <a:xfrm>
+            <a:off x="731520" y="4078224"/>
             <a:ext cx="4998568" cy="658368"/>
           </a:xfrm>
           <a:prstGeom prst="rect">
@@ -5892,14 +5944,14 @@
           <a:bodyPr wrap="square" lIns="0" tIns="0" rIns="0" bIns="0" rtlCol="0" anchor="t"/>
           <a:lstStyle/>
           <a:p>
-            <a:pPr indent="0" marL="0">
+            <a:pPr marL="0" indent="0">
               <a:lnSpc>
                 <a:spcPct val="115000"/>
               </a:lnSpc>
               <a:buNone/>
             </a:pPr>
             <a:r>
-              <a:rPr lang="en-US" sz="950" dirty="0">
+              <a:rPr lang="en-US" sz="1200" dirty="0">
                 <a:solidFill>
                   <a:srgbClr val="0B1220"/>
                 </a:solidFill>
@@ -5907,16 +5959,10 @@
                 <a:ea typeface="Inter SemiBold" pitchFamily="34" charset="-122"/>
                 <a:cs typeface="Inter SemiBold" pitchFamily="34" charset="-120"/>
               </a:rPr>
-              <a:t>Evita — </a:t>
-            </a:r>
-            <a:pPr indent="0" marL="0">
-              <a:lnSpc>
-                <a:spcPct val="115000"/>
-              </a:lnSpc>
-              <a:buNone/>
-            </a:pPr>
-            <a:r>
-              <a:rPr lang="en-US" sz="950" dirty="0">
+              <a:t>Pagaria por — </a:t>
+            </a:r>
+            <a:r>
+              <a:rPr lang="en-US" sz="1200" dirty="0">
                 <a:solidFill>
                   <a:srgbClr val="1B2435"/>
                 </a:solidFill>
@@ -5924,88 +5970,9 @@
                 <a:ea typeface="Inter" pitchFamily="34" charset="-122"/>
                 <a:cs typeface="Inter" pitchFamily="34" charset="-120"/>
               </a:rPr>
-              <a:t>pagar 2–3× por decidir tarde, plataformas rígidas e a burocracia do reembolso.</a:t>
-            </a:r>
-            <a:endParaRPr lang="en-US" sz="950" dirty="0"/>
-          </a:p>
-        </p:txBody>
-      </p:sp>
-      <p:sp>
-        <p:nvSpPr>
-          <p:cNvPr id="14" name="Shape 12"/>
-          <p:cNvSpPr/>
-          <p:nvPr/>
-        </p:nvSpPr>
-        <p:spPr>
-          <a:xfrm>
-            <a:off x="539496" y="4142232"/>
-            <a:ext cx="73152" cy="73152"/>
-          </a:xfrm>
-          <a:prstGeom prst="ellipse">
-            <a:avLst/>
-          </a:prstGeom>
-          <a:solidFill>
-            <a:srgbClr val="F2B705"/>
-          </a:solidFill>
-          <a:ln/>
-        </p:spPr>
-      </p:sp>
-      <p:sp>
-        <p:nvSpPr>
-          <p:cNvPr id="15" name="Text 13"/>
-          <p:cNvSpPr/>
-          <p:nvPr/>
-        </p:nvSpPr>
-        <p:spPr>
-          <a:xfrm>
-            <a:off x="731520" y="4078224"/>
-            <a:ext cx="4998568" cy="658368"/>
-          </a:xfrm>
-          <a:prstGeom prst="rect">
-            <a:avLst/>
-          </a:prstGeom>
-          <a:noFill/>
-          <a:ln/>
-        </p:spPr>
-        <p:txBody>
-          <a:bodyPr wrap="square" lIns="0" tIns="0" rIns="0" bIns="0" rtlCol="0" anchor="t"/>
-          <a:lstStyle/>
-          <a:p>
-            <a:pPr indent="0" marL="0">
-              <a:lnSpc>
-                <a:spcPct val="115000"/>
-              </a:lnSpc>
-              <a:buNone/>
-            </a:pPr>
-            <a:r>
-              <a:rPr lang="en-US" sz="950" dirty="0">
-                <a:solidFill>
-                  <a:srgbClr val="0B1220"/>
-                </a:solidFill>
-                <a:latin typeface="Inter SemiBold" pitchFamily="34" charset="0"/>
-                <a:ea typeface="Inter SemiBold" pitchFamily="34" charset="-122"/>
-                <a:cs typeface="Inter SemiBold" pitchFamily="34" charset="-120"/>
-              </a:rPr>
-              <a:t>Pagaria por — </a:t>
-            </a:r>
-            <a:pPr indent="0" marL="0">
-              <a:lnSpc>
-                <a:spcPct val="115000"/>
-              </a:lnSpc>
-              <a:buNone/>
-            </a:pPr>
-            <a:r>
-              <a:rPr lang="en-US" sz="950" dirty="0">
-                <a:solidFill>
-                  <a:srgbClr val="1B2435"/>
-                </a:solidFill>
-                <a:latin typeface="Inter" pitchFamily="34" charset="0"/>
-                <a:ea typeface="Inter" pitchFamily="34" charset="-122"/>
-                <a:cs typeface="Inter" pitchFamily="34" charset="-120"/>
-              </a:rPr>
               <a:t>alguém que resolva tudo — passagem, hotel, traslado — sem tirar dele o controle.</a:t>
             </a:r>
-            <a:endParaRPr lang="en-US" sz="950" dirty="0"/>
+            <a:endParaRPr lang="en-US" sz="1200" dirty="0"/>
           </a:p>
         </p:txBody>
       </p:sp>
@@ -6035,6 +6002,13 @@
             <a:prstDash val="solid"/>
           </a:ln>
         </p:spPr>
+        <p:txBody>
+          <a:bodyPr/>
+          <a:lstStyle/>
+          <a:p>
+            <a:endParaRPr lang="pt-BR"/>
+          </a:p>
+        </p:txBody>
       </p:sp>
       <p:sp>
         <p:nvSpPr>
@@ -6057,7 +6031,7 @@
           <a:bodyPr wrap="square" lIns="0" tIns="0" rIns="0" bIns="0" rtlCol="0" anchor="ctr"/>
           <a:lstStyle/>
           <a:p>
-            <a:pPr indent="0" marL="0">
+            <a:pPr marL="0" indent="0">
               <a:lnSpc>
                 <a:spcPct val="115000"/>
               </a:lnSpc>
@@ -6104,13 +6078,20 @@
             <a:prstDash val="solid"/>
           </a:ln>
           <a:effectLst>
-            <a:outerShdw sx="100000" sy="100000" kx="0" ky="0" algn="bl" rotWithShape="0" blurRad="63500" dist="25400" dir="5400000">
+            <a:outerShdw blurRad="63500" dist="25400" dir="5400000" algn="bl" rotWithShape="0">
               <a:srgbClr val="0B1220">
                 <a:alpha val="16000"/>
               </a:srgbClr>
             </a:outerShdw>
           </a:effectLst>
         </p:spPr>
+        <p:txBody>
+          <a:bodyPr/>
+          <a:lstStyle/>
+          <a:p>
+            <a:endParaRPr lang="pt-BR"/>
+          </a:p>
+        </p:txBody>
       </p:sp>
       <p:sp>
         <p:nvSpPr>
@@ -6133,6 +6114,13 @@
           </a:solidFill>
           <a:ln/>
         </p:spPr>
+        <p:txBody>
+          <a:bodyPr/>
+          <a:lstStyle/>
+          <a:p>
+            <a:endParaRPr lang="pt-BR"/>
+          </a:p>
+        </p:txBody>
       </p:sp>
       <p:sp>
         <p:nvSpPr>
@@ -6153,6 +6141,13 @@
           </a:solidFill>
           <a:ln/>
         </p:spPr>
+        <p:txBody>
+          <a:bodyPr/>
+          <a:lstStyle/>
+          <a:p>
+            <a:endParaRPr lang="pt-BR"/>
+          </a:p>
+        </p:txBody>
       </p:sp>
       <p:sp>
         <p:nvSpPr>
@@ -6179,11 +6174,11 @@
           <a:bodyPr wrap="square" lIns="0" tIns="0" rIns="0" bIns="0" rtlCol="0" anchor="ctr"/>
           <a:lstStyle/>
           <a:p>
-            <a:pPr algn="ctr" indent="0" marL="0">
-              <a:buNone/>
-            </a:pPr>
-            <a:r>
-              <a:rPr lang="en-US" sz="750" spc="80" kern="0" dirty="0">
+            <a:pPr marL="0" indent="0" algn="ctr">
+              <a:buNone/>
+            </a:pPr>
+            <a:r>
+              <a:rPr lang="en-US" sz="750" kern="0" spc="80" dirty="0">
                 <a:solidFill>
                   <a:srgbClr val="0B1220"/>
                 </a:solidFill>
@@ -6218,7 +6213,7 @@
           <a:bodyPr wrap="square" lIns="0" tIns="0" rIns="0" bIns="0" rtlCol="0" anchor="ctr"/>
           <a:lstStyle/>
           <a:p>
-            <a:pPr indent="0" marL="0">
+            <a:pPr marL="0" indent="0">
               <a:buNone/>
             </a:pPr>
             <a:r>
@@ -6257,7 +6252,7 @@
           <a:bodyPr wrap="square" lIns="0" tIns="0" rIns="0" bIns="0" rtlCol="0" anchor="t"/>
           <a:lstStyle/>
           <a:p>
-            <a:pPr indent="0" marL="0">
+            <a:pPr marL="0" indent="0">
               <a:lnSpc>
                 <a:spcPct val="115000"/>
               </a:lnSpc>
@@ -6297,6 +6292,13 @@
           </a:solidFill>
           <a:ln/>
         </p:spPr>
+        <p:txBody>
+          <a:bodyPr/>
+          <a:lstStyle/>
+          <a:p>
+            <a:endParaRPr lang="pt-BR"/>
+          </a:p>
+        </p:txBody>
       </p:sp>
       <p:sp>
         <p:nvSpPr>
@@ -6319,14 +6321,14 @@
           <a:bodyPr wrap="square" lIns="0" tIns="0" rIns="0" bIns="0" rtlCol="0" anchor="t"/>
           <a:lstStyle/>
           <a:p>
-            <a:pPr indent="0" marL="0">
+            <a:pPr marL="0" indent="0">
               <a:lnSpc>
                 <a:spcPct val="115000"/>
               </a:lnSpc>
               <a:buNone/>
             </a:pPr>
             <a:r>
-              <a:rPr lang="en-US" sz="950" dirty="0">
+              <a:rPr lang="en-US" sz="1200" dirty="0">
                 <a:solidFill>
                   <a:srgbClr val="0B1220"/>
                 </a:solidFill>
@@ -6336,14 +6338,88 @@
               </a:rPr>
               <a:t>Apoia por — </a:t>
             </a:r>
-            <a:pPr indent="0" marL="0">
+            <a:r>
+              <a:rPr lang="en-US" sz="1200" dirty="0">
+                <a:solidFill>
+                  <a:srgbClr val="1B2435"/>
+                </a:solidFill>
+                <a:latin typeface="Inter" pitchFamily="34" charset="0"/>
+                <a:ea typeface="Inter" pitchFamily="34" charset="-122"/>
+                <a:cs typeface="Inter" pitchFamily="34" charset="-120"/>
+              </a:rPr>
+              <a:t>NPS e acolhimento do aluno antes dos módulos, com zero atrito para a coordenação.</a:t>
+            </a:r>
+            <a:endParaRPr lang="en-US" sz="1200" dirty="0"/>
+          </a:p>
+        </p:txBody>
+      </p:sp>
+      <p:sp>
+        <p:nvSpPr>
+          <p:cNvPr id="26" name="Shape 24"/>
+          <p:cNvSpPr/>
+          <p:nvPr/>
+        </p:nvSpPr>
+        <p:spPr>
+          <a:xfrm>
+            <a:off x="6452464" y="3429000"/>
+            <a:ext cx="73152" cy="73152"/>
+          </a:xfrm>
+          <a:prstGeom prst="ellipse">
+            <a:avLst/>
+          </a:prstGeom>
+          <a:solidFill>
+            <a:srgbClr val="F2B705"/>
+          </a:solidFill>
+          <a:ln/>
+        </p:spPr>
+        <p:txBody>
+          <a:bodyPr/>
+          <a:lstStyle/>
+          <a:p>
+            <a:endParaRPr lang="pt-BR"/>
+          </a:p>
+        </p:txBody>
+      </p:sp>
+      <p:sp>
+        <p:nvSpPr>
+          <p:cNvPr id="27" name="Text 25"/>
+          <p:cNvSpPr/>
+          <p:nvPr/>
+        </p:nvSpPr>
+        <p:spPr>
+          <a:xfrm>
+            <a:off x="6644488" y="3364992"/>
+            <a:ext cx="4998568" cy="658368"/>
+          </a:xfrm>
+          <a:prstGeom prst="rect">
+            <a:avLst/>
+          </a:prstGeom>
+          <a:noFill/>
+          <a:ln/>
+        </p:spPr>
+        <p:txBody>
+          <a:bodyPr wrap="square" lIns="0" tIns="0" rIns="0" bIns="0" rtlCol="0" anchor="t"/>
+          <a:lstStyle/>
+          <a:p>
+            <a:pPr marL="0" indent="0">
               <a:lnSpc>
                 <a:spcPct val="115000"/>
               </a:lnSpc>
               <a:buNone/>
             </a:pPr>
             <a:r>
-              <a:rPr lang="en-US" sz="950" dirty="0">
+              <a:rPr lang="en-US" sz="1200" dirty="0">
+                <a:solidFill>
+                  <a:srgbClr val="0B1220"/>
+                </a:solidFill>
+                <a:latin typeface="Inter SemiBold" pitchFamily="34" charset="0"/>
+                <a:ea typeface="Inter SemiBold" pitchFamily="34" charset="-122"/>
+                <a:cs typeface="Inter SemiBold" pitchFamily="34" charset="-120"/>
+              </a:rPr>
+              <a:t>Precisa saber — </a:t>
+            </a:r>
+            <a:r>
+              <a:rPr lang="en-US" sz="1200" dirty="0">
                 <a:solidFill>
                   <a:srgbClr val="1B2435"/>
                 </a:solidFill>
@@ -6351,21 +6427,21 @@
                 <a:ea typeface="Inter" pitchFamily="34" charset="-122"/>
                 <a:cs typeface="Inter" pitchFamily="34" charset="-120"/>
               </a:rPr>
-              <a:t>NPS e acolhimento do aluno antes dos módulos, com zero atrito para a coordenação.</a:t>
-            </a:r>
-            <a:endParaRPr lang="en-US" sz="950" dirty="0"/>
-          </a:p>
-        </p:txBody>
-      </p:sp>
-      <p:sp>
-        <p:nvSpPr>
-          <p:cNvPr id="26" name="Shape 24"/>
-          <p:cNvSpPr/>
-          <p:nvPr/>
-        </p:nvSpPr>
-        <p:spPr>
-          <a:xfrm>
-            <a:off x="6452464" y="3429000"/>
+              <a:t>casos reais, governança financeira do bloqueio e quem responde quando a viagem dá errado.</a:t>
+            </a:r>
+            <a:endParaRPr lang="en-US" sz="1200" dirty="0"/>
+          </a:p>
+        </p:txBody>
+      </p:sp>
+      <p:sp>
+        <p:nvSpPr>
+          <p:cNvPr id="28" name="Shape 26"/>
+          <p:cNvSpPr/>
+          <p:nvPr/>
+        </p:nvSpPr>
+        <p:spPr>
+          <a:xfrm>
+            <a:off x="6452464" y="4142232"/>
             <a:ext cx="73152" cy="73152"/>
           </a:xfrm>
           <a:prstGeom prst="ellipse">
@@ -6376,16 +6452,23 @@
           </a:solidFill>
           <a:ln/>
         </p:spPr>
-      </p:sp>
-      <p:sp>
-        <p:nvSpPr>
-          <p:cNvPr id="27" name="Text 25"/>
-          <p:cNvSpPr/>
-          <p:nvPr/>
-        </p:nvSpPr>
-        <p:spPr>
-          <a:xfrm>
-            <a:off x="6644488" y="3364992"/>
+        <p:txBody>
+          <a:bodyPr/>
+          <a:lstStyle/>
+          <a:p>
+            <a:endParaRPr lang="pt-BR"/>
+          </a:p>
+        </p:txBody>
+      </p:sp>
+      <p:sp>
+        <p:nvSpPr>
+          <p:cNvPr id="29" name="Text 27"/>
+          <p:cNvSpPr/>
+          <p:nvPr/>
+        </p:nvSpPr>
+        <p:spPr>
+          <a:xfrm>
+            <a:off x="6644488" y="4078224"/>
             <a:ext cx="4998568" cy="658368"/>
           </a:xfrm>
           <a:prstGeom prst="rect">
@@ -6398,14 +6481,14 @@
           <a:bodyPr wrap="square" lIns="0" tIns="0" rIns="0" bIns="0" rtlCol="0" anchor="t"/>
           <a:lstStyle/>
           <a:p>
-            <a:pPr indent="0" marL="0">
+            <a:pPr marL="0" indent="0">
               <a:lnSpc>
                 <a:spcPct val="115000"/>
               </a:lnSpc>
               <a:buNone/>
             </a:pPr>
             <a:r>
-              <a:rPr lang="en-US" sz="950" dirty="0">
+              <a:rPr lang="en-US" sz="1200" dirty="0">
                 <a:solidFill>
                   <a:srgbClr val="0B1220"/>
                 </a:solidFill>
@@ -6413,16 +6496,10 @@
                 <a:ea typeface="Inter SemiBold" pitchFamily="34" charset="-122"/>
                 <a:cs typeface="Inter SemiBold" pitchFamily="34" charset="-120"/>
               </a:rPr>
-              <a:t>Precisa saber — </a:t>
-            </a:r>
-            <a:pPr indent="0" marL="0">
-              <a:lnSpc>
-                <a:spcPct val="115000"/>
-              </a:lnSpc>
-              <a:buNone/>
-            </a:pPr>
-            <a:r>
-              <a:rPr lang="en-US" sz="950" dirty="0">
+              <a:t>Nunca aceita — </a:t>
+            </a:r>
+            <a:r>
+              <a:rPr lang="en-US" sz="1200" dirty="0">
                 <a:solidFill>
                   <a:srgbClr val="1B2435"/>
                 </a:solidFill>
@@ -6430,88 +6507,9 @@
                 <a:ea typeface="Inter" pitchFamily="34" charset="-122"/>
                 <a:cs typeface="Inter" pitchFamily="34" charset="-120"/>
               </a:rPr>
-              <a:t>casos reais, governança financeira do bloqueio e quem responde quando a viagem dá errado.</a:t>
-            </a:r>
-            <a:endParaRPr lang="en-US" sz="950" dirty="0"/>
-          </a:p>
-        </p:txBody>
-      </p:sp>
-      <p:sp>
-        <p:nvSpPr>
-          <p:cNvPr id="28" name="Shape 26"/>
-          <p:cNvSpPr/>
-          <p:nvPr/>
-        </p:nvSpPr>
-        <p:spPr>
-          <a:xfrm>
-            <a:off x="6452464" y="4142232"/>
-            <a:ext cx="73152" cy="73152"/>
-          </a:xfrm>
-          <a:prstGeom prst="ellipse">
-            <a:avLst/>
-          </a:prstGeom>
-          <a:solidFill>
-            <a:srgbClr val="F2B705"/>
-          </a:solidFill>
-          <a:ln/>
-        </p:spPr>
-      </p:sp>
-      <p:sp>
-        <p:nvSpPr>
-          <p:cNvPr id="29" name="Text 27"/>
-          <p:cNvSpPr/>
-          <p:nvPr/>
-        </p:nvSpPr>
-        <p:spPr>
-          <a:xfrm>
-            <a:off x="6644488" y="4078224"/>
-            <a:ext cx="4998568" cy="658368"/>
-          </a:xfrm>
-          <a:prstGeom prst="rect">
-            <a:avLst/>
-          </a:prstGeom>
-          <a:noFill/>
-          <a:ln/>
-        </p:spPr>
-        <p:txBody>
-          <a:bodyPr wrap="square" lIns="0" tIns="0" rIns="0" bIns="0" rtlCol="0" anchor="t"/>
-          <a:lstStyle/>
-          <a:p>
-            <a:pPr indent="0" marL="0">
-              <a:lnSpc>
-                <a:spcPct val="115000"/>
-              </a:lnSpc>
-              <a:buNone/>
-            </a:pPr>
-            <a:r>
-              <a:rPr lang="en-US" sz="950" dirty="0">
-                <a:solidFill>
-                  <a:srgbClr val="0B1220"/>
-                </a:solidFill>
-                <a:latin typeface="Inter SemiBold" pitchFamily="34" charset="0"/>
-                <a:ea typeface="Inter SemiBold" pitchFamily="34" charset="-122"/>
-                <a:cs typeface="Inter SemiBold" pitchFamily="34" charset="-120"/>
-              </a:rPr>
-              <a:t>Nunca aceita — </a:t>
-            </a:r>
-            <a:pPr indent="0" marL="0">
-              <a:lnSpc>
-                <a:spcPct val="115000"/>
-              </a:lnSpc>
-              <a:buNone/>
-            </a:pPr>
-            <a:r>
-              <a:rPr lang="en-US" sz="950" dirty="0">
-                <a:solidFill>
-                  <a:srgbClr val="1B2435"/>
-                </a:solidFill>
-                <a:latin typeface="Inter" pitchFamily="34" charset="0"/>
-                <a:ea typeface="Inter" pitchFamily="34" charset="-122"/>
-                <a:cs typeface="Inter" pitchFamily="34" charset="-120"/>
-              </a:rPr>
               <a:t>fornecedor que gere reclamação ou qualquer obrigação imposta ao aluno.</a:t>
             </a:r>
-            <a:endParaRPr lang="en-US" sz="950" dirty="0"/>
+            <a:endParaRPr lang="en-US" sz="1200" dirty="0"/>
           </a:p>
         </p:txBody>
       </p:sp>
@@ -6541,6 +6539,13 @@
             <a:prstDash val="solid"/>
           </a:ln>
         </p:spPr>
+        <p:txBody>
+          <a:bodyPr/>
+          <a:lstStyle/>
+          <a:p>
+            <a:endParaRPr lang="pt-BR"/>
+          </a:p>
+        </p:txBody>
       </p:sp>
       <p:sp>
         <p:nvSpPr>
@@ -6563,7 +6568,7 @@
           <a:bodyPr wrap="square" lIns="0" tIns="0" rIns="0" bIns="0" rtlCol="0" anchor="ctr"/>
           <a:lstStyle/>
           <a:p>
-            <a:pPr indent="0" marL="0">
+            <a:pPr marL="0" indent="0">
               <a:lnSpc>
                 <a:spcPct val="115000"/>
               </a:lnSpc>
@@ -6605,11 +6610,11 @@
           <a:bodyPr wrap="square" lIns="0" tIns="0" rIns="0" bIns="0" rtlCol="0" anchor="ctr"/>
           <a:lstStyle/>
           <a:p>
-            <a:pPr algn="l" indent="0" marL="0">
-              <a:buNone/>
-            </a:pPr>
-            <a:r>
-              <a:rPr lang="en-US" sz="650" spc="120" kern="0" dirty="0">
+            <a:pPr marL="0" indent="0" algn="l">
+              <a:buNone/>
+            </a:pPr>
+            <a:r>
+              <a:rPr lang="en-US" sz="650" kern="0" spc="120" dirty="0">
                 <a:solidFill>
                   <a:srgbClr val="9AA1AD"/>
                 </a:solidFill>
@@ -6644,7 +6649,7 @@
           <a:bodyPr wrap="square" lIns="0" tIns="0" rIns="0" bIns="0" rtlCol="0" anchor="ctr"/>
           <a:lstStyle/>
           <a:p>
-            <a:pPr algn="r" indent="0" marL="0">
+            <a:pPr marL="0" indent="0" algn="r">
               <a:buNone/>
             </a:pPr>
             <a:r>
@@ -6678,6 +6683,7 @@
         <a:solidFill>
           <a:srgbClr val="F7F8FA"/>
         </a:solidFill>
+        <a:effectLst/>
       </p:bgPr>
     </p:bg>
     <p:spTree>
@@ -6715,7 +6721,7 @@
           <a:bodyPr wrap="square" lIns="0" tIns="0" rIns="0" bIns="0" rtlCol="0" anchor="ctr"/>
           <a:lstStyle/>
           <a:p>
-            <a:pPr algn="l" indent="0" marL="0">
+            <a:pPr marL="0" indent="0" algn="l">
               <a:buNone/>
             </a:pPr>
             <a:r>
@@ -6729,9 +6735,6 @@
               </a:rPr>
               <a:t>05  </a:t>
             </a:r>
-            <a:pPr algn="l" indent="0" marL="0">
-              <a:buNone/>
-            </a:pPr>
             <a:r>
               <a:rPr lang="en-US" sz="2300" b="1" dirty="0">
                 <a:solidFill>
@@ -6768,7 +6771,7 @@
           <a:bodyPr wrap="square" lIns="0" tIns="0" rIns="0" bIns="0" rtlCol="0" anchor="ctr"/>
           <a:lstStyle/>
           <a:p>
-            <a:pPr indent="0" marL="0">
+            <a:pPr marL="0" indent="0">
               <a:buNone/>
             </a:pPr>
             <a:r>
@@ -6782,9 +6785,6 @@
               </a:rPr>
               <a:t>Belém → Nova Lima, a cada 6 semanas. </a:t>
             </a:r>
-            <a:pPr indent="0" marL="0">
-              <a:buNone/>
-            </a:pPr>
             <a:r>
               <a:rPr lang="en-US" sz="1200" dirty="0">
                 <a:solidFill>
@@ -6822,6 +6822,13 @@
             <a:prstDash val="solid"/>
           </a:ln>
         </p:spPr>
+        <p:txBody>
+          <a:bodyPr/>
+          <a:lstStyle/>
+          <a:p>
+            <a:endParaRPr lang="pt-BR"/>
+          </a:p>
+        </p:txBody>
       </p:sp>
       <p:sp>
         <p:nvSpPr>
@@ -6842,13 +6849,20 @@
           </a:solidFill>
           <a:ln/>
           <a:effectLst>
-            <a:outerShdw sx="100000" sy="100000" kx="0" ky="0" algn="bl" rotWithShape="0" blurRad="63500" dist="25400" dir="5400000">
+            <a:outerShdw blurRad="63500" dist="25400" dir="5400000" algn="bl" rotWithShape="0">
               <a:srgbClr val="0B1220">
                 <a:alpha val="16000"/>
               </a:srgbClr>
             </a:outerShdw>
           </a:effectLst>
         </p:spPr>
+        <p:txBody>
+          <a:bodyPr/>
+          <a:lstStyle/>
+          <a:p>
+            <a:endParaRPr lang="pt-BR"/>
+          </a:p>
+        </p:txBody>
       </p:sp>
       <p:sp>
         <p:nvSpPr>
@@ -6871,7 +6885,7 @@
           <a:bodyPr wrap="square" lIns="0" tIns="0" rIns="0" bIns="0" rtlCol="0" anchor="ctr"/>
           <a:lstStyle/>
           <a:p>
-            <a:pPr algn="ctr" indent="0" marL="0">
+            <a:pPr marL="0" indent="0" algn="ctr">
               <a:buNone/>
             </a:pPr>
             <a:r>
@@ -6915,13 +6929,20 @@
             <a:prstDash val="solid"/>
           </a:ln>
           <a:effectLst>
-            <a:outerShdw sx="100000" sy="100000" kx="0" ky="0" algn="bl" rotWithShape="0" blurRad="63500" dist="25400" dir="5400000">
+            <a:outerShdw blurRad="63500" dist="25400" dir="5400000" algn="bl" rotWithShape="0">
               <a:srgbClr val="0B1220">
                 <a:alpha val="16000"/>
               </a:srgbClr>
             </a:outerShdw>
           </a:effectLst>
         </p:spPr>
+        <p:txBody>
+          <a:bodyPr/>
+          <a:lstStyle/>
+          <a:p>
+            <a:endParaRPr lang="pt-BR"/>
+          </a:p>
+        </p:txBody>
       </p:sp>
       <p:sp>
         <p:nvSpPr>
@@ -6944,11 +6965,11 @@
           <a:bodyPr wrap="square" lIns="0" tIns="0" rIns="0" bIns="0" rtlCol="0" anchor="ctr"/>
           <a:lstStyle/>
           <a:p>
-            <a:pPr indent="0" marL="0">
-              <a:buNone/>
-            </a:pPr>
-            <a:r>
-              <a:rPr lang="en-US" sz="700" spc="120" kern="0" dirty="0">
+            <a:pPr marL="0" indent="0">
+              <a:buNone/>
+            </a:pPr>
+            <a:r>
+              <a:rPr lang="en-US" sz="1000" kern="0" spc="120" dirty="0">
                 <a:solidFill>
                   <a:srgbClr val="9A7508"/>
                 </a:solidFill>
@@ -6958,7 +6979,7 @@
               </a:rPr>
               <a:t>MARÇO</a:t>
             </a:r>
-            <a:endParaRPr lang="en-US" sz="700" dirty="0"/>
+            <a:endParaRPr lang="en-US" sz="1000" dirty="0"/>
           </a:p>
         </p:txBody>
       </p:sp>
@@ -6983,14 +7004,14 @@
           <a:bodyPr wrap="square" lIns="0" tIns="0" rIns="0" bIns="0" rtlCol="0" anchor="ctr"/>
           <a:lstStyle/>
           <a:p>
-            <a:pPr indent="0" marL="0">
+            <a:pPr marL="0" indent="0">
               <a:lnSpc>
                 <a:spcPct val="100000"/>
               </a:lnSpc>
               <a:buNone/>
             </a:pPr>
             <a:r>
-              <a:rPr lang="en-US" sz="1250" b="1" dirty="0">
+              <a:rPr lang="en-US" b="1" dirty="0">
                 <a:solidFill>
                   <a:srgbClr val="0B1220"/>
                 </a:solidFill>
@@ -7000,7 +7021,7 @@
               </a:rPr>
               <a:t>Na matrícula</a:t>
             </a:r>
-            <a:endParaRPr lang="en-US" sz="1250" dirty="0"/>
+            <a:endParaRPr lang="en-US" dirty="0"/>
           </a:p>
         </p:txBody>
       </p:sp>
@@ -7025,14 +7046,14 @@
           <a:bodyPr wrap="square" lIns="0" tIns="0" rIns="0" bIns="0" rtlCol="0" anchor="t"/>
           <a:lstStyle/>
           <a:p>
-            <a:pPr indent="0" marL="0">
+            <a:pPr marL="0" indent="0">
               <a:lnSpc>
                 <a:spcPct val="120000"/>
               </a:lnSpc>
               <a:buNone/>
             </a:pPr>
             <a:r>
-              <a:rPr lang="en-US" sz="880" dirty="0">
+              <a:rPr lang="en-US" sz="1050" dirty="0">
                 <a:solidFill>
                   <a:srgbClr val="1B2435"/>
                 </a:solidFill>
@@ -7042,7 +7063,7 @@
               </a:rPr>
               <a:t>Junto com a vaga, Ricardo recebe o plano de viagem do programa inteiro: todos os módulos, com estimativa de custo total desde o primeiro dia.</a:t>
             </a:r>
-            <a:endParaRPr lang="en-US" sz="880" dirty="0"/>
+            <a:endParaRPr lang="en-US" sz="1050" dirty="0"/>
           </a:p>
         </p:txBody>
       </p:sp>
@@ -7068,6 +7089,13 @@
             <a:prstDash val="solid"/>
           </a:ln>
         </p:spPr>
+        <p:txBody>
+          <a:bodyPr/>
+          <a:lstStyle/>
+          <a:p>
+            <a:endParaRPr lang="pt-BR"/>
+          </a:p>
+        </p:txBody>
       </p:sp>
       <p:sp>
         <p:nvSpPr>
@@ -7090,14 +7118,14 @@
           <a:bodyPr wrap="square" lIns="0" tIns="0" rIns="0" bIns="0" rtlCol="0" anchor="t"/>
           <a:lstStyle/>
           <a:p>
-            <a:pPr indent="0" marL="0">
+            <a:pPr marL="0" indent="0">
               <a:lnSpc>
                 <a:spcPct val="115000"/>
               </a:lnSpc>
               <a:buNone/>
             </a:pPr>
             <a:r>
-              <a:rPr lang="en-US" sz="780" i="1" dirty="0">
+              <a:rPr lang="en-US" sz="1000" i="1" dirty="0">
                 <a:solidFill>
                   <a:srgbClr val="6B7280"/>
                 </a:solidFill>
@@ -7107,7 +7135,7 @@
               </a:rPr>
               <a:t>Hoje: recebe o calendário, guarda — e esquece.</a:t>
             </a:r>
-            <a:endParaRPr lang="en-US" sz="780" dirty="0"/>
+            <a:endParaRPr lang="en-US" sz="1000" dirty="0"/>
           </a:p>
         </p:txBody>
       </p:sp>
@@ -7130,13 +7158,20 @@
           </a:solidFill>
           <a:ln/>
           <a:effectLst>
-            <a:outerShdw sx="100000" sy="100000" kx="0" ky="0" algn="bl" rotWithShape="0" blurRad="63500" dist="25400" dir="5400000">
+            <a:outerShdw blurRad="63500" dist="25400" dir="5400000" algn="bl" rotWithShape="0">
               <a:srgbClr val="0B1220">
                 <a:alpha val="16000"/>
               </a:srgbClr>
             </a:outerShdw>
           </a:effectLst>
         </p:spPr>
+        <p:txBody>
+          <a:bodyPr/>
+          <a:lstStyle/>
+          <a:p>
+            <a:endParaRPr lang="pt-BR"/>
+          </a:p>
+        </p:txBody>
       </p:sp>
       <p:sp>
         <p:nvSpPr>
@@ -7159,7 +7194,7 @@
           <a:bodyPr wrap="square" lIns="0" tIns="0" rIns="0" bIns="0" rtlCol="0" anchor="ctr"/>
           <a:lstStyle/>
           <a:p>
-            <a:pPr algn="ctr" indent="0" marL="0">
+            <a:pPr marL="0" indent="0" algn="ctr">
               <a:buNone/>
             </a:pPr>
             <a:r>
@@ -7203,13 +7238,20 @@
             <a:prstDash val="solid"/>
           </a:ln>
           <a:effectLst>
-            <a:outerShdw sx="100000" sy="100000" kx="0" ky="0" algn="bl" rotWithShape="0" blurRad="63500" dist="25400" dir="5400000">
+            <a:outerShdw blurRad="63500" dist="25400" dir="5400000" algn="bl" rotWithShape="0">
               <a:srgbClr val="0B1220">
                 <a:alpha val="16000"/>
               </a:srgbClr>
             </a:outerShdw>
           </a:effectLst>
         </p:spPr>
+        <p:txBody>
+          <a:bodyPr/>
+          <a:lstStyle/>
+          <a:p>
+            <a:endParaRPr lang="pt-BR"/>
+          </a:p>
+        </p:txBody>
       </p:sp>
       <p:sp>
         <p:nvSpPr>
@@ -7232,11 +7274,11 @@
           <a:bodyPr wrap="square" lIns="0" tIns="0" rIns="0" bIns="0" rtlCol="0" anchor="ctr"/>
           <a:lstStyle/>
           <a:p>
-            <a:pPr indent="0" marL="0">
-              <a:buNone/>
-            </a:pPr>
-            <a:r>
-              <a:rPr lang="en-US" sz="700" spc="120" kern="0" dirty="0">
+            <a:pPr marL="0" indent="0">
+              <a:buNone/>
+            </a:pPr>
+            <a:r>
+              <a:rPr lang="en-US" sz="1000" kern="0" spc="120" dirty="0">
                 <a:solidFill>
                   <a:srgbClr val="9A7508"/>
                 </a:solidFill>
@@ -7246,7 +7288,7 @@
               </a:rPr>
               <a:t>BLOQUEIO GARANTIDO</a:t>
             </a:r>
-            <a:endParaRPr lang="en-US" sz="700" dirty="0"/>
+            <a:endParaRPr lang="en-US" sz="1000" dirty="0"/>
           </a:p>
         </p:txBody>
       </p:sp>
@@ -7271,14 +7313,14 @@
           <a:bodyPr wrap="square" lIns="0" tIns="0" rIns="0" bIns="0" rtlCol="0" anchor="ctr"/>
           <a:lstStyle/>
           <a:p>
-            <a:pPr indent="0" marL="0">
+            <a:pPr marL="0" indent="0">
               <a:lnSpc>
                 <a:spcPct val="100000"/>
               </a:lnSpc>
               <a:buNone/>
             </a:pPr>
             <a:r>
-              <a:rPr lang="en-US" sz="1250" b="1" dirty="0">
+              <a:rPr lang="en-US" b="1" dirty="0">
                 <a:solidFill>
                   <a:srgbClr val="0B1220"/>
                 </a:solidFill>
@@ -7288,7 +7330,7 @@
               </a:rPr>
               <a:t>90 dias antes</a:t>
             </a:r>
-            <a:endParaRPr lang="en-US" sz="1250" dirty="0"/>
+            <a:endParaRPr lang="en-US" dirty="0"/>
           </a:p>
         </p:txBody>
       </p:sp>
@@ -7313,14 +7355,14 @@
           <a:bodyPr wrap="square" lIns="0" tIns="0" rIns="0" bIns="0" rtlCol="0" anchor="t"/>
           <a:lstStyle/>
           <a:p>
-            <a:pPr indent="0" marL="0">
+            <a:pPr marL="0" indent="0">
               <a:lnSpc>
                 <a:spcPct val="120000"/>
               </a:lnSpc>
               <a:buNone/>
             </a:pPr>
             <a:r>
-              <a:rPr lang="en-US" sz="880" dirty="0">
+              <a:rPr lang="en-US" sz="1050" dirty="0">
                 <a:solidFill>
                   <a:srgbClr val="1B2435"/>
                 </a:solidFill>
@@ -7330,7 +7372,7 @@
               </a:rPr>
               <a:t>A Antévia trava o bloqueio de grupo da turma e propõe voo e hotel no app. Ricardo aprova em minutos — na companhia dele, somando as milhas dele.</a:t>
             </a:r>
-            <a:endParaRPr lang="en-US" sz="880" dirty="0"/>
+            <a:endParaRPr lang="en-US" sz="1050" dirty="0"/>
           </a:p>
         </p:txBody>
       </p:sp>
@@ -7356,6 +7398,13 @@
             <a:prstDash val="solid"/>
           </a:ln>
         </p:spPr>
+        <p:txBody>
+          <a:bodyPr/>
+          <a:lstStyle/>
+          <a:p>
+            <a:endParaRPr lang="pt-BR"/>
+          </a:p>
+        </p:txBody>
       </p:sp>
       <p:sp>
         <p:nvSpPr>
@@ -7378,14 +7427,14 @@
           <a:bodyPr wrap="square" lIns="0" tIns="0" rIns="0" bIns="0" rtlCol="0" anchor="t"/>
           <a:lstStyle/>
           <a:p>
-            <a:pPr indent="0" marL="0">
+            <a:pPr marL="0" indent="0">
               <a:lnSpc>
                 <a:spcPct val="115000"/>
               </a:lnSpc>
               <a:buNone/>
             </a:pPr>
             <a:r>
-              <a:rPr lang="en-US" sz="780" i="1" dirty="0">
+              <a:rPr lang="en-US" sz="1000" i="1" dirty="0">
                 <a:solidFill>
                   <a:srgbClr val="6B7280"/>
                 </a:solidFill>
@@ -7395,7 +7444,7 @@
               </a:rPr>
               <a:t>Hoje: nada acontece até chegar perto da data.</a:t>
             </a:r>
-            <a:endParaRPr lang="en-US" sz="780" dirty="0"/>
+            <a:endParaRPr lang="en-US" sz="1000" dirty="0"/>
           </a:p>
         </p:txBody>
       </p:sp>
@@ -7418,13 +7467,20 @@
           </a:solidFill>
           <a:ln/>
           <a:effectLst>
-            <a:outerShdw sx="100000" sy="100000" kx="0" ky="0" algn="bl" rotWithShape="0" blurRad="63500" dist="25400" dir="5400000">
+            <a:outerShdw blurRad="63500" dist="25400" dir="5400000" algn="bl" rotWithShape="0">
               <a:srgbClr val="0B1220">
                 <a:alpha val="16000"/>
               </a:srgbClr>
             </a:outerShdw>
           </a:effectLst>
         </p:spPr>
+        <p:txBody>
+          <a:bodyPr/>
+          <a:lstStyle/>
+          <a:p>
+            <a:endParaRPr lang="pt-BR"/>
+          </a:p>
+        </p:txBody>
       </p:sp>
       <p:sp>
         <p:nvSpPr>
@@ -7447,7 +7503,7 @@
           <a:bodyPr wrap="square" lIns="0" tIns="0" rIns="0" bIns="0" rtlCol="0" anchor="ctr"/>
           <a:lstStyle/>
           <a:p>
-            <a:pPr algn="ctr" indent="0" marL="0">
+            <a:pPr marL="0" indent="0" algn="ctr">
               <a:buNone/>
             </a:pPr>
             <a:r>
@@ -7491,13 +7547,20 @@
             <a:prstDash val="solid"/>
           </a:ln>
           <a:effectLst>
-            <a:outerShdw sx="100000" sy="100000" kx="0" ky="0" algn="bl" rotWithShape="0" blurRad="63500" dist="25400" dir="5400000">
+            <a:outerShdw blurRad="63500" dist="25400" dir="5400000" algn="bl" rotWithShape="0">
               <a:srgbClr val="0B1220">
                 <a:alpha val="16000"/>
               </a:srgbClr>
             </a:outerShdw>
           </a:effectLst>
         </p:spPr>
+        <p:txBody>
+          <a:bodyPr/>
+          <a:lstStyle/>
+          <a:p>
+            <a:endParaRPr lang="pt-BR"/>
+          </a:p>
+        </p:txBody>
       </p:sp>
       <p:sp>
         <p:nvSpPr>
@@ -7520,11 +7583,11 @@
           <a:bodyPr wrap="square" lIns="0" tIns="0" rIns="0" bIns="0" rtlCol="0" anchor="ctr"/>
           <a:lstStyle/>
           <a:p>
-            <a:pPr indent="0" marL="0">
-              <a:buNone/>
-            </a:pPr>
-            <a:r>
-              <a:rPr lang="en-US" sz="700" spc="120" kern="0" dirty="0">
+            <a:pPr marL="0" indent="0">
+              <a:buNone/>
+            </a:pPr>
+            <a:r>
+              <a:rPr lang="en-US" sz="1000" kern="0" spc="120" dirty="0">
                 <a:solidFill>
                   <a:srgbClr val="9A7508"/>
                 </a:solidFill>
@@ -7534,7 +7597,7 @@
               </a:rPr>
               <a:t>COMPRA DISPARADA</a:t>
             </a:r>
-            <a:endParaRPr lang="en-US" sz="700" dirty="0"/>
+            <a:endParaRPr lang="en-US" sz="1000" dirty="0"/>
           </a:p>
         </p:txBody>
       </p:sp>
@@ -7559,14 +7622,14 @@
           <a:bodyPr wrap="square" lIns="0" tIns="0" rIns="0" bIns="0" rtlCol="0" anchor="ctr"/>
           <a:lstStyle/>
           <a:p>
-            <a:pPr indent="0" marL="0">
+            <a:pPr marL="0" indent="0">
               <a:lnSpc>
                 <a:spcPct val="100000"/>
               </a:lnSpc>
               <a:buNone/>
             </a:pPr>
             <a:r>
-              <a:rPr lang="en-US" sz="1250" b="1" dirty="0">
+              <a:rPr lang="en-US" b="1" dirty="0">
                 <a:solidFill>
                   <a:srgbClr val="0B1220"/>
                 </a:solidFill>
@@ -7576,7 +7639,7 @@
               </a:rPr>
               <a:t>Na janela certa</a:t>
             </a:r>
-            <a:endParaRPr lang="en-US" sz="1250" dirty="0"/>
+            <a:endParaRPr lang="en-US" dirty="0"/>
           </a:p>
         </p:txBody>
       </p:sp>
@@ -7601,14 +7664,14 @@
           <a:bodyPr wrap="square" lIns="0" tIns="0" rIns="0" bIns="0" rtlCol="0" anchor="t"/>
           <a:lstStyle/>
           <a:p>
-            <a:pPr indent="0" marL="0">
+            <a:pPr marL="0" indent="0">
               <a:lnSpc>
                 <a:spcPct val="120000"/>
               </a:lnSpc>
               <a:buNone/>
             </a:pPr>
             <a:r>
-              <a:rPr lang="en-US" sz="880" dirty="0">
+              <a:rPr lang="en-US" sz="1050" dirty="0">
                 <a:solidFill>
                   <a:srgbClr val="1B2435"/>
                 </a:solidFill>
@@ -7618,7 +7681,7 @@
               </a:rPr>
               <a:t>A plataforma dispara a compra no melhor momento da tarifa, guiada pelo calendário — 20–30% mais barata que a compra de última hora.</a:t>
             </a:r>
-            <a:endParaRPr lang="en-US" sz="880" dirty="0"/>
+            <a:endParaRPr lang="en-US" sz="1050" dirty="0"/>
           </a:p>
         </p:txBody>
       </p:sp>
@@ -7644,6 +7707,13 @@
             <a:prstDash val="solid"/>
           </a:ln>
         </p:spPr>
+        <p:txBody>
+          <a:bodyPr/>
+          <a:lstStyle/>
+          <a:p>
+            <a:endParaRPr lang="pt-BR"/>
+          </a:p>
+        </p:txBody>
       </p:sp>
       <p:sp>
         <p:nvSpPr>
@@ -7666,14 +7736,14 @@
           <a:bodyPr wrap="square" lIns="0" tIns="0" rIns="0" bIns="0" rtlCol="0" anchor="t"/>
           <a:lstStyle/>
           <a:p>
-            <a:pPr indent="0" marL="0">
+            <a:pPr marL="0" indent="0">
               <a:lnSpc>
                 <a:spcPct val="115000"/>
               </a:lnSpc>
               <a:buNone/>
             </a:pPr>
             <a:r>
-              <a:rPr lang="en-US" sz="780" i="1" dirty="0">
+              <a:rPr lang="en-US" sz="1000" i="1" dirty="0">
                 <a:solidFill>
                   <a:srgbClr val="6B7280"/>
                 </a:solidFill>
@@ -7683,7 +7753,7 @@
               </a:rPr>
               <a:t>Hoje: compra com menos de 30 dias, pagando 2–3× mais.</a:t>
             </a:r>
-            <a:endParaRPr lang="en-US" sz="780" dirty="0"/>
+            <a:endParaRPr lang="en-US" sz="1000" dirty="0"/>
           </a:p>
         </p:txBody>
       </p:sp>
@@ -7706,13 +7776,20 @@
           </a:solidFill>
           <a:ln/>
           <a:effectLst>
-            <a:outerShdw sx="100000" sy="100000" kx="0" ky="0" algn="bl" rotWithShape="0" blurRad="63500" dist="25400" dir="5400000">
+            <a:outerShdw blurRad="63500" dist="25400" dir="5400000" algn="bl" rotWithShape="0">
               <a:srgbClr val="0B1220">
                 <a:alpha val="16000"/>
               </a:srgbClr>
             </a:outerShdw>
           </a:effectLst>
         </p:spPr>
+        <p:txBody>
+          <a:bodyPr/>
+          <a:lstStyle/>
+          <a:p>
+            <a:endParaRPr lang="pt-BR"/>
+          </a:p>
+        </p:txBody>
       </p:sp>
       <p:sp>
         <p:nvSpPr>
@@ -7735,7 +7812,7 @@
           <a:bodyPr wrap="square" lIns="0" tIns="0" rIns="0" bIns="0" rtlCol="0" anchor="ctr"/>
           <a:lstStyle/>
           <a:p>
-            <a:pPr algn="ctr" indent="0" marL="0">
+            <a:pPr marL="0" indent="0" algn="ctr">
               <a:buNone/>
             </a:pPr>
             <a:r>
@@ -7779,13 +7856,20 @@
             <a:prstDash val="solid"/>
           </a:ln>
           <a:effectLst>
-            <a:outerShdw sx="100000" sy="100000" kx="0" ky="0" algn="bl" rotWithShape="0" blurRad="63500" dist="25400" dir="5400000">
+            <a:outerShdw blurRad="63500" dist="25400" dir="5400000" algn="bl" rotWithShape="0">
               <a:srgbClr val="0B1220">
                 <a:alpha val="16000"/>
               </a:srgbClr>
             </a:outerShdw>
           </a:effectLst>
         </p:spPr>
+        <p:txBody>
+          <a:bodyPr/>
+          <a:lstStyle/>
+          <a:p>
+            <a:endParaRPr lang="pt-BR"/>
+          </a:p>
+        </p:txBody>
       </p:sp>
       <p:sp>
         <p:nvSpPr>
@@ -7808,11 +7892,11 @@
           <a:bodyPr wrap="square" lIns="0" tIns="0" rIns="0" bIns="0" rtlCol="0" anchor="ctr"/>
           <a:lstStyle/>
           <a:p>
-            <a:pPr indent="0" marL="0">
-              <a:buNone/>
-            </a:pPr>
-            <a:r>
-              <a:rPr lang="en-US" sz="700" spc="120" kern="0" dirty="0">
+            <a:pPr marL="0" indent="0">
+              <a:buNone/>
+            </a:pPr>
+            <a:r>
+              <a:rPr lang="en-US" sz="1000" kern="0" spc="120" dirty="0">
                 <a:solidFill>
                   <a:srgbClr val="9A7508"/>
                 </a:solidFill>
@@ -7822,7 +7906,7 @@
               </a:rPr>
               <a:t>TUDO NUM ROTEIRO</a:t>
             </a:r>
-            <a:endParaRPr lang="en-US" sz="700" dirty="0"/>
+            <a:endParaRPr lang="en-US" sz="1000" dirty="0"/>
           </a:p>
         </p:txBody>
       </p:sp>
@@ -7847,14 +7931,14 @@
           <a:bodyPr wrap="square" lIns="0" tIns="0" rIns="0" bIns="0" rtlCol="0" anchor="ctr"/>
           <a:lstStyle/>
           <a:p>
-            <a:pPr indent="0" marL="0">
+            <a:pPr marL="0" indent="0">
               <a:lnSpc>
                 <a:spcPct val="100000"/>
               </a:lnSpc>
               <a:buNone/>
             </a:pPr>
             <a:r>
-              <a:rPr lang="en-US" sz="1250" b="1" dirty="0">
+              <a:rPr lang="en-US" b="1" dirty="0">
                 <a:solidFill>
                   <a:srgbClr val="0B1220"/>
                 </a:solidFill>
@@ -7864,7 +7948,7 @@
               </a:rPr>
               <a:t>Semana do módulo</a:t>
             </a:r>
-            <a:endParaRPr lang="en-US" sz="1250" dirty="0"/>
+            <a:endParaRPr lang="en-US" dirty="0"/>
           </a:p>
         </p:txBody>
       </p:sp>
@@ -7889,14 +7973,14 @@
           <a:bodyPr wrap="square" lIns="0" tIns="0" rIns="0" bIns="0" rtlCol="0" anchor="t"/>
           <a:lstStyle/>
           <a:p>
-            <a:pPr indent="0" marL="0">
+            <a:pPr marL="0" indent="0">
               <a:lnSpc>
                 <a:spcPct val="120000"/>
               </a:lnSpc>
               <a:buNone/>
             </a:pPr>
             <a:r>
-              <a:rPr lang="en-US" sz="880" dirty="0">
+              <a:rPr lang="en-US" sz="1050" dirty="0">
                 <a:solidFill>
                   <a:srgbClr val="1B2435"/>
                 </a:solidFill>
@@ -7906,7 +7990,7 @@
               </a:rPr>
               <a:t>Voo, hotel e traslado num roteiro único no app, lembretes proativos e o concierge da turma a uma mensagem de distância no WhatsApp.</a:t>
             </a:r>
-            <a:endParaRPr lang="en-US" sz="880" dirty="0"/>
+            <a:endParaRPr lang="en-US" sz="1050" dirty="0"/>
           </a:p>
         </p:txBody>
       </p:sp>
@@ -7932,6 +8016,13 @@
             <a:prstDash val="solid"/>
           </a:ln>
         </p:spPr>
+        <p:txBody>
+          <a:bodyPr/>
+          <a:lstStyle/>
+          <a:p>
+            <a:endParaRPr lang="pt-BR"/>
+          </a:p>
+        </p:txBody>
       </p:sp>
       <p:sp>
         <p:nvSpPr>
@@ -7954,14 +8045,14 @@
           <a:bodyPr wrap="square" lIns="0" tIns="0" rIns="0" bIns="0" rtlCol="0" anchor="t"/>
           <a:lstStyle/>
           <a:p>
-            <a:pPr indent="0" marL="0">
+            <a:pPr marL="0" indent="0">
               <a:lnSpc>
                 <a:spcPct val="115000"/>
               </a:lnSpc>
               <a:buNone/>
             </a:pPr>
             <a:r>
-              <a:rPr lang="en-US" sz="780" i="1" dirty="0">
+              <a:rPr lang="en-US" sz="1000" i="1" dirty="0">
                 <a:solidFill>
                   <a:srgbClr val="6B7280"/>
                 </a:solidFill>
@@ -7971,7 +8062,7 @@
               </a:rPr>
               <a:t>Hoje: três apps, e-mails soltos e correria.</a:t>
             </a:r>
-            <a:endParaRPr lang="en-US" sz="780" dirty="0"/>
+            <a:endParaRPr lang="en-US" sz="1000" dirty="0"/>
           </a:p>
         </p:txBody>
       </p:sp>
@@ -7994,13 +8085,20 @@
           </a:solidFill>
           <a:ln/>
           <a:effectLst>
-            <a:outerShdw sx="100000" sy="100000" kx="0" ky="0" algn="bl" rotWithShape="0" blurRad="63500" dist="25400" dir="5400000">
+            <a:outerShdw blurRad="63500" dist="25400" dir="5400000" algn="bl" rotWithShape="0">
               <a:srgbClr val="0B1220">
                 <a:alpha val="16000"/>
               </a:srgbClr>
             </a:outerShdw>
           </a:effectLst>
         </p:spPr>
+        <p:txBody>
+          <a:bodyPr/>
+          <a:lstStyle/>
+          <a:p>
+            <a:endParaRPr lang="pt-BR"/>
+          </a:p>
+        </p:txBody>
       </p:sp>
       <p:sp>
         <p:nvSpPr>
@@ -8023,7 +8121,7 @@
           <a:bodyPr wrap="square" lIns="0" tIns="0" rIns="0" bIns="0" rtlCol="0" anchor="ctr"/>
           <a:lstStyle/>
           <a:p>
-            <a:pPr algn="ctr" indent="0" marL="0">
+            <a:pPr marL="0" indent="0" algn="ctr">
               <a:buNone/>
             </a:pPr>
             <a:r>
@@ -8067,13 +8165,20 @@
             <a:prstDash val="solid"/>
           </a:ln>
           <a:effectLst>
-            <a:outerShdw sx="100000" sy="100000" kx="0" ky="0" algn="bl" rotWithShape="0" blurRad="63500" dist="25400" dir="5400000">
+            <a:outerShdw blurRad="63500" dist="25400" dir="5400000" algn="bl" rotWithShape="0">
               <a:srgbClr val="0B1220">
                 <a:alpha val="16000"/>
               </a:srgbClr>
             </a:outerShdw>
           </a:effectLst>
         </p:spPr>
+        <p:txBody>
+          <a:bodyPr/>
+          <a:lstStyle/>
+          <a:p>
+            <a:endParaRPr lang="pt-BR"/>
+          </a:p>
+        </p:txBody>
       </p:sp>
       <p:sp>
         <p:nvSpPr>
@@ -8096,11 +8201,11 @@
           <a:bodyPr wrap="square" lIns="0" tIns="0" rIns="0" bIns="0" rtlCol="0" anchor="ctr"/>
           <a:lstStyle/>
           <a:p>
-            <a:pPr indent="0" marL="0">
-              <a:buNone/>
-            </a:pPr>
-            <a:r>
-              <a:rPr lang="en-US" sz="700" spc="120" kern="0" dirty="0">
+            <a:pPr marL="0" indent="0">
+              <a:buNone/>
+            </a:pPr>
+            <a:r>
+              <a:rPr lang="en-US" sz="1000" kern="0" spc="120" dirty="0">
                 <a:solidFill>
                   <a:srgbClr val="9A7508"/>
                 </a:solidFill>
@@ -8110,7 +8215,7 @@
               </a:rPr>
               <a:t>FOCO TOTAL</a:t>
             </a:r>
-            <a:endParaRPr lang="en-US" sz="700" dirty="0"/>
+            <a:endParaRPr lang="en-US" sz="1000" dirty="0"/>
           </a:p>
         </p:txBody>
       </p:sp>
@@ -8135,14 +8240,14 @@
           <a:bodyPr wrap="square" lIns="0" tIns="0" rIns="0" bIns="0" rtlCol="0" anchor="ctr"/>
           <a:lstStyle/>
           <a:p>
-            <a:pPr indent="0" marL="0">
+            <a:pPr marL="0" indent="0">
               <a:lnSpc>
                 <a:spcPct val="100000"/>
               </a:lnSpc>
               <a:buNone/>
             </a:pPr>
             <a:r>
-              <a:rPr lang="en-US" sz="1250" b="1" dirty="0">
+              <a:rPr lang="en-US" b="1" dirty="0">
                 <a:solidFill>
                   <a:srgbClr val="0B1220"/>
                 </a:solidFill>
@@ -8152,7 +8257,7 @@
               </a:rPr>
               <a:t>No encontro</a:t>
             </a:r>
-            <a:endParaRPr lang="en-US" sz="1250" dirty="0"/>
+            <a:endParaRPr lang="en-US" dirty="0"/>
           </a:p>
         </p:txBody>
       </p:sp>
@@ -8177,14 +8282,14 @@
           <a:bodyPr wrap="square" lIns="0" tIns="0" rIns="0" bIns="0" rtlCol="0" anchor="t"/>
           <a:lstStyle/>
           <a:p>
-            <a:pPr indent="0" marL="0">
+            <a:pPr marL="0" indent="0">
               <a:lnSpc>
                 <a:spcPct val="120000"/>
               </a:lnSpc>
               <a:buNone/>
             </a:pPr>
             <a:r>
-              <a:rPr lang="en-US" sz="880" dirty="0">
+              <a:rPr lang="en-US" sz="1050" dirty="0">
                 <a:solidFill>
                   <a:srgbClr val="1B2435"/>
                 </a:solidFill>
@@ -8194,7 +8299,7 @@
               </a:rPr>
               <a:t>Ricardo chega tranquilo e focado na aula. O custo consolidado aparece no painel do programa — sem planilha de reembolso.</a:t>
             </a:r>
-            <a:endParaRPr lang="en-US" sz="880" dirty="0"/>
+            <a:endParaRPr lang="en-US" sz="1050" dirty="0"/>
           </a:p>
         </p:txBody>
       </p:sp>
@@ -8220,6 +8325,13 @@
             <a:prstDash val="solid"/>
           </a:ln>
         </p:spPr>
+        <p:txBody>
+          <a:bodyPr/>
+          <a:lstStyle/>
+          <a:p>
+            <a:endParaRPr lang="pt-BR"/>
+          </a:p>
+        </p:txBody>
       </p:sp>
       <p:sp>
         <p:nvSpPr>
@@ -8242,14 +8354,14 @@
           <a:bodyPr wrap="square" lIns="0" tIns="0" rIns="0" bIns="0" rtlCol="0" anchor="t"/>
           <a:lstStyle/>
           <a:p>
-            <a:pPr indent="0" marL="0">
+            <a:pPr marL="0" indent="0">
               <a:lnSpc>
                 <a:spcPct val="115000"/>
               </a:lnSpc>
               <a:buNone/>
             </a:pPr>
             <a:r>
-              <a:rPr lang="en-US" sz="780" i="1" dirty="0">
+              <a:rPr lang="en-US" sz="1000" i="1" dirty="0">
                 <a:solidFill>
                   <a:srgbClr val="6B7280"/>
                 </a:solidFill>
@@ -8259,7 +8371,7 @@
               </a:rPr>
               <a:t>Hoje: chega cansado e ainda fecha a planilha.</a:t>
             </a:r>
-            <a:endParaRPr lang="en-US" sz="780" dirty="0"/>
+            <a:endParaRPr lang="en-US" sz="1000" dirty="0"/>
           </a:p>
         </p:txBody>
       </p:sp>
@@ -8284,11 +8396,11 @@
           <a:bodyPr wrap="square" lIns="0" tIns="0" rIns="0" bIns="0" rtlCol="0" anchor="ctr"/>
           <a:lstStyle/>
           <a:p>
-            <a:pPr algn="ctr" indent="0" marL="0">
-              <a:buNone/>
-            </a:pPr>
-            <a:r>
-              <a:rPr lang="en-US" sz="1050" dirty="0">
+            <a:pPr marL="0" indent="0" algn="ctr">
+              <a:buNone/>
+            </a:pPr>
+            <a:r>
+              <a:rPr lang="en-US" sz="1400" dirty="0">
                 <a:solidFill>
                   <a:srgbClr val="0B1220"/>
                 </a:solidFill>
@@ -8298,7 +8410,7 @@
               </a:rPr>
               <a:t>E no módulo seguinte, tudo se repete — sem que o Ricardo precise pensar nisso.</a:t>
             </a:r>
-            <a:endParaRPr lang="en-US" sz="1050" dirty="0"/>
+            <a:endParaRPr lang="en-US" sz="1400" dirty="0"/>
           </a:p>
         </p:txBody>
       </p:sp>
@@ -8323,11 +8435,11 @@
           <a:bodyPr wrap="square" lIns="0" tIns="0" rIns="0" bIns="0" rtlCol="0" anchor="ctr"/>
           <a:lstStyle/>
           <a:p>
-            <a:pPr algn="l" indent="0" marL="0">
-              <a:buNone/>
-            </a:pPr>
-            <a:r>
-              <a:rPr lang="en-US" sz="650" spc="120" kern="0" dirty="0">
+            <a:pPr marL="0" indent="0" algn="l">
+              <a:buNone/>
+            </a:pPr>
+            <a:r>
+              <a:rPr lang="en-US" sz="650" kern="0" spc="120" dirty="0">
                 <a:solidFill>
                   <a:srgbClr val="9AA1AD"/>
                 </a:solidFill>
@@ -8362,7 +8474,7 @@
           <a:bodyPr wrap="square" lIns="0" tIns="0" rIns="0" bIns="0" rtlCol="0" anchor="ctr"/>
           <a:lstStyle/>
           <a:p>
-            <a:pPr algn="r" indent="0" marL="0">
+            <a:pPr marL="0" indent="0" algn="r">
               <a:buNone/>
             </a:pPr>
             <a:r>
@@ -8396,6 +8508,7 @@
         <a:solidFill>
           <a:srgbClr val="F7F8FA"/>
         </a:solidFill>
+        <a:effectLst/>
       </p:bgPr>
     </p:bg>
     <p:spTree>
@@ -8433,7 +8546,7 @@
           <a:bodyPr wrap="square" lIns="0" tIns="0" rIns="0" bIns="0" rtlCol="0" anchor="ctr"/>
           <a:lstStyle/>
           <a:p>
-            <a:pPr algn="l" indent="0" marL="0">
+            <a:pPr marL="0" indent="0" algn="l">
               <a:buNone/>
             </a:pPr>
             <a:r>
@@ -8447,9 +8560,6 @@
               </a:rPr>
               <a:t>06  </a:t>
             </a:r>
-            <a:pPr algn="l" indent="0" marL="0">
-              <a:buNone/>
-            </a:pPr>
             <a:r>
               <a:rPr lang="en-US" sz="2300" b="1" dirty="0">
                 <a:solidFill>
@@ -8486,11 +8596,11 @@
           <a:bodyPr wrap="square" lIns="0" tIns="0" rIns="0" bIns="0" rtlCol="0" anchor="ctr"/>
           <a:lstStyle/>
           <a:p>
-            <a:pPr indent="0" marL="0">
-              <a:buNone/>
-            </a:pPr>
-            <a:r>
-              <a:rPr lang="en-US" sz="1100" dirty="0">
+            <a:pPr marL="0" indent="0">
+              <a:buNone/>
+            </a:pPr>
+            <a:r>
+              <a:rPr lang="en-US" sz="1600" dirty="0">
                 <a:solidFill>
                   <a:srgbClr val="0B1220"/>
                 </a:solidFill>
@@ -8500,7 +8610,7 @@
               </a:rPr>
               <a:t>Quem tenta resolver hoje</a:t>
             </a:r>
-            <a:endParaRPr lang="en-US" sz="1100" dirty="0"/>
+            <a:endParaRPr lang="en-US" sz="1600" dirty="0"/>
           </a:p>
         </p:txBody>
       </p:sp>
@@ -8530,13 +8640,20 @@
             <a:prstDash val="solid"/>
           </a:ln>
           <a:effectLst>
-            <a:outerShdw sx="100000" sy="100000" kx="0" ky="0" algn="bl" rotWithShape="0" blurRad="63500" dist="25400" dir="5400000">
+            <a:outerShdw blurRad="63500" dist="25400" dir="5400000" algn="bl" rotWithShape="0">
               <a:srgbClr val="0B1220">
                 <a:alpha val="16000"/>
               </a:srgbClr>
             </a:outerShdw>
           </a:effectLst>
         </p:spPr>
+        <p:txBody>
+          <a:bodyPr/>
+          <a:lstStyle/>
+          <a:p>
+            <a:endParaRPr lang="pt-BR"/>
+          </a:p>
+        </p:txBody>
       </p:sp>
       <p:sp>
         <p:nvSpPr>
@@ -8546,7 +8663,7 @@
         </p:nvSpPr>
         <p:spPr>
           <a:xfrm>
-            <a:off x="502920" y="1408176"/>
+            <a:off x="502920" y="1399032"/>
             <a:ext cx="5029200" cy="256032"/>
           </a:xfrm>
           <a:prstGeom prst="rect">
@@ -8559,11 +8676,11 @@
           <a:bodyPr wrap="square" lIns="0" tIns="0" rIns="0" bIns="0" rtlCol="0" anchor="ctr"/>
           <a:lstStyle/>
           <a:p>
-            <a:pPr indent="0" marL="0">
-              <a:buNone/>
-            </a:pPr>
-            <a:r>
-              <a:rPr lang="en-US" sz="1050" dirty="0">
+            <a:pPr marL="0" indent="0">
+              <a:buNone/>
+            </a:pPr>
+            <a:r>
+              <a:rPr lang="en-US" sz="1400" dirty="0">
                 <a:solidFill>
                   <a:srgbClr val="0B1220"/>
                 </a:solidFill>
@@ -8573,7 +8690,7 @@
               </a:rPr>
               <a:t>OTAs e apps de companhia</a:t>
             </a:r>
-            <a:endParaRPr lang="en-US" sz="1050" dirty="0"/>
+            <a:endParaRPr lang="en-US" sz="1400" dirty="0"/>
           </a:p>
         </p:txBody>
       </p:sp>
@@ -8585,7 +8702,7 @@
         </p:nvSpPr>
         <p:spPr>
           <a:xfrm>
-            <a:off x="502920" y="1682496"/>
+            <a:off x="502920" y="1673352"/>
             <a:ext cx="5029200" cy="201168"/>
           </a:xfrm>
           <a:prstGeom prst="rect">
@@ -8598,11 +8715,11 @@
           <a:bodyPr wrap="square" lIns="0" tIns="0" rIns="0" bIns="0" rtlCol="0" anchor="ctr"/>
           <a:lstStyle/>
           <a:p>
-            <a:pPr indent="0" marL="0">
-              <a:buNone/>
-            </a:pPr>
-            <a:r>
-              <a:rPr lang="en-US" sz="800" dirty="0">
+            <a:pPr marL="0" indent="0">
+              <a:buNone/>
+            </a:pPr>
+            <a:r>
+              <a:rPr lang="en-US" sz="1050" dirty="0">
                 <a:solidFill>
                   <a:srgbClr val="6B7280"/>
                 </a:solidFill>
@@ -8612,7 +8729,7 @@
               </a:rPr>
               <a:t>Decolar, CVC, Booking, LATAM, GOL, Azul</a:t>
             </a:r>
-            <a:endParaRPr lang="en-US" sz="800" dirty="0"/>
+            <a:endParaRPr lang="en-US" sz="1050" dirty="0"/>
           </a:p>
         </p:txBody>
       </p:sp>
@@ -8624,7 +8741,7 @@
         </p:nvSpPr>
         <p:spPr>
           <a:xfrm>
-            <a:off x="502920" y="1938528"/>
+            <a:off x="502920" y="1929384"/>
             <a:ext cx="5029200" cy="795528"/>
           </a:xfrm>
           <a:prstGeom prst="rect">
@@ -8637,14 +8754,14 @@
           <a:bodyPr wrap="square" lIns="0" tIns="0" rIns="0" bIns="0" rtlCol="0" anchor="t"/>
           <a:lstStyle/>
           <a:p>
-            <a:pPr indent="0" marL="0">
+            <a:pPr marL="0" indent="0">
               <a:lnSpc>
                 <a:spcPct val="118000"/>
               </a:lnSpc>
               <a:buNone/>
             </a:pPr>
             <a:r>
-              <a:rPr lang="en-US" sz="900" dirty="0">
+              <a:rPr lang="en-US" sz="1100" dirty="0">
                 <a:solidFill>
                   <a:srgbClr val="1B2435"/>
                 </a:solidFill>
@@ -8654,7 +8771,7 @@
               </a:rPr>
               <a:t>Resolvem viagem a viagem. Não conhecem o calendário do programa nem compram no momento certo pelo aluno.</a:t>
             </a:r>
-            <a:endParaRPr lang="en-US" sz="900" dirty="0"/>
+            <a:endParaRPr lang="en-US" sz="1100" dirty="0"/>
           </a:p>
         </p:txBody>
       </p:sp>
@@ -8684,13 +8801,20 @@
             <a:prstDash val="solid"/>
           </a:ln>
           <a:effectLst>
-            <a:outerShdw sx="100000" sy="100000" kx="0" ky="0" algn="bl" rotWithShape="0" blurRad="63500" dist="25400" dir="5400000">
+            <a:outerShdw blurRad="63500" dist="25400" dir="5400000" algn="bl" rotWithShape="0">
               <a:srgbClr val="0B1220">
                 <a:alpha val="16000"/>
               </a:srgbClr>
             </a:outerShdw>
           </a:effectLst>
         </p:spPr>
+        <p:txBody>
+          <a:bodyPr/>
+          <a:lstStyle/>
+          <a:p>
+            <a:endParaRPr lang="pt-BR"/>
+          </a:p>
+        </p:txBody>
       </p:sp>
       <p:sp>
         <p:nvSpPr>
@@ -8700,7 +8824,7 @@
         </p:nvSpPr>
         <p:spPr>
           <a:xfrm>
-            <a:off x="502920" y="3108960"/>
+            <a:off x="502920" y="3099816"/>
             <a:ext cx="5029200" cy="256032"/>
           </a:xfrm>
           <a:prstGeom prst="rect">
@@ -8713,11 +8837,11 @@
           <a:bodyPr wrap="square" lIns="0" tIns="0" rIns="0" bIns="0" rtlCol="0" anchor="ctr"/>
           <a:lstStyle/>
           <a:p>
-            <a:pPr indent="0" marL="0">
-              <a:buNone/>
-            </a:pPr>
-            <a:r>
-              <a:rPr lang="en-US" sz="1050" dirty="0">
+            <a:pPr marL="0" indent="0">
+              <a:buNone/>
+            </a:pPr>
+            <a:r>
+              <a:rPr lang="en-US" sz="1400" dirty="0">
                 <a:solidFill>
                   <a:srgbClr val="0B1220"/>
                 </a:solidFill>
@@ -8727,7 +8851,7 @@
               </a:rPr>
               <a:t>Plataformas B2B corporativas</a:t>
             </a:r>
-            <a:endParaRPr lang="en-US" sz="1050" dirty="0"/>
+            <a:endParaRPr lang="en-US" sz="1400" dirty="0"/>
           </a:p>
         </p:txBody>
       </p:sp>
@@ -8739,7 +8863,7 @@
         </p:nvSpPr>
         <p:spPr>
           <a:xfrm>
-            <a:off x="502920" y="3383280"/>
+            <a:off x="502920" y="3374136"/>
             <a:ext cx="5029200" cy="201168"/>
           </a:xfrm>
           <a:prstGeom prst="rect">
@@ -8752,11 +8876,11 @@
           <a:bodyPr wrap="square" lIns="0" tIns="0" rIns="0" bIns="0" rtlCol="0" anchor="ctr"/>
           <a:lstStyle/>
           <a:p>
-            <a:pPr indent="0" marL="0">
-              <a:buNone/>
-            </a:pPr>
-            <a:r>
-              <a:rPr lang="en-US" sz="800" dirty="0">
+            <a:pPr marL="0" indent="0">
+              <a:buNone/>
+            </a:pPr>
+            <a:r>
+              <a:rPr lang="en-US" sz="1050" dirty="0">
                 <a:solidFill>
                   <a:srgbClr val="6B7280"/>
                 </a:solidFill>
@@ -8766,7 +8890,7 @@
               </a:rPr>
               <a:t>Onfly, Argo</a:t>
             </a:r>
-            <a:endParaRPr lang="en-US" sz="800" dirty="0"/>
+            <a:endParaRPr lang="en-US" sz="1050" dirty="0"/>
           </a:p>
         </p:txBody>
       </p:sp>
@@ -8778,7 +8902,7 @@
         </p:nvSpPr>
         <p:spPr>
           <a:xfrm>
-            <a:off x="502920" y="3639312"/>
+            <a:off x="502920" y="3630168"/>
             <a:ext cx="5029200" cy="795528"/>
           </a:xfrm>
           <a:prstGeom prst="rect">
@@ -8791,14 +8915,14 @@
           <a:bodyPr wrap="square" lIns="0" tIns="0" rIns="0" bIns="0" rtlCol="0" anchor="t"/>
           <a:lstStyle/>
           <a:p>
-            <a:pPr indent="0" marL="0">
+            <a:pPr marL="0" indent="0">
               <a:lnSpc>
                 <a:spcPct val="118000"/>
               </a:lnSpc>
               <a:buNone/>
             </a:pPr>
             <a:r>
-              <a:rPr lang="en-US" sz="900" dirty="0">
+              <a:rPr lang="en-US" sz="1100" dirty="0">
                 <a:solidFill>
                   <a:srgbClr val="1B2435"/>
                 </a:solidFill>
@@ -8808,7 +8932,7 @@
               </a:rPr>
               <a:t>Só entram com CNPJ e política de empresa. O aluno pessoa física fica de fora — é o órfão estrutural.</a:t>
             </a:r>
-            <a:endParaRPr lang="en-US" sz="900" dirty="0"/>
+            <a:endParaRPr lang="en-US" sz="1100" dirty="0"/>
           </a:p>
         </p:txBody>
       </p:sp>
@@ -8838,13 +8962,20 @@
             <a:prstDash val="solid"/>
           </a:ln>
           <a:effectLst>
-            <a:outerShdw sx="100000" sy="100000" kx="0" ky="0" algn="bl" rotWithShape="0" blurRad="63500" dist="25400" dir="5400000">
+            <a:outerShdw blurRad="63500" dist="25400" dir="5400000" algn="bl" rotWithShape="0">
               <a:srgbClr val="0B1220">
                 <a:alpha val="16000"/>
               </a:srgbClr>
             </a:outerShdw>
           </a:effectLst>
         </p:spPr>
+        <p:txBody>
+          <a:bodyPr/>
+          <a:lstStyle/>
+          <a:p>
+            <a:endParaRPr lang="pt-BR"/>
+          </a:p>
+        </p:txBody>
       </p:sp>
       <p:sp>
         <p:nvSpPr>
@@ -8854,7 +8985,7 @@
         </p:nvSpPr>
         <p:spPr>
           <a:xfrm>
-            <a:off x="502920" y="4809744"/>
+            <a:off x="502920" y="4800600"/>
             <a:ext cx="5029200" cy="256032"/>
           </a:xfrm>
           <a:prstGeom prst="rect">
@@ -8867,11 +8998,11 @@
           <a:bodyPr wrap="square" lIns="0" tIns="0" rIns="0" bIns="0" rtlCol="0" anchor="ctr"/>
           <a:lstStyle/>
           <a:p>
-            <a:pPr indent="0" marL="0">
-              <a:buNone/>
-            </a:pPr>
-            <a:r>
-              <a:rPr lang="en-US" sz="1050" dirty="0">
+            <a:pPr marL="0" indent="0">
+              <a:buNone/>
+            </a:pPr>
+            <a:r>
+              <a:rPr lang="en-US" sz="1400" dirty="0">
                 <a:solidFill>
                   <a:srgbClr val="0B1220"/>
                 </a:solidFill>
@@ -8881,7 +9012,7 @@
               </a:rPr>
               <a:t>Agências tradicionais</a:t>
             </a:r>
-            <a:endParaRPr lang="en-US" sz="1050" dirty="0"/>
+            <a:endParaRPr lang="en-US" sz="1400" dirty="0"/>
           </a:p>
         </p:txBody>
       </p:sp>
@@ -8893,7 +9024,7 @@
         </p:nvSpPr>
         <p:spPr>
           <a:xfrm>
-            <a:off x="502920" y="5084064"/>
+            <a:off x="502920" y="5074920"/>
             <a:ext cx="5029200" cy="201168"/>
           </a:xfrm>
           <a:prstGeom prst="rect">
@@ -8906,11 +9037,11 @@
           <a:bodyPr wrap="square" lIns="0" tIns="0" rIns="0" bIns="0" rtlCol="0" anchor="ctr"/>
           <a:lstStyle/>
           <a:p>
-            <a:pPr indent="0" marL="0">
-              <a:buNone/>
-            </a:pPr>
-            <a:r>
-              <a:rPr lang="en-US" sz="800" dirty="0">
+            <a:pPr marL="0" indent="0">
+              <a:buNone/>
+            </a:pPr>
+            <a:r>
+              <a:rPr lang="en-US" sz="1050" dirty="0">
                 <a:solidFill>
                   <a:srgbClr val="6B7280"/>
                 </a:solidFill>
@@ -8920,7 +9051,7 @@
               </a:rPr>
               <a:t>Cotação sob demanda</a:t>
             </a:r>
-            <a:endParaRPr lang="en-US" sz="800" dirty="0"/>
+            <a:endParaRPr lang="en-US" sz="1050" dirty="0"/>
           </a:p>
         </p:txBody>
       </p:sp>
@@ -8932,7 +9063,7 @@
         </p:nvSpPr>
         <p:spPr>
           <a:xfrm>
-            <a:off x="502920" y="5340096"/>
+            <a:off x="502920" y="5330952"/>
             <a:ext cx="5029200" cy="795528"/>
           </a:xfrm>
           <a:prstGeom prst="rect">
@@ -8945,14 +9076,14 @@
           <a:bodyPr wrap="square" lIns="0" tIns="0" rIns="0" bIns="0" rtlCol="0" anchor="t"/>
           <a:lstStyle/>
           <a:p>
-            <a:pPr indent="0" marL="0">
+            <a:pPr marL="0" indent="0">
               <a:lnSpc>
                 <a:spcPct val="118000"/>
               </a:lnSpc>
               <a:buNone/>
             </a:pPr>
             <a:r>
-              <a:rPr lang="en-US" sz="900" dirty="0">
+              <a:rPr lang="en-US" sz="1100" dirty="0">
                 <a:solidFill>
                   <a:srgbClr val="1B2435"/>
                 </a:solidFill>
@@ -8962,7 +9093,7 @@
               </a:rPr>
               <a:t>Atendem quando procuradas. Sem integração com a escola, sem compra programada, sem visão do programa inteiro.</a:t>
             </a:r>
-            <a:endParaRPr lang="en-US" sz="900" dirty="0"/>
+            <a:endParaRPr lang="en-US" sz="1100" dirty="0"/>
           </a:p>
         </p:txBody>
       </p:sp>
@@ -8992,13 +9123,20 @@
             <a:prstDash val="solid"/>
           </a:ln>
           <a:effectLst>
-            <a:outerShdw sx="100000" sy="100000" kx="0" ky="0" algn="bl" rotWithShape="0" blurRad="63500" dist="25400" dir="5400000">
+            <a:outerShdw blurRad="63500" dist="25400" dir="5400000" algn="bl" rotWithShape="0">
               <a:srgbClr val="0B1220">
                 <a:alpha val="16000"/>
               </a:srgbClr>
             </a:outerShdw>
           </a:effectLst>
         </p:spPr>
+        <p:txBody>
+          <a:bodyPr/>
+          <a:lstStyle/>
+          <a:p>
+            <a:endParaRPr lang="pt-BR"/>
+          </a:p>
+        </p:txBody>
       </p:sp>
       <p:sp>
         <p:nvSpPr>
@@ -9021,7 +9159,7 @@
           <a:bodyPr wrap="square" lIns="0" tIns="0" rIns="0" bIns="0" rtlCol="0" anchor="ctr"/>
           <a:lstStyle/>
           <a:p>
-            <a:pPr algn="l" indent="0" marL="0">
+            <a:pPr marL="0" indent="0" algn="l">
               <a:buNone/>
             </a:pPr>
             <a:r>
@@ -9035,9 +9173,6 @@
               </a:rPr>
               <a:t>Ant</a:t>
             </a:r>
-            <a:pPr algn="l" indent="0" marL="0">
-              <a:buNone/>
-            </a:pPr>
             <a:r>
               <a:rPr lang="en-US" sz="2200" b="1" dirty="0">
                 <a:solidFill>
@@ -9049,9 +9184,6 @@
               </a:rPr>
               <a:t>é</a:t>
             </a:r>
-            <a:pPr algn="l" indent="0" marL="0">
-              <a:buNone/>
-            </a:pPr>
             <a:r>
               <a:rPr lang="en-US" sz="2200" b="1" dirty="0">
                 <a:solidFill>
@@ -9088,11 +9220,11 @@
           <a:bodyPr wrap="square" lIns="0" tIns="0" rIns="0" bIns="0" rtlCol="0" anchor="ctr"/>
           <a:lstStyle/>
           <a:p>
-            <a:pPr indent="0" marL="0">
-              <a:buNone/>
-            </a:pPr>
-            <a:r>
-              <a:rPr lang="en-US" sz="800" spc="160" kern="0" dirty="0">
+            <a:pPr marL="0" indent="0">
+              <a:buNone/>
+            </a:pPr>
+            <a:r>
+              <a:rPr lang="en-US" sz="1050" kern="0" spc="160" dirty="0">
                 <a:solidFill>
                   <a:srgbClr val="F2B705"/>
                 </a:solidFill>
@@ -9102,7 +9234,7 @@
               </a:rPr>
               <a:t>O QUE SÓ A ANTÉVIA FAZ</a:t>
             </a:r>
-            <a:endParaRPr lang="en-US" sz="800" dirty="0"/>
+            <a:endParaRPr lang="en-US" sz="1050" dirty="0"/>
           </a:p>
         </p:txBody>
       </p:sp>
@@ -9125,6 +9257,13 @@
           </a:solidFill>
           <a:ln/>
         </p:spPr>
+        <p:txBody>
+          <a:bodyPr/>
+          <a:lstStyle/>
+          <a:p>
+            <a:endParaRPr lang="pt-BR"/>
+          </a:p>
+        </p:txBody>
       </p:sp>
       <p:sp>
         <p:nvSpPr>
@@ -9147,7 +9286,7 @@
           <a:bodyPr wrap="square" lIns="0" tIns="0" rIns="0" bIns="0" rtlCol="0" anchor="ctr"/>
           <a:lstStyle/>
           <a:p>
-            <a:pPr algn="ctr" indent="0" marL="0">
+            <a:pPr marL="0" indent="0" algn="ctr">
               <a:buNone/>
             </a:pPr>
             <a:r>
@@ -9186,11 +9325,11 @@
           <a:bodyPr wrap="square" lIns="0" tIns="0" rIns="0" bIns="0" rtlCol="0" anchor="ctr"/>
           <a:lstStyle/>
           <a:p>
-            <a:pPr indent="0" marL="0">
-              <a:buNone/>
-            </a:pPr>
-            <a:r>
-              <a:rPr lang="en-US" sz="1100" dirty="0">
+            <a:pPr marL="0" indent="0">
+              <a:buNone/>
+            </a:pPr>
+            <a:r>
+              <a:rPr lang="en-US" sz="1600" dirty="0">
                 <a:solidFill>
                   <a:srgbClr val="FFFFFF"/>
                 </a:solidFill>
@@ -9200,7 +9339,7 @@
               </a:rPr>
               <a:t>Integrada ao calendário acadêmico</a:t>
             </a:r>
-            <a:endParaRPr lang="en-US" sz="1100" dirty="0"/>
+            <a:endParaRPr lang="en-US" sz="1600" dirty="0"/>
           </a:p>
         </p:txBody>
       </p:sp>
@@ -9225,14 +9364,14 @@
           <a:bodyPr wrap="square" lIns="0" tIns="0" rIns="0" bIns="0" rtlCol="0" anchor="t"/>
           <a:lstStyle/>
           <a:p>
-            <a:pPr indent="0" marL="0">
+            <a:pPr marL="0" indent="0">
               <a:lnSpc>
                 <a:spcPct val="118000"/>
               </a:lnSpc>
               <a:buNone/>
             </a:pPr>
             <a:r>
-              <a:rPr lang="en-US" sz="950" dirty="0">
+              <a:rPr lang="en-US" sz="1100" dirty="0">
                 <a:solidFill>
                   <a:srgbClr val="E6E8F0"/>
                 </a:solidFill>
@@ -9242,7 +9381,7 @@
               </a:rPr>
               <a:t>A única que sabe as datas antes de o aluno decidir — e age sobre elas.</a:t>
             </a:r>
-            <a:endParaRPr lang="en-US" sz="950" dirty="0"/>
+            <a:endParaRPr lang="en-US" sz="1100" dirty="0"/>
           </a:p>
         </p:txBody>
       </p:sp>
@@ -9265,6 +9404,13 @@
           </a:solidFill>
           <a:ln/>
         </p:spPr>
+        <p:txBody>
+          <a:bodyPr/>
+          <a:lstStyle/>
+          <a:p>
+            <a:endParaRPr lang="pt-BR"/>
+          </a:p>
+        </p:txBody>
       </p:sp>
       <p:sp>
         <p:nvSpPr>
@@ -9287,7 +9433,7 @@
           <a:bodyPr wrap="square" lIns="0" tIns="0" rIns="0" bIns="0" rtlCol="0" anchor="ctr"/>
           <a:lstStyle/>
           <a:p>
-            <a:pPr algn="ctr" indent="0" marL="0">
+            <a:pPr marL="0" indent="0" algn="ctr">
               <a:buNone/>
             </a:pPr>
             <a:r>
@@ -9326,11 +9472,11 @@
           <a:bodyPr wrap="square" lIns="0" tIns="0" rIns="0" bIns="0" rtlCol="0" anchor="ctr"/>
           <a:lstStyle/>
           <a:p>
-            <a:pPr indent="0" marL="0">
-              <a:buNone/>
-            </a:pPr>
-            <a:r>
-              <a:rPr lang="en-US" sz="1100" dirty="0">
+            <a:pPr marL="0" indent="0">
+              <a:buNone/>
+            </a:pPr>
+            <a:r>
+              <a:rPr lang="en-US" sz="1600" dirty="0">
                 <a:solidFill>
                   <a:srgbClr val="FFFFFF"/>
                 </a:solidFill>
@@ -9340,7 +9486,7 @@
               </a:rPr>
               <a:t>Compra na janela certa</a:t>
             </a:r>
-            <a:endParaRPr lang="en-US" sz="1100" dirty="0"/>
+            <a:endParaRPr lang="en-US" sz="1600" dirty="0"/>
           </a:p>
         </p:txBody>
       </p:sp>
@@ -9365,14 +9511,14 @@
           <a:bodyPr wrap="square" lIns="0" tIns="0" rIns="0" bIns="0" rtlCol="0" anchor="t"/>
           <a:lstStyle/>
           <a:p>
-            <a:pPr indent="0" marL="0">
+            <a:pPr marL="0" indent="0">
               <a:lnSpc>
                 <a:spcPct val="118000"/>
               </a:lnSpc>
               <a:buNone/>
             </a:pPr>
             <a:r>
-              <a:rPr lang="en-US" sz="950" dirty="0">
+              <a:rPr lang="en-US" sz="1100" dirty="0">
                 <a:solidFill>
                   <a:srgbClr val="E6E8F0"/>
                 </a:solidFill>
@@ -9382,7 +9528,7 @@
               </a:rPr>
               <a:t>Bloqueio de grupo da turma com 20–30% de desconto, disparado no momento ideal da tarifa.</a:t>
             </a:r>
-            <a:endParaRPr lang="en-US" sz="950" dirty="0"/>
+            <a:endParaRPr lang="en-US" sz="1100" dirty="0"/>
           </a:p>
         </p:txBody>
       </p:sp>
@@ -9405,6 +9551,13 @@
           </a:solidFill>
           <a:ln/>
         </p:spPr>
+        <p:txBody>
+          <a:bodyPr/>
+          <a:lstStyle/>
+          <a:p>
+            <a:endParaRPr lang="pt-BR"/>
+          </a:p>
+        </p:txBody>
       </p:sp>
       <p:sp>
         <p:nvSpPr>
@@ -9427,7 +9580,7 @@
           <a:bodyPr wrap="square" lIns="0" tIns="0" rIns="0" bIns="0" rtlCol="0" anchor="ctr"/>
           <a:lstStyle/>
           <a:p>
-            <a:pPr algn="ctr" indent="0" marL="0">
+            <a:pPr marL="0" indent="0" algn="ctr">
               <a:buNone/>
             </a:pPr>
             <a:r>
@@ -9466,11 +9619,11 @@
           <a:bodyPr wrap="square" lIns="0" tIns="0" rIns="0" bIns="0" rtlCol="0" anchor="ctr"/>
           <a:lstStyle/>
           <a:p>
-            <a:pPr indent="0" marL="0">
-              <a:buNone/>
-            </a:pPr>
-            <a:r>
-              <a:rPr lang="en-US" sz="1100" dirty="0">
+            <a:pPr marL="0" indent="0">
+              <a:buNone/>
+            </a:pPr>
+            <a:r>
+              <a:rPr lang="en-US" sz="1600" dirty="0">
                 <a:solidFill>
                   <a:srgbClr val="FFFFFF"/>
                 </a:solidFill>
@@ -9480,7 +9633,7 @@
               </a:rPr>
               <a:t>Concierge dedicado por turma</a:t>
             </a:r>
-            <a:endParaRPr lang="en-US" sz="1100" dirty="0"/>
+            <a:endParaRPr lang="en-US" sz="1600" dirty="0"/>
           </a:p>
         </p:txBody>
       </p:sp>
@@ -9505,14 +9658,14 @@
           <a:bodyPr wrap="square" lIns="0" tIns="0" rIns="0" bIns="0" rtlCol="0" anchor="t"/>
           <a:lstStyle/>
           <a:p>
-            <a:pPr indent="0" marL="0">
+            <a:pPr marL="0" indent="0">
               <a:lnSpc>
                 <a:spcPct val="118000"/>
               </a:lnSpc>
               <a:buNone/>
             </a:pPr>
             <a:r>
-              <a:rPr lang="en-US" sz="950" dirty="0">
+              <a:rPr lang="en-US" sz="1100" dirty="0">
                 <a:solidFill>
                   <a:srgbClr val="E6E8F0"/>
                 </a:solidFill>
@@ -9522,7 +9675,7 @@
               </a:rPr>
               <a:t>A função “gestor de viagens do aluno”, que hoje não existe no mercado.</a:t>
             </a:r>
-            <a:endParaRPr lang="en-US" sz="950" dirty="0"/>
+            <a:endParaRPr lang="en-US" sz="1100" dirty="0"/>
           </a:p>
         </p:txBody>
       </p:sp>
@@ -9545,6 +9698,13 @@
           </a:solidFill>
           <a:ln/>
         </p:spPr>
+        <p:txBody>
+          <a:bodyPr/>
+          <a:lstStyle/>
+          <a:p>
+            <a:endParaRPr lang="pt-BR"/>
+          </a:p>
+        </p:txBody>
       </p:sp>
       <p:sp>
         <p:nvSpPr>
@@ -9567,7 +9727,7 @@
           <a:bodyPr wrap="square" lIns="0" tIns="0" rIns="0" bIns="0" rtlCol="0" anchor="ctr"/>
           <a:lstStyle/>
           <a:p>
-            <a:pPr algn="ctr" indent="0" marL="0">
+            <a:pPr marL="0" indent="0" algn="ctr">
               <a:buNone/>
             </a:pPr>
             <a:r>
@@ -9606,11 +9766,11 @@
           <a:bodyPr wrap="square" lIns="0" tIns="0" rIns="0" bIns="0" rtlCol="0" anchor="ctr"/>
           <a:lstStyle/>
           <a:p>
-            <a:pPr indent="0" marL="0">
-              <a:buNone/>
-            </a:pPr>
-            <a:r>
-              <a:rPr lang="en-US" sz="1100" dirty="0">
+            <a:pPr marL="0" indent="0">
+              <a:buNone/>
+            </a:pPr>
+            <a:r>
+              <a:rPr lang="en-US" sz="1600" dirty="0">
                 <a:solidFill>
                   <a:srgbClr val="FFFFFF"/>
                 </a:solidFill>
@@ -9620,7 +9780,7 @@
               </a:rPr>
               <a:t>Liberdade do aluno</a:t>
             </a:r>
-            <a:endParaRPr lang="en-US" sz="1100" dirty="0"/>
+            <a:endParaRPr lang="en-US" sz="1600" dirty="0"/>
           </a:p>
         </p:txBody>
       </p:sp>
@@ -9632,7 +9792,7 @@
         </p:nvSpPr>
         <p:spPr>
           <a:xfrm>
-            <a:off x="6675120" y="5486400"/>
+            <a:off x="6675120" y="5477256"/>
             <a:ext cx="4876495" cy="548640"/>
           </a:xfrm>
           <a:prstGeom prst="rect">
@@ -9645,14 +9805,14 @@
           <a:bodyPr wrap="square" lIns="0" tIns="0" rIns="0" bIns="0" rtlCol="0" anchor="t"/>
           <a:lstStyle/>
           <a:p>
-            <a:pPr indent="0" marL="0">
+            <a:pPr marL="0" indent="0">
               <a:lnSpc>
                 <a:spcPct val="118000"/>
               </a:lnSpc>
               <a:buNone/>
             </a:pPr>
             <a:r>
-              <a:rPr lang="en-US" sz="950" dirty="0">
+              <a:rPr lang="en-US" sz="1100" dirty="0">
                 <a:solidFill>
                   <a:srgbClr val="E6E8F0"/>
                 </a:solidFill>
@@ -9662,7 +9822,7 @@
               </a:rPr>
               <a:t>Companhia, voo e milhas continuam sendo escolha dele. Nada é imposto — condição da escola para indicar.</a:t>
             </a:r>
-            <a:endParaRPr lang="en-US" sz="950" dirty="0"/>
+            <a:endParaRPr lang="en-US" sz="1100" dirty="0"/>
           </a:p>
         </p:txBody>
       </p:sp>
@@ -9687,11 +9847,11 @@
           <a:bodyPr wrap="square" lIns="0" tIns="0" rIns="0" bIns="0" rtlCol="0" anchor="ctr"/>
           <a:lstStyle/>
           <a:p>
-            <a:pPr algn="l" indent="0" marL="0">
-              <a:buNone/>
-            </a:pPr>
-            <a:r>
-              <a:rPr lang="en-US" sz="650" spc="120" kern="0" dirty="0">
+            <a:pPr marL="0" indent="0" algn="l">
+              <a:buNone/>
+            </a:pPr>
+            <a:r>
+              <a:rPr lang="en-US" sz="650" kern="0" spc="120" dirty="0">
                 <a:solidFill>
                   <a:srgbClr val="9AA1AD"/>
                 </a:solidFill>
@@ -9726,7 +9886,7 @@
           <a:bodyPr wrap="square" lIns="0" tIns="0" rIns="0" bIns="0" rtlCol="0" anchor="ctr"/>
           <a:lstStyle/>
           <a:p>
-            <a:pPr algn="r" indent="0" marL="0">
+            <a:pPr marL="0" indent="0" algn="r">
               <a:buNone/>
             </a:pPr>
             <a:r>
@@ -9760,6 +9920,7 @@
         <a:solidFill>
           <a:srgbClr val="F7F8FA"/>
         </a:solidFill>
+        <a:effectLst/>
       </p:bgPr>
     </p:bg>
     <p:spTree>
@@ -9797,7 +9958,7 @@
           <a:bodyPr wrap="square" lIns="0" tIns="0" rIns="0" bIns="0" rtlCol="0" anchor="ctr"/>
           <a:lstStyle/>
           <a:p>
-            <a:pPr algn="l" indent="0" marL="0">
+            <a:pPr marL="0" indent="0" algn="l">
               <a:buNone/>
             </a:pPr>
             <a:r>
@@ -9811,9 +9972,6 @@
               </a:rPr>
               <a:t>07  </a:t>
             </a:r>
-            <a:pPr algn="l" indent="0" marL="0">
-              <a:buNone/>
-            </a:pPr>
             <a:r>
               <a:rPr lang="en-US" sz="2300" b="1" dirty="0">
                 <a:solidFill>
@@ -9855,13 +10013,20 @@
             <a:prstDash val="solid"/>
           </a:ln>
           <a:effectLst>
-            <a:outerShdw sx="100000" sy="100000" kx="0" ky="0" algn="bl" rotWithShape="0" blurRad="63500" dist="25400" dir="5400000">
+            <a:outerShdw blurRad="63500" dist="25400" dir="5400000" algn="bl" rotWithShape="0">
               <a:srgbClr val="0B1220">
                 <a:alpha val="16000"/>
               </a:srgbClr>
             </a:outerShdw>
           </a:effectLst>
         </p:spPr>
+        <p:txBody>
+          <a:bodyPr/>
+          <a:lstStyle/>
+          <a:p>
+            <a:endParaRPr lang="pt-BR"/>
+          </a:p>
+        </p:txBody>
       </p:sp>
       <p:sp>
         <p:nvSpPr>
@@ -9892,11 +10057,11 @@
           <a:bodyPr wrap="square" lIns="0" tIns="0" rIns="0" bIns="0" rtlCol="0" anchor="ctr"/>
           <a:lstStyle/>
           <a:p>
-            <a:pPr algn="ctr" indent="0" marL="0">
-              <a:buNone/>
-            </a:pPr>
-            <a:r>
-              <a:rPr lang="en-US" sz="750" spc="120" kern="0" dirty="0">
+            <a:pPr marL="0" indent="0" algn="ctr">
+              <a:buNone/>
+            </a:pPr>
+            <a:r>
+              <a:rPr lang="en-US" sz="750" kern="0" spc="120" dirty="0">
                 <a:solidFill>
                   <a:srgbClr val="9A7508"/>
                 </a:solidFill>
@@ -9931,14 +10096,14 @@
           <a:bodyPr wrap="square" lIns="0" tIns="0" rIns="0" bIns="0" rtlCol="0" anchor="ctr"/>
           <a:lstStyle/>
           <a:p>
-            <a:pPr indent="0" marL="0">
+            <a:pPr marL="0" indent="0">
               <a:lnSpc>
                 <a:spcPct val="102000"/>
               </a:lnSpc>
               <a:buNone/>
             </a:pPr>
             <a:r>
-              <a:rPr lang="en-US" sz="1200" b="1" dirty="0">
+              <a:rPr lang="en-US" sz="1600" b="1" dirty="0">
                 <a:solidFill>
                   <a:srgbClr val="0B1220"/>
                 </a:solidFill>
@@ -9948,7 +10113,7 @@
               </a:rPr>
               <a:t>Escola de negócios</a:t>
             </a:r>
-            <a:endParaRPr lang="en-US" sz="1200" dirty="0"/>
+            <a:endParaRPr lang="en-US" sz="1600" dirty="0"/>
           </a:p>
         </p:txBody>
       </p:sp>
@@ -9973,14 +10138,14 @@
           <a:bodyPr wrap="square" lIns="0" tIns="0" rIns="0" bIns="0" rtlCol="0" anchor="t"/>
           <a:lstStyle/>
           <a:p>
-            <a:pPr indent="0" marL="0">
+            <a:pPr marL="0" indent="0">
               <a:lnSpc>
                 <a:spcPct val="120000"/>
               </a:lnSpc>
               <a:buNone/>
             </a:pPr>
             <a:r>
-              <a:rPr lang="en-US" sz="920" dirty="0">
+              <a:rPr lang="en-US" sz="1050" dirty="0">
                 <a:solidFill>
                   <a:srgbClr val="1B2435"/>
                 </a:solidFill>
@@ -9990,7 +10155,7 @@
               </a:rPr>
               <a:t>Empresta o CNPJ, a turma e as datas fixas do calendário — e indica a Antévia na matrícula, sem obrigar o aluno. Ganha NPS e menos fricção.</a:t>
             </a:r>
-            <a:endParaRPr lang="en-US" sz="920" dirty="0"/>
+            <a:endParaRPr lang="en-US" sz="1050" dirty="0"/>
           </a:p>
         </p:txBody>
       </p:sp>
@@ -10020,13 +10185,20 @@
             <a:prstDash val="solid"/>
           </a:ln>
           <a:effectLst>
-            <a:outerShdw sx="100000" sy="100000" kx="0" ky="0" algn="bl" rotWithShape="0" blurRad="63500" dist="25400" dir="5400000">
+            <a:outerShdw blurRad="63500" dist="25400" dir="5400000" algn="bl" rotWithShape="0">
               <a:srgbClr val="0B1220">
                 <a:alpha val="16000"/>
               </a:srgbClr>
             </a:outerShdw>
           </a:effectLst>
         </p:spPr>
+        <p:txBody>
+          <a:bodyPr/>
+          <a:lstStyle/>
+          <a:p>
+            <a:endParaRPr lang="pt-BR"/>
+          </a:p>
+        </p:txBody>
       </p:sp>
       <p:sp>
         <p:nvSpPr>
@@ -10057,11 +10229,11 @@
           <a:bodyPr wrap="square" lIns="0" tIns="0" rIns="0" bIns="0" rtlCol="0" anchor="ctr"/>
           <a:lstStyle/>
           <a:p>
-            <a:pPr algn="ctr" indent="0" marL="0">
-              <a:buNone/>
-            </a:pPr>
-            <a:r>
-              <a:rPr lang="en-US" sz="750" spc="120" kern="0" dirty="0">
+            <a:pPr marL="0" indent="0" algn="ctr">
+              <a:buNone/>
+            </a:pPr>
+            <a:r>
+              <a:rPr lang="en-US" sz="750" kern="0" spc="120" dirty="0">
                 <a:solidFill>
                   <a:srgbClr val="9A7508"/>
                 </a:solidFill>
@@ -10096,14 +10268,14 @@
           <a:bodyPr wrap="square" lIns="0" tIns="0" rIns="0" bIns="0" rtlCol="0" anchor="ctr"/>
           <a:lstStyle/>
           <a:p>
-            <a:pPr indent="0" marL="0">
+            <a:pPr marL="0" indent="0">
               <a:lnSpc>
                 <a:spcPct val="102000"/>
               </a:lnSpc>
               <a:buNone/>
             </a:pPr>
             <a:r>
-              <a:rPr lang="en-US" sz="1200" b="1" dirty="0">
+              <a:rPr lang="en-US" sz="1600" b="1" dirty="0">
                 <a:solidFill>
                   <a:srgbClr val="0B1220"/>
                 </a:solidFill>
@@ -10113,7 +10285,7 @@
               </a:rPr>
               <a:t>Consolidadoras e agências B2B</a:t>
             </a:r>
-            <a:endParaRPr lang="en-US" sz="1200" dirty="0"/>
+            <a:endParaRPr lang="en-US" sz="1600" dirty="0"/>
           </a:p>
         </p:txBody>
       </p:sp>
@@ -10138,14 +10310,14 @@
           <a:bodyPr wrap="square" lIns="0" tIns="0" rIns="0" bIns="0" rtlCol="0" anchor="t"/>
           <a:lstStyle/>
           <a:p>
-            <a:pPr indent="0" marL="0">
+            <a:pPr marL="0" indent="0">
               <a:lnSpc>
                 <a:spcPct val="120000"/>
               </a:lnSpc>
               <a:buNone/>
             </a:pPr>
             <a:r>
-              <a:rPr lang="en-US" sz="920" dirty="0">
+              <a:rPr lang="en-US" sz="1050" dirty="0">
                 <a:solidFill>
                   <a:srgbClr val="1B2435"/>
                 </a:solidFill>
@@ -10155,7 +10327,7 @@
               </a:rPr>
               <a:t>Estruturam os bloqueios de grupo junto às companhias — o modelo comercial já existe no mercado; a Antévia o embala para o aluno.</a:t>
             </a:r>
-            <a:endParaRPr lang="en-US" sz="920" dirty="0"/>
+            <a:endParaRPr lang="en-US" sz="1050" dirty="0"/>
           </a:p>
         </p:txBody>
       </p:sp>
@@ -10185,13 +10357,20 @@
             <a:prstDash val="solid"/>
           </a:ln>
           <a:effectLst>
-            <a:outerShdw sx="100000" sy="100000" kx="0" ky="0" algn="bl" rotWithShape="0" blurRad="63500" dist="25400" dir="5400000">
+            <a:outerShdw blurRad="63500" dist="25400" dir="5400000" algn="bl" rotWithShape="0">
               <a:srgbClr val="0B1220">
                 <a:alpha val="16000"/>
               </a:srgbClr>
             </a:outerShdw>
           </a:effectLst>
         </p:spPr>
+        <p:txBody>
+          <a:bodyPr/>
+          <a:lstStyle/>
+          <a:p>
+            <a:endParaRPr lang="pt-BR"/>
+          </a:p>
+        </p:txBody>
       </p:sp>
       <p:sp>
         <p:nvSpPr>
@@ -10222,11 +10401,11 @@
           <a:bodyPr wrap="square" lIns="0" tIns="0" rIns="0" bIns="0" rtlCol="0" anchor="ctr"/>
           <a:lstStyle/>
           <a:p>
-            <a:pPr algn="ctr" indent="0" marL="0">
-              <a:buNone/>
-            </a:pPr>
-            <a:r>
-              <a:rPr lang="en-US" sz="750" spc="120" kern="0" dirty="0">
+            <a:pPr marL="0" indent="0" algn="ctr">
+              <a:buNone/>
+            </a:pPr>
+            <a:r>
+              <a:rPr lang="en-US" sz="750" kern="0" spc="120" dirty="0">
                 <a:solidFill>
                   <a:srgbClr val="9A7508"/>
                 </a:solidFill>
@@ -10261,14 +10440,14 @@
           <a:bodyPr wrap="square" lIns="0" tIns="0" rIns="0" bIns="0" rtlCol="0" anchor="ctr"/>
           <a:lstStyle/>
           <a:p>
-            <a:pPr indent="0" marL="0">
+            <a:pPr marL="0" indent="0">
               <a:lnSpc>
                 <a:spcPct val="102000"/>
               </a:lnSpc>
               <a:buNone/>
             </a:pPr>
             <a:r>
-              <a:rPr lang="en-US" sz="1200" b="1" dirty="0">
+              <a:rPr lang="en-US" sz="1600" b="1" dirty="0">
                 <a:solidFill>
                   <a:srgbClr val="0B1220"/>
                 </a:solidFill>
@@ -10278,7 +10457,7 @@
               </a:rPr>
               <a:t>Cias aéreas e hotéis</a:t>
             </a:r>
-            <a:endParaRPr lang="en-US" sz="1200" dirty="0"/>
+            <a:endParaRPr lang="en-US" sz="1600" dirty="0"/>
           </a:p>
         </p:txBody>
       </p:sp>
@@ -10303,14 +10482,14 @@
           <a:bodyPr wrap="square" lIns="0" tIns="0" rIns="0" bIns="0" rtlCol="0" anchor="t"/>
           <a:lstStyle/>
           <a:p>
-            <a:pPr indent="0" marL="0">
+            <a:pPr marL="0" indent="0">
               <a:lnSpc>
                 <a:spcPct val="120000"/>
               </a:lnSpc>
               <a:buNone/>
             </a:pPr>
             <a:r>
-              <a:rPr lang="en-US" sz="920" dirty="0">
+              <a:rPr lang="en-US" sz="1050" dirty="0">
                 <a:solidFill>
                   <a:srgbClr val="1B2435"/>
                 </a:solidFill>
@@ -10320,7 +10499,7 @@
               </a:rPr>
               <a:t>LATAM, GOL, Azul e hotéis próximos aos campi entregam tarifas de grupo em troca de volume garantido e previsível.</a:t>
             </a:r>
-            <a:endParaRPr lang="en-US" sz="920" dirty="0"/>
+            <a:endParaRPr lang="en-US" sz="1050" dirty="0"/>
           </a:p>
         </p:txBody>
       </p:sp>
@@ -10350,13 +10529,20 @@
             <a:prstDash val="solid"/>
           </a:ln>
           <a:effectLst>
-            <a:outerShdw sx="100000" sy="100000" kx="0" ky="0" algn="bl" rotWithShape="0" blurRad="63500" dist="25400" dir="5400000">
+            <a:outerShdw blurRad="63500" dist="25400" dir="5400000" algn="bl" rotWithShape="0">
               <a:srgbClr val="0B1220">
                 <a:alpha val="16000"/>
               </a:srgbClr>
             </a:outerShdw>
           </a:effectLst>
         </p:spPr>
+        <p:txBody>
+          <a:bodyPr/>
+          <a:lstStyle/>
+          <a:p>
+            <a:endParaRPr lang="pt-BR"/>
+          </a:p>
+        </p:txBody>
       </p:sp>
       <p:sp>
         <p:nvSpPr>
@@ -10387,11 +10573,11 @@
           <a:bodyPr wrap="square" lIns="0" tIns="0" rIns="0" bIns="0" rtlCol="0" anchor="ctr"/>
           <a:lstStyle/>
           <a:p>
-            <a:pPr algn="ctr" indent="0" marL="0">
-              <a:buNone/>
-            </a:pPr>
-            <a:r>
-              <a:rPr lang="en-US" sz="750" spc="120" kern="0" dirty="0">
+            <a:pPr marL="0" indent="0" algn="ctr">
+              <a:buNone/>
+            </a:pPr>
+            <a:r>
+              <a:rPr lang="en-US" sz="750" kern="0" spc="120" dirty="0">
                 <a:solidFill>
                   <a:srgbClr val="9A7508"/>
                 </a:solidFill>
@@ -10426,14 +10612,14 @@
           <a:bodyPr wrap="square" lIns="0" tIns="0" rIns="0" bIns="0" rtlCol="0" anchor="ctr"/>
           <a:lstStyle/>
           <a:p>
-            <a:pPr indent="0" marL="0">
+            <a:pPr marL="0" indent="0">
               <a:lnSpc>
                 <a:spcPct val="102000"/>
               </a:lnSpc>
               <a:buNone/>
             </a:pPr>
             <a:r>
-              <a:rPr lang="en-US" sz="1200" b="1" dirty="0">
+              <a:rPr lang="en-US" sz="1600" b="1" dirty="0">
                 <a:solidFill>
                   <a:srgbClr val="0B1220"/>
                 </a:solidFill>
@@ -10443,7 +10629,7 @@
               </a:rPr>
               <a:t>Time Antévia</a:t>
             </a:r>
-            <a:endParaRPr lang="en-US" sz="1200" dirty="0"/>
+            <a:endParaRPr lang="en-US" sz="1600" dirty="0"/>
           </a:p>
         </p:txBody>
       </p:sp>
@@ -10468,14 +10654,14 @@
           <a:bodyPr wrap="square" lIns="0" tIns="0" rIns="0" bIns="0" rtlCol="0" anchor="t"/>
           <a:lstStyle/>
           <a:p>
-            <a:pPr indent="0" marL="0">
+            <a:pPr marL="0" indent="0">
               <a:lnSpc>
                 <a:spcPct val="120000"/>
               </a:lnSpc>
               <a:buNone/>
             </a:pPr>
             <a:r>
-              <a:rPr lang="en-US" sz="920" dirty="0">
+              <a:rPr lang="en-US" sz="1050" dirty="0">
                 <a:solidFill>
                   <a:srgbClr val="1B2435"/>
                 </a:solidFill>
@@ -10485,7 +10671,7 @@
               </a:rPr>
               <a:t>Plataforma ligada ao calendário + concierges por turma atendem o aluno ponta a ponta: da proposta ao reembolso.</a:t>
             </a:r>
-            <a:endParaRPr lang="en-US" sz="920" dirty="0"/>
+            <a:endParaRPr lang="en-US" sz="1050" dirty="0"/>
           </a:p>
         </p:txBody>
       </p:sp>
@@ -10515,13 +10701,20 @@
             <a:prstDash val="solid"/>
           </a:ln>
           <a:effectLst>
-            <a:outerShdw sx="100000" sy="100000" kx="0" ky="0" algn="bl" rotWithShape="0" blurRad="63500" dist="25400" dir="5400000">
+            <a:outerShdw blurRad="63500" dist="25400" dir="5400000" algn="bl" rotWithShape="0">
               <a:srgbClr val="0B1220">
                 <a:alpha val="16000"/>
               </a:srgbClr>
             </a:outerShdw>
           </a:effectLst>
         </p:spPr>
+        <p:txBody>
+          <a:bodyPr/>
+          <a:lstStyle/>
+          <a:p>
+            <a:endParaRPr lang="pt-BR"/>
+          </a:p>
+        </p:txBody>
       </p:sp>
       <p:sp>
         <p:nvSpPr>
@@ -10544,11 +10737,11 @@
           <a:bodyPr wrap="square" lIns="0" tIns="0" rIns="0" bIns="0" rtlCol="0" anchor="ctr"/>
           <a:lstStyle/>
           <a:p>
-            <a:pPr indent="0" marL="0">
-              <a:buNone/>
-            </a:pPr>
-            <a:r>
-              <a:rPr lang="en-US" sz="850" spc="140" kern="0" dirty="0">
+            <a:pPr marL="0" indent="0">
+              <a:buNone/>
+            </a:pPr>
+            <a:r>
+              <a:rPr lang="en-US" sz="850" kern="0" spc="140" dirty="0">
                 <a:solidFill>
                   <a:srgbClr val="F2B705"/>
                 </a:solidFill>
@@ -10588,6 +10781,13 @@
             <a:prstDash val="solid"/>
           </a:ln>
         </p:spPr>
+        <p:txBody>
+          <a:bodyPr/>
+          <a:lstStyle/>
+          <a:p>
+            <a:endParaRPr lang="pt-BR"/>
+          </a:p>
+        </p:txBody>
       </p:sp>
       <p:sp>
         <p:nvSpPr>
@@ -10610,14 +10810,14 @@
           <a:bodyPr wrap="square" lIns="0" tIns="0" rIns="0" bIns="0" rtlCol="0" anchor="ctr"/>
           <a:lstStyle/>
           <a:p>
-            <a:pPr indent="0" marL="0">
+            <a:pPr marL="0" indent="0">
               <a:lnSpc>
                 <a:spcPct val="105000"/>
               </a:lnSpc>
               <a:buNone/>
             </a:pPr>
             <a:r>
-              <a:rPr lang="en-US" sz="950" dirty="0">
+              <a:rPr lang="en-US" sz="1050" dirty="0">
                 <a:solidFill>
                   <a:srgbClr val="FFFFFF"/>
                 </a:solidFill>
@@ -10627,7 +10827,7 @@
               </a:rPr>
               <a:t>Rota concentrada</a:t>
             </a:r>
-            <a:endParaRPr lang="en-US" sz="950" dirty="0"/>
+            <a:endParaRPr lang="en-US" sz="1050" dirty="0"/>
           </a:p>
         </p:txBody>
       </p:sp>
@@ -10652,14 +10852,14 @@
           <a:bodyPr wrap="square" lIns="0" tIns="0" rIns="0" bIns="0" rtlCol="0" anchor="t"/>
           <a:lstStyle/>
           <a:p>
-            <a:pPr indent="0" marL="0">
+            <a:pPr marL="0" indent="0">
               <a:lnSpc>
                 <a:spcPct val="115000"/>
               </a:lnSpc>
               <a:buNone/>
             </a:pPr>
             <a:r>
-              <a:rPr lang="en-US" sz="820" dirty="0">
+              <a:rPr lang="en-US" sz="1000" dirty="0">
                 <a:solidFill>
                   <a:srgbClr val="E6E8F0"/>
                 </a:solidFill>
@@ -10669,7 +10869,7 @@
               </a:rPr>
               <a:t>5–8 origens principais por turma</a:t>
             </a:r>
-            <a:endParaRPr lang="en-US" sz="820" dirty="0"/>
+            <a:endParaRPr lang="en-US" sz="1000" dirty="0"/>
           </a:p>
         </p:txBody>
       </p:sp>
@@ -10699,6 +10899,13 @@
             <a:prstDash val="solid"/>
           </a:ln>
         </p:spPr>
+        <p:txBody>
+          <a:bodyPr/>
+          <a:lstStyle/>
+          <a:p>
+            <a:endParaRPr lang="pt-BR"/>
+          </a:p>
+        </p:txBody>
       </p:sp>
       <p:sp>
         <p:nvSpPr>
@@ -10721,14 +10928,14 @@
           <a:bodyPr wrap="square" lIns="0" tIns="0" rIns="0" bIns="0" rtlCol="0" anchor="ctr"/>
           <a:lstStyle/>
           <a:p>
-            <a:pPr indent="0" marL="0">
+            <a:pPr marL="0" indent="0">
               <a:lnSpc>
                 <a:spcPct val="105000"/>
               </a:lnSpc>
               <a:buNone/>
             </a:pPr>
             <a:r>
-              <a:rPr lang="en-US" sz="950" dirty="0">
+              <a:rPr lang="en-US" sz="1050" dirty="0">
                 <a:solidFill>
                   <a:srgbClr val="FFFFFF"/>
                 </a:solidFill>
@@ -10738,7 +10945,7 @@
               </a:rPr>
               <a:t>Horários padronizados</a:t>
             </a:r>
-            <a:endParaRPr lang="en-US" sz="950" dirty="0"/>
+            <a:endParaRPr lang="en-US" sz="1050" dirty="0"/>
           </a:p>
         </p:txBody>
       </p:sp>
@@ -10763,14 +10970,14 @@
           <a:bodyPr wrap="square" lIns="0" tIns="0" rIns="0" bIns="0" rtlCol="0" anchor="t"/>
           <a:lstStyle/>
           <a:p>
-            <a:pPr indent="0" marL="0">
+            <a:pPr marL="0" indent="0">
               <a:lnSpc>
                 <a:spcPct val="115000"/>
               </a:lnSpc>
               <a:buNone/>
             </a:pPr>
             <a:r>
-              <a:rPr lang="en-US" sz="820" dirty="0">
+              <a:rPr lang="en-US" sz="1000" dirty="0">
                 <a:solidFill>
                   <a:srgbClr val="E6E8F0"/>
                 </a:solidFill>
@@ -10780,7 +10987,7 @@
               </a:rPr>
               <a:t>Módulos com datas e janelas fixas</a:t>
             </a:r>
-            <a:endParaRPr lang="en-US" sz="820" dirty="0"/>
+            <a:endParaRPr lang="en-US" sz="1000" dirty="0"/>
           </a:p>
         </p:txBody>
       </p:sp>
@@ -10810,6 +11017,13 @@
             <a:prstDash val="solid"/>
           </a:ln>
         </p:spPr>
+        <p:txBody>
+          <a:bodyPr/>
+          <a:lstStyle/>
+          <a:p>
+            <a:endParaRPr lang="pt-BR"/>
+          </a:p>
+        </p:txBody>
       </p:sp>
       <p:sp>
         <p:nvSpPr>
@@ -10832,14 +11046,14 @@
           <a:bodyPr wrap="square" lIns="0" tIns="0" rIns="0" bIns="0" rtlCol="0" anchor="ctr"/>
           <a:lstStyle/>
           <a:p>
-            <a:pPr indent="0" marL="0">
+            <a:pPr marL="0" indent="0">
               <a:lnSpc>
                 <a:spcPct val="105000"/>
               </a:lnSpc>
               <a:buNone/>
             </a:pPr>
             <a:r>
-              <a:rPr lang="en-US" sz="950" dirty="0">
+              <a:rPr lang="en-US" sz="1050" dirty="0">
                 <a:solidFill>
                   <a:srgbClr val="FFFFFF"/>
                 </a:solidFill>
@@ -10849,7 +11063,7 @@
               </a:rPr>
               <a:t>Antecedência de ~90 dias</a:t>
             </a:r>
-            <a:endParaRPr lang="en-US" sz="950" dirty="0"/>
+            <a:endParaRPr lang="en-US" sz="1050" dirty="0"/>
           </a:p>
         </p:txBody>
       </p:sp>
@@ -10874,14 +11088,14 @@
           <a:bodyPr wrap="square" lIns="0" tIns="0" rIns="0" bIns="0" rtlCol="0" anchor="t"/>
           <a:lstStyle/>
           <a:p>
-            <a:pPr indent="0" marL="0">
+            <a:pPr marL="0" indent="0">
               <a:lnSpc>
                 <a:spcPct val="115000"/>
               </a:lnSpc>
               <a:buNone/>
             </a:pPr>
             <a:r>
-              <a:rPr lang="en-US" sz="820" dirty="0">
+              <a:rPr lang="en-US" sz="1000" dirty="0">
                 <a:solidFill>
                   <a:srgbClr val="E6E8F0"/>
                 </a:solidFill>
@@ -10891,7 +11105,7 @@
               </a:rPr>
               <a:t>Compra programada, não reativa</a:t>
             </a:r>
-            <a:endParaRPr lang="en-US" sz="820" dirty="0"/>
+            <a:endParaRPr lang="en-US" sz="1000" dirty="0"/>
           </a:p>
         </p:txBody>
       </p:sp>
@@ -10921,6 +11135,13 @@
             <a:prstDash val="solid"/>
           </a:ln>
         </p:spPr>
+        <p:txBody>
+          <a:bodyPr/>
+          <a:lstStyle/>
+          <a:p>
+            <a:endParaRPr lang="pt-BR"/>
+          </a:p>
+        </p:txBody>
       </p:sp>
       <p:sp>
         <p:nvSpPr>
@@ -10943,14 +11164,14 @@
           <a:bodyPr wrap="square" lIns="0" tIns="0" rIns="0" bIns="0" rtlCol="0" anchor="ctr"/>
           <a:lstStyle/>
           <a:p>
-            <a:pPr indent="0" marL="0">
+            <a:pPr marL="0" indent="0">
               <a:lnSpc>
                 <a:spcPct val="105000"/>
               </a:lnSpc>
               <a:buNone/>
             </a:pPr>
             <a:r>
-              <a:rPr lang="en-US" sz="950" dirty="0">
+              <a:rPr lang="en-US" sz="1050" dirty="0">
                 <a:solidFill>
                   <a:srgbClr val="FFFFFF"/>
                 </a:solidFill>
@@ -10960,7 +11181,7 @@
               </a:rPr>
               <a:t>Garantia financeira</a:t>
             </a:r>
-            <a:endParaRPr lang="en-US" sz="950" dirty="0"/>
+            <a:endParaRPr lang="en-US" sz="1050" dirty="0"/>
           </a:p>
         </p:txBody>
       </p:sp>
@@ -10985,14 +11206,14 @@
           <a:bodyPr wrap="square" lIns="0" tIns="0" rIns="0" bIns="0" rtlCol="0" anchor="t"/>
           <a:lstStyle/>
           <a:p>
-            <a:pPr indent="0" marL="0">
+            <a:pPr marL="0" indent="0">
               <a:lnSpc>
                 <a:spcPct val="115000"/>
               </a:lnSpc>
               <a:buNone/>
             </a:pPr>
             <a:r>
-              <a:rPr lang="en-US" sz="820" dirty="0">
+              <a:rPr lang="en-US" sz="1000" dirty="0">
                 <a:solidFill>
                   <a:srgbClr val="E6E8F0"/>
                 </a:solidFill>
@@ -11002,7 +11223,7 @@
               </a:rPr>
               <a:t>Capital de giro cobrindo o bloqueio</a:t>
             </a:r>
-            <a:endParaRPr lang="en-US" sz="820" dirty="0"/>
+            <a:endParaRPr lang="en-US" sz="1000" dirty="0"/>
           </a:p>
         </p:txBody>
       </p:sp>
@@ -11032,6 +11253,13 @@
             <a:prstDash val="solid"/>
           </a:ln>
         </p:spPr>
+        <p:txBody>
+          <a:bodyPr/>
+          <a:lstStyle/>
+          <a:p>
+            <a:endParaRPr lang="pt-BR"/>
+          </a:p>
+        </p:txBody>
       </p:sp>
       <p:sp>
         <p:nvSpPr>
@@ -11054,14 +11282,14 @@
           <a:bodyPr wrap="square" lIns="0" tIns="0" rIns="0" bIns="0" rtlCol="0" anchor="ctr"/>
           <a:lstStyle/>
           <a:p>
-            <a:pPr indent="0" marL="0">
+            <a:pPr marL="0" indent="0">
               <a:lnSpc>
                 <a:spcPct val="105000"/>
               </a:lnSpc>
               <a:buNone/>
             </a:pPr>
             <a:r>
-              <a:rPr lang="en-US" sz="950" dirty="0">
+              <a:rPr lang="en-US" sz="1050" dirty="0">
                 <a:solidFill>
                   <a:srgbClr val="FFFFFF"/>
                 </a:solidFill>
@@ -11071,7 +11299,7 @@
               </a:rPr>
               <a:t>Política de no-show</a:t>
             </a:r>
-            <a:endParaRPr lang="en-US" sz="950" dirty="0"/>
+            <a:endParaRPr lang="en-US" sz="1050" dirty="0"/>
           </a:p>
         </p:txBody>
       </p:sp>
@@ -11096,14 +11324,14 @@
           <a:bodyPr wrap="square" lIns="0" tIns="0" rIns="0" bIns="0" rtlCol="0" anchor="t"/>
           <a:lstStyle/>
           <a:p>
-            <a:pPr indent="0" marL="0">
+            <a:pPr marL="0" indent="0">
               <a:lnSpc>
                 <a:spcPct val="115000"/>
               </a:lnSpc>
               <a:buNone/>
             </a:pPr>
             <a:r>
-              <a:rPr lang="en-US" sz="820" dirty="0">
+              <a:rPr lang="en-US" sz="1000" dirty="0">
                 <a:solidFill>
                   <a:srgbClr val="E6E8F0"/>
                 </a:solidFill>
@@ -11113,7 +11341,7 @@
               </a:rPr>
               <a:t>Regras claras de cancelamento</a:t>
             </a:r>
-            <a:endParaRPr lang="en-US" sz="820" dirty="0"/>
+            <a:endParaRPr lang="en-US" sz="1000" dirty="0"/>
           </a:p>
         </p:txBody>
       </p:sp>
@@ -11138,7 +11366,7 @@
           <a:bodyPr wrap="square" lIns="0" tIns="0" rIns="0" bIns="0" rtlCol="0" anchor="ctr"/>
           <a:lstStyle/>
           <a:p>
-            <a:pPr indent="0" marL="0">
+            <a:pPr marL="0" indent="0">
               <a:buNone/>
             </a:pPr>
             <a:r>
@@ -11177,11 +11405,11 @@
           <a:bodyPr wrap="square" lIns="0" tIns="0" rIns="0" bIns="0" rtlCol="0" anchor="ctr"/>
           <a:lstStyle/>
           <a:p>
-            <a:pPr algn="l" indent="0" marL="0">
-              <a:buNone/>
-            </a:pPr>
-            <a:r>
-              <a:rPr lang="en-US" sz="650" spc="120" kern="0" dirty="0">
+            <a:pPr marL="0" indent="0" algn="l">
+              <a:buNone/>
+            </a:pPr>
+            <a:r>
+              <a:rPr lang="en-US" sz="650" kern="0" spc="120" dirty="0">
                 <a:solidFill>
                   <a:srgbClr val="9AA1AD"/>
                 </a:solidFill>
@@ -11216,7 +11444,7 @@
           <a:bodyPr wrap="square" lIns="0" tIns="0" rIns="0" bIns="0" rtlCol="0" anchor="ctr"/>
           <a:lstStyle/>
           <a:p>
-            <a:pPr algn="r" indent="0" marL="0">
+            <a:pPr marL="0" indent="0" algn="r">
               <a:buNone/>
             </a:pPr>
             <a:r>
@@ -11250,6 +11478,7 @@
         <a:solidFill>
           <a:srgbClr val="F7F8FA"/>
         </a:solidFill>
+        <a:effectLst/>
       </p:bgPr>
     </p:bg>
     <p:spTree>
@@ -11287,7 +11516,7 @@
           <a:bodyPr wrap="square" lIns="0" tIns="0" rIns="0" bIns="0" rtlCol="0" anchor="ctr"/>
           <a:lstStyle/>
           <a:p>
-            <a:pPr algn="l" indent="0" marL="0">
+            <a:pPr marL="0" indent="0" algn="l">
               <a:buNone/>
             </a:pPr>
             <a:r>
@@ -11301,9 +11530,6 @@
               </a:rPr>
               <a:t>08  </a:t>
             </a:r>
-            <a:pPr algn="l" indent="0" marL="0">
-              <a:buNone/>
-            </a:pPr>
             <a:r>
               <a:rPr lang="en-US" sz="2300" b="1" dirty="0">
                 <a:solidFill>
@@ -11340,7 +11566,7 @@
           <a:bodyPr wrap="square" lIns="0" tIns="0" rIns="0" bIns="0" rtlCol="0" anchor="ctr"/>
           <a:lstStyle/>
           <a:p>
-            <a:pPr indent="0" marL="0">
+            <a:pPr marL="0" indent="0">
               <a:buNone/>
             </a:pPr>
             <a:r>
@@ -11384,13 +11610,20 @@
             <a:prstDash val="solid"/>
           </a:ln>
           <a:effectLst>
-            <a:outerShdw sx="100000" sy="100000" kx="0" ky="0" algn="bl" rotWithShape="0" blurRad="63500" dist="25400" dir="5400000">
+            <a:outerShdw blurRad="63500" dist="25400" dir="5400000" algn="bl" rotWithShape="0">
               <a:srgbClr val="0B1220">
                 <a:alpha val="16000"/>
               </a:srgbClr>
             </a:outerShdw>
           </a:effectLst>
         </p:spPr>
+        <p:txBody>
+          <a:bodyPr/>
+          <a:lstStyle/>
+          <a:p>
+            <a:endParaRPr lang="pt-BR"/>
+          </a:p>
+        </p:txBody>
       </p:sp>
       <p:sp>
         <p:nvSpPr>
@@ -11413,7 +11646,7 @@
           <a:bodyPr wrap="square" lIns="0" tIns="0" rIns="0" bIns="0" rtlCol="0" anchor="ctr"/>
           <a:lstStyle/>
           <a:p>
-            <a:pPr indent="0" marL="0">
+            <a:pPr marL="0" indent="0">
               <a:buNone/>
             </a:pPr>
             <a:r>
@@ -11452,11 +11685,11 @@
           <a:bodyPr wrap="square" lIns="0" tIns="0" rIns="0" bIns="0" rtlCol="0" anchor="ctr"/>
           <a:lstStyle/>
           <a:p>
-            <a:pPr indent="0" marL="0">
-              <a:buNone/>
-            </a:pPr>
-            <a:r>
-              <a:rPr lang="en-US" sz="1050" dirty="0">
+            <a:pPr marL="0" indent="0">
+              <a:buNone/>
+            </a:pPr>
+            <a:r>
+              <a:rPr lang="en-US" sz="1600" dirty="0">
                 <a:solidFill>
                   <a:srgbClr val="0B1220"/>
                 </a:solidFill>
@@ -11466,7 +11699,7 @@
               </a:rPr>
               <a:t>Taxa de serviço por encontro</a:t>
             </a:r>
-            <a:endParaRPr lang="en-US" sz="1050" dirty="0"/>
+            <a:endParaRPr lang="en-US" sz="1600" dirty="0"/>
           </a:p>
         </p:txBody>
       </p:sp>
@@ -11491,14 +11724,14 @@
           <a:bodyPr wrap="square" lIns="0" tIns="0" rIns="0" bIns="0" rtlCol="0" anchor="t"/>
           <a:lstStyle/>
           <a:p>
-            <a:pPr indent="0" marL="0">
+            <a:pPr marL="0" indent="0">
               <a:lnSpc>
                 <a:spcPct val="118000"/>
               </a:lnSpc>
               <a:buNone/>
             </a:pPr>
             <a:r>
-              <a:rPr lang="en-US" sz="900" dirty="0">
+              <a:rPr lang="en-US" sz="1200" dirty="0">
                 <a:solidFill>
                   <a:srgbClr val="1B2435"/>
                 </a:solidFill>
@@ -11508,7 +11741,7 @@
               </a:rPr>
               <a:t>R$ 50–150 por módulo, paga pelo aluno pela conveniência do concierge (faixa a validar nas próximas entrevistas).</a:t>
             </a:r>
-            <a:endParaRPr lang="en-US" sz="900" dirty="0"/>
+            <a:endParaRPr lang="en-US" sz="1200" dirty="0"/>
           </a:p>
         </p:txBody>
       </p:sp>
@@ -11538,13 +11771,20 @@
             <a:prstDash val="solid"/>
           </a:ln>
           <a:effectLst>
-            <a:outerShdw sx="100000" sy="100000" kx="0" ky="0" algn="bl" rotWithShape="0" blurRad="63500" dist="25400" dir="5400000">
+            <a:outerShdw blurRad="63500" dist="25400" dir="5400000" algn="bl" rotWithShape="0">
               <a:srgbClr val="0B1220">
                 <a:alpha val="16000"/>
               </a:srgbClr>
             </a:outerShdw>
           </a:effectLst>
         </p:spPr>
+        <p:txBody>
+          <a:bodyPr/>
+          <a:lstStyle/>
+          <a:p>
+            <a:endParaRPr lang="pt-BR"/>
+          </a:p>
+        </p:txBody>
       </p:sp>
       <p:sp>
         <p:nvSpPr>
@@ -11567,7 +11807,7 @@
           <a:bodyPr wrap="square" lIns="0" tIns="0" rIns="0" bIns="0" rtlCol="0" anchor="ctr"/>
           <a:lstStyle/>
           <a:p>
-            <a:pPr indent="0" marL="0">
+            <a:pPr marL="0" indent="0">
               <a:buNone/>
             </a:pPr>
             <a:r>
@@ -11606,11 +11846,11 @@
           <a:bodyPr wrap="square" lIns="0" tIns="0" rIns="0" bIns="0" rtlCol="0" anchor="ctr"/>
           <a:lstStyle/>
           <a:p>
-            <a:pPr indent="0" marL="0">
-              <a:buNone/>
-            </a:pPr>
-            <a:r>
-              <a:rPr lang="en-US" sz="1050" dirty="0">
+            <a:pPr marL="0" indent="0">
+              <a:buNone/>
+            </a:pPr>
+            <a:r>
+              <a:rPr lang="en-US" sz="1600" dirty="0">
                 <a:solidFill>
                   <a:srgbClr val="0B1220"/>
                 </a:solidFill>
@@ -11620,7 +11860,7 @@
               </a:rPr>
               <a:t>Comissão sobre bloqueios</a:t>
             </a:r>
-            <a:endParaRPr lang="en-US" sz="1050" dirty="0"/>
+            <a:endParaRPr lang="en-US" sz="1600" dirty="0"/>
           </a:p>
         </p:txBody>
       </p:sp>
@@ -11645,14 +11885,14 @@
           <a:bodyPr wrap="square" lIns="0" tIns="0" rIns="0" bIns="0" rtlCol="0" anchor="t"/>
           <a:lstStyle/>
           <a:p>
-            <a:pPr indent="0" marL="0">
+            <a:pPr marL="0" indent="0">
               <a:lnSpc>
                 <a:spcPct val="118000"/>
               </a:lnSpc>
               <a:buNone/>
             </a:pPr>
             <a:r>
-              <a:rPr lang="en-US" sz="900" dirty="0">
+              <a:rPr lang="en-US" sz="1200" dirty="0">
                 <a:solidFill>
                   <a:srgbClr val="1B2435"/>
                 </a:solidFill>
@@ -11662,7 +11902,7 @@
               </a:rPr>
               <a:t>Percentual sobre as tarifas de grupo negociadas com companhias aéreas e hotéis.</a:t>
             </a:r>
-            <a:endParaRPr lang="en-US" sz="900" dirty="0"/>
+            <a:endParaRPr lang="en-US" sz="1200" dirty="0"/>
           </a:p>
         </p:txBody>
       </p:sp>
@@ -11692,13 +11932,20 @@
             <a:prstDash val="solid"/>
           </a:ln>
           <a:effectLst>
-            <a:outerShdw sx="100000" sy="100000" kx="0" ky="0" algn="bl" rotWithShape="0" blurRad="63500" dist="25400" dir="5400000">
+            <a:outerShdw blurRad="63500" dist="25400" dir="5400000" algn="bl" rotWithShape="0">
               <a:srgbClr val="0B1220">
                 <a:alpha val="16000"/>
               </a:srgbClr>
             </a:outerShdw>
           </a:effectLst>
         </p:spPr>
+        <p:txBody>
+          <a:bodyPr/>
+          <a:lstStyle/>
+          <a:p>
+            <a:endParaRPr lang="pt-BR" sz="2400"/>
+          </a:p>
+        </p:txBody>
       </p:sp>
       <p:sp>
         <p:nvSpPr>
@@ -11721,7 +11968,7 @@
           <a:bodyPr wrap="square" lIns="0" tIns="0" rIns="0" bIns="0" rtlCol="0" anchor="ctr"/>
           <a:lstStyle/>
           <a:p>
-            <a:pPr indent="0" marL="0">
+            <a:pPr marL="0" indent="0">
               <a:buNone/>
             </a:pPr>
             <a:r>
@@ -11760,11 +12007,11 @@
           <a:bodyPr wrap="square" lIns="0" tIns="0" rIns="0" bIns="0" rtlCol="0" anchor="ctr"/>
           <a:lstStyle/>
           <a:p>
-            <a:pPr indent="0" marL="0">
-              <a:buNone/>
-            </a:pPr>
-            <a:r>
-              <a:rPr lang="en-US" sz="1050" dirty="0">
+            <a:pPr marL="0" indent="0">
+              <a:buNone/>
+            </a:pPr>
+            <a:r>
+              <a:rPr lang="en-US" sz="1600" dirty="0">
                 <a:solidFill>
                   <a:srgbClr val="0B1220"/>
                 </a:solidFill>
@@ -11774,7 +12021,7 @@
               </a:rPr>
               <a:t>Fee da escola por turma</a:t>
             </a:r>
-            <a:endParaRPr lang="en-US" sz="1050" dirty="0"/>
+            <a:endParaRPr lang="en-US" sz="1600" dirty="0"/>
           </a:p>
         </p:txBody>
       </p:sp>
@@ -11799,14 +12046,14 @@
           <a:bodyPr wrap="square" lIns="0" tIns="0" rIns="0" bIns="0" rtlCol="0" anchor="t"/>
           <a:lstStyle/>
           <a:p>
-            <a:pPr indent="0" marL="0">
+            <a:pPr marL="0" indent="0">
               <a:lnSpc>
                 <a:spcPct val="118000"/>
               </a:lnSpc>
               <a:buNone/>
             </a:pPr>
             <a:r>
-              <a:rPr lang="en-US" sz="900" dirty="0">
+              <a:rPr lang="en-US" sz="1200" dirty="0">
                 <a:solidFill>
                   <a:srgbClr val="1B2435"/>
                 </a:solidFill>
@@ -11816,7 +12063,7 @@
               </a:rPr>
               <a:t>Receita potencial da escola pelo serviço ao aluno — a validar como evolução do modelo.</a:t>
             </a:r>
-            <a:endParaRPr lang="en-US" sz="900" dirty="0"/>
+            <a:endParaRPr lang="en-US" sz="1200" dirty="0"/>
           </a:p>
         </p:txBody>
       </p:sp>
@@ -11846,13 +12093,20 @@
             <a:prstDash val="solid"/>
           </a:ln>
           <a:effectLst>
-            <a:outerShdw sx="100000" sy="100000" kx="0" ky="0" algn="bl" rotWithShape="0" blurRad="63500" dist="25400" dir="5400000">
+            <a:outerShdw blurRad="63500" dist="25400" dir="5400000" algn="bl" rotWithShape="0">
               <a:srgbClr val="0B1220">
                 <a:alpha val="16000"/>
               </a:srgbClr>
             </a:outerShdw>
           </a:effectLst>
         </p:spPr>
+        <p:txBody>
+          <a:bodyPr/>
+          <a:lstStyle/>
+          <a:p>
+            <a:endParaRPr lang="pt-BR" sz="2800"/>
+          </a:p>
+        </p:txBody>
       </p:sp>
       <p:sp>
         <p:nvSpPr>
@@ -11875,11 +12129,11 @@
           <a:bodyPr wrap="square" lIns="0" tIns="0" rIns="0" bIns="0" rtlCol="0" anchor="ctr"/>
           <a:lstStyle/>
           <a:p>
-            <a:pPr indent="0" marL="0">
-              <a:buNone/>
-            </a:pPr>
-            <a:r>
-              <a:rPr lang="en-US" sz="850" spc="140" kern="0" dirty="0">
+            <a:pPr marL="0" indent="0">
+              <a:buNone/>
+            </a:pPr>
+            <a:r>
+              <a:rPr lang="en-US" sz="850" kern="0" spc="140" dirty="0">
                 <a:solidFill>
                   <a:srgbClr val="F2B705"/>
                 </a:solidFill>
@@ -11887,7 +12141,7 @@
                 <a:ea typeface="Inter SemiBold" pitchFamily="34" charset="-122"/>
                 <a:cs typeface="Inter SemiBold" pitchFamily="34" charset="-120"/>
               </a:rPr>
-              <a:t>EXEMPLO ILUSTRATIVO — 1 TURMA</a:t>
+              <a:t>EXEMPLO ILUSTRATIVO</a:t>
             </a:r>
             <a:endParaRPr lang="en-US" sz="850" dirty="0"/>
           </a:p>
@@ -11914,7 +12168,7 @@
           <a:bodyPr wrap="square" lIns="0" tIns="0" rIns="0" bIns="0" rtlCol="0" anchor="ctr"/>
           <a:lstStyle/>
           <a:p>
-            <a:pPr indent="0" marL="0">
+            <a:pPr marL="0" indent="0">
               <a:buNone/>
             </a:pPr>
             <a:r>
@@ -11928,9 +12182,6 @@
               </a:rPr>
               <a:t>100 alunos · 12 encontros · </a:t>
             </a:r>
-            <a:pPr indent="0" marL="0">
-              <a:buNone/>
-            </a:pPr>
             <a:r>
               <a:rPr lang="en-US" sz="1050" b="1" dirty="0">
                 <a:solidFill>
@@ -11942,9 +12193,6 @@
               </a:rPr>
               <a:t>adesão de 60%</a:t>
             </a:r>
-            <a:pPr indent="0" marL="0">
-              <a:buNone/>
-            </a:pPr>
             <a:r>
               <a:rPr lang="en-US" sz="1050" dirty="0">
                 <a:solidFill>
@@ -11981,7 +12229,7 @@
           <a:bodyPr wrap="square" lIns="0" tIns="0" rIns="0" bIns="0" rtlCol="0" anchor="ctr"/>
           <a:lstStyle/>
           <a:p>
-            <a:pPr indent="0" marL="0">
+            <a:pPr marL="0" indent="0">
               <a:buNone/>
             </a:pPr>
             <a:r>
@@ -12020,14 +12268,14 @@
           <a:bodyPr wrap="square" lIns="0" tIns="0" rIns="0" bIns="0" rtlCol="0" anchor="ctr"/>
           <a:lstStyle/>
           <a:p>
-            <a:pPr indent="0" marL="0">
+            <a:pPr marL="0" indent="0">
               <a:lnSpc>
                 <a:spcPct val="112000"/>
               </a:lnSpc>
               <a:buNone/>
             </a:pPr>
             <a:r>
-              <a:rPr lang="en-US" sz="950" dirty="0">
+              <a:rPr lang="en-US" sz="1100" dirty="0">
                 <a:solidFill>
                   <a:srgbClr val="E6E8F0"/>
                 </a:solidFill>
@@ -12037,7 +12285,7 @@
               </a:rPr>
               <a:t>viagens organizadas por ano</a:t>
             </a:r>
-            <a:endParaRPr lang="en-US" sz="950" dirty="0"/>
+            <a:endParaRPr lang="en-US" sz="1100" dirty="0"/>
           </a:p>
         </p:txBody>
       </p:sp>
@@ -12062,7 +12310,7 @@
           <a:bodyPr wrap="square" lIns="0" tIns="0" rIns="0" bIns="0" rtlCol="0" anchor="ctr"/>
           <a:lstStyle/>
           <a:p>
-            <a:pPr indent="0" marL="0">
+            <a:pPr marL="0" indent="0">
               <a:buNone/>
             </a:pPr>
             <a:r>
@@ -12101,14 +12349,14 @@
           <a:bodyPr wrap="square" lIns="0" tIns="0" rIns="0" bIns="0" rtlCol="0" anchor="ctr"/>
           <a:lstStyle/>
           <a:p>
-            <a:pPr indent="0" marL="0">
+            <a:pPr marL="0" indent="0">
               <a:lnSpc>
                 <a:spcPct val="112000"/>
               </a:lnSpc>
               <a:buNone/>
             </a:pPr>
             <a:r>
-              <a:rPr lang="en-US" sz="950" dirty="0">
+              <a:rPr lang="en-US" sz="1100" dirty="0">
                 <a:solidFill>
                   <a:srgbClr val="E6E8F0"/>
                 </a:solidFill>
@@ -12118,7 +12366,7 @@
               </a:rPr>
               <a:t>por turma/ano só em taxas de serviço (média R$ 100)</a:t>
             </a:r>
-            <a:endParaRPr lang="en-US" sz="950" dirty="0"/>
+            <a:endParaRPr lang="en-US" sz="1100" dirty="0"/>
           </a:p>
         </p:txBody>
       </p:sp>
@@ -12143,7 +12391,7 @@
           <a:bodyPr wrap="square" lIns="0" tIns="0" rIns="0" bIns="0" rtlCol="0" anchor="ctr"/>
           <a:lstStyle/>
           <a:p>
-            <a:pPr indent="0" marL="0">
+            <a:pPr marL="0" indent="0">
               <a:buNone/>
             </a:pPr>
             <a:r>
@@ -12182,14 +12430,14 @@
           <a:bodyPr wrap="square" lIns="0" tIns="0" rIns="0" bIns="0" rtlCol="0" anchor="ctr"/>
           <a:lstStyle/>
           <a:p>
-            <a:pPr indent="0" marL="0">
+            <a:pPr marL="0" indent="0">
               <a:lnSpc>
                 <a:spcPct val="112000"/>
               </a:lnSpc>
               <a:buNone/>
             </a:pPr>
             <a:r>
-              <a:rPr lang="en-US" sz="950" dirty="0">
+              <a:rPr lang="en-US" sz="1100" dirty="0">
                 <a:solidFill>
                   <a:srgbClr val="E6E8F0"/>
                 </a:solidFill>
@@ -12199,7 +12447,7 @@
               </a:rPr>
               <a:t>comissão sobre todo o volume de bloqueios</a:t>
             </a:r>
-            <a:endParaRPr lang="en-US" sz="950" dirty="0"/>
+            <a:endParaRPr lang="en-US" sz="1100" dirty="0"/>
           </a:p>
         </p:txBody>
       </p:sp>
@@ -12224,7 +12472,7 @@
           <a:bodyPr wrap="square" lIns="0" tIns="0" rIns="0" bIns="0" rtlCol="0" anchor="t"/>
           <a:lstStyle/>
           <a:p>
-            <a:pPr indent="0" marL="0">
+            <a:pPr marL="0" indent="0">
               <a:lnSpc>
                 <a:spcPct val="115000"/>
               </a:lnSpc>
@@ -12271,13 +12519,20 @@
             <a:prstDash val="solid"/>
           </a:ln>
           <a:effectLst>
-            <a:outerShdw sx="100000" sy="100000" kx="0" ky="0" algn="bl" rotWithShape="0" blurRad="63500" dist="25400" dir="5400000">
+            <a:outerShdw blurRad="63500" dist="25400" dir="5400000" algn="bl" rotWithShape="0">
               <a:srgbClr val="0B1220">
                 <a:alpha val="16000"/>
               </a:srgbClr>
             </a:outerShdw>
           </a:effectLst>
         </p:spPr>
+        <p:txBody>
+          <a:bodyPr/>
+          <a:lstStyle/>
+          <a:p>
+            <a:endParaRPr lang="pt-BR"/>
+          </a:p>
+        </p:txBody>
       </p:sp>
       <p:sp>
         <p:nvSpPr>
@@ -12300,11 +12555,11 @@
           <a:bodyPr wrap="square" lIns="0" tIns="0" rIns="0" bIns="0" rtlCol="0" anchor="ctr"/>
           <a:lstStyle/>
           <a:p>
-            <a:pPr indent="0" marL="0">
-              <a:buNone/>
-            </a:pPr>
-            <a:r>
-              <a:rPr lang="en-US" sz="850" spc="140" kern="0" dirty="0">
+            <a:pPr marL="0" indent="0">
+              <a:buNone/>
+            </a:pPr>
+            <a:r>
+              <a:rPr lang="en-US" sz="850" kern="0" spc="140" dirty="0">
                 <a:solidFill>
                   <a:srgbClr val="9A7508"/>
                 </a:solidFill>
@@ -12339,14 +12594,14 @@
           <a:bodyPr wrap="square" lIns="0" tIns="0" rIns="0" bIns="0" rtlCol="0" anchor="t"/>
           <a:lstStyle/>
           <a:p>
-            <a:pPr indent="0" marL="0">
+            <a:pPr marL="0" indent="0">
               <a:lnSpc>
                 <a:spcPct val="130000"/>
               </a:lnSpc>
               <a:buNone/>
             </a:pPr>
             <a:r>
-              <a:rPr lang="en-US" sz="1000" dirty="0">
+              <a:rPr lang="en-US" sz="1200" dirty="0">
                 <a:solidFill>
                   <a:srgbClr val="0B1220"/>
                 </a:solidFill>
@@ -12356,14 +12611,8 @@
               </a:rPr>
               <a:t>Aluno: </a:t>
             </a:r>
-            <a:pPr indent="0" marL="0">
-              <a:lnSpc>
-                <a:spcPct val="130000"/>
-              </a:lnSpc>
-              <a:buNone/>
-            </a:pPr>
-            <a:r>
-              <a:rPr lang="en-US" sz="1000" dirty="0">
+            <a:r>
+              <a:rPr lang="en-US" sz="1200" dirty="0">
                 <a:solidFill>
                   <a:srgbClr val="1B2435"/>
                 </a:solidFill>
@@ -12373,14 +12622,8 @@
               </a:rPr>
               <a:t>economiza 20–30% comprando na janela certa.  </a:t>
             </a:r>
-            <a:pPr indent="0" marL="0">
-              <a:lnSpc>
-                <a:spcPct val="130000"/>
-              </a:lnSpc>
-              <a:buNone/>
-            </a:pPr>
-            <a:r>
-              <a:rPr lang="en-US" sz="1000" dirty="0">
+            <a:r>
+              <a:rPr lang="en-US" sz="1200" dirty="0">
                 <a:solidFill>
                   <a:srgbClr val="0B1220"/>
                 </a:solidFill>
@@ -12390,14 +12633,8 @@
               </a:rPr>
               <a:t>Escola: </a:t>
             </a:r>
-            <a:pPr indent="0" marL="0">
-              <a:lnSpc>
-                <a:spcPct val="130000"/>
-              </a:lnSpc>
-              <a:buNone/>
-            </a:pPr>
-            <a:r>
-              <a:rPr lang="en-US" sz="1000" dirty="0">
+            <a:r>
+              <a:rPr lang="en-US" sz="1200" dirty="0">
                 <a:solidFill>
                   <a:srgbClr val="1B2435"/>
                 </a:solidFill>
@@ -12407,14 +12644,8 @@
               </a:rPr>
               <a:t>mais NPS, menos fricção, sem custo direto.  </a:t>
             </a:r>
-            <a:pPr indent="0" marL="0">
-              <a:lnSpc>
-                <a:spcPct val="130000"/>
-              </a:lnSpc>
-              <a:buNone/>
-            </a:pPr>
-            <a:r>
-              <a:rPr lang="en-US" sz="1000" dirty="0">
+            <a:r>
+              <a:rPr lang="en-US" sz="1200" dirty="0">
                 <a:solidFill>
                   <a:srgbClr val="0B1220"/>
                 </a:solidFill>
@@ -12424,14 +12655,8 @@
               </a:rPr>
               <a:t>Fornecedores: </a:t>
             </a:r>
-            <a:pPr indent="0" marL="0">
-              <a:lnSpc>
-                <a:spcPct val="130000"/>
-              </a:lnSpc>
-              <a:buNone/>
-            </a:pPr>
-            <a:r>
-              <a:rPr lang="en-US" sz="1000" dirty="0">
+            <a:r>
+              <a:rPr lang="en-US" sz="1200" dirty="0">
                 <a:solidFill>
                   <a:srgbClr val="1B2435"/>
                 </a:solidFill>
@@ -12441,7 +12666,7 @@
               </a:rPr>
               <a:t>volume garantido e previsível.</a:t>
             </a:r>
-            <a:endParaRPr lang="en-US" sz="1000" dirty="0"/>
+            <a:endParaRPr lang="en-US" sz="1200" dirty="0"/>
           </a:p>
         </p:txBody>
       </p:sp>
@@ -12466,7 +12691,7 @@
           <a:bodyPr wrap="square" lIns="0" tIns="0" rIns="0" bIns="0" rtlCol="0" anchor="ctr"/>
           <a:lstStyle/>
           <a:p>
-            <a:pPr indent="0" marL="0">
+            <a:pPr marL="0" indent="0">
               <a:buNone/>
             </a:pPr>
             <a:r>
@@ -12505,11 +12730,11 @@
           <a:bodyPr wrap="square" lIns="0" tIns="0" rIns="0" bIns="0" rtlCol="0" anchor="ctr"/>
           <a:lstStyle/>
           <a:p>
-            <a:pPr algn="l" indent="0" marL="0">
-              <a:buNone/>
-            </a:pPr>
-            <a:r>
-              <a:rPr lang="en-US" sz="650" spc="120" kern="0" dirty="0">
+            <a:pPr marL="0" indent="0" algn="l">
+              <a:buNone/>
+            </a:pPr>
+            <a:r>
+              <a:rPr lang="en-US" sz="650" kern="0" spc="120" dirty="0">
                 <a:solidFill>
                   <a:srgbClr val="9AA1AD"/>
                 </a:solidFill>
@@ -12544,7 +12769,7 @@
           <a:bodyPr wrap="square" lIns="0" tIns="0" rIns="0" bIns="0" rtlCol="0" anchor="ctr"/>
           <a:lstStyle/>
           <a:p>
-            <a:pPr algn="r" indent="0" marL="0">
+            <a:pPr marL="0" indent="0" algn="r">
               <a:buNone/>
             </a:pPr>
             <a:r>
@@ -12863,4 +13088,319 @@
     </a:ext>
   </a:extLst>
 </a:theme>
+</file>
+
+<file path=ppt/theme/theme2.xml><?xml version="1.0" encoding="utf-8"?>
+<a:theme xmlns:a="http://schemas.openxmlformats.org/drawingml/2006/main" name="Tema do Office">
+  <a:themeElements>
+    <a:clrScheme name="Office">
+      <a:dk1>
+        <a:sysClr val="windowText" lastClr="000000"/>
+      </a:dk1>
+      <a:lt1>
+        <a:sysClr val="window" lastClr="FFFFFF"/>
+      </a:lt1>
+      <a:dk2>
+        <a:srgbClr val="0E2841"/>
+      </a:dk2>
+      <a:lt2>
+        <a:srgbClr val="E8E8E8"/>
+      </a:lt2>
+      <a:accent1>
+        <a:srgbClr val="156082"/>
+      </a:accent1>
+      <a:accent2>
+        <a:srgbClr val="E97132"/>
+      </a:accent2>
+      <a:accent3>
+        <a:srgbClr val="196B24"/>
+      </a:accent3>
+      <a:accent4>
+        <a:srgbClr val="0F9ED5"/>
+      </a:accent4>
+      <a:accent5>
+        <a:srgbClr val="A02B93"/>
+      </a:accent5>
+      <a:accent6>
+        <a:srgbClr val="4EA72E"/>
+      </a:accent6>
+      <a:hlink>
+        <a:srgbClr val="467886"/>
+      </a:hlink>
+      <a:folHlink>
+        <a:srgbClr val="96607D"/>
+      </a:folHlink>
+    </a:clrScheme>
+    <a:fontScheme name="Office">
+      <a:majorFont>
+        <a:latin typeface="Aptos Display" panose="02110004020202020204"/>
+        <a:ea typeface=""/>
+        <a:cs typeface=""/>
+        <a:font script="Jpan" typeface="游ゴシック Light"/>
+        <a:font script="Hang" typeface="맑은 고딕"/>
+        <a:font script="Hans" typeface="等线 Light"/>
+        <a:font script="Hant" typeface="新細明體"/>
+        <a:font script="Arab" typeface="Times New Roman"/>
+        <a:font script="Hebr" typeface="Times New Roman"/>
+        <a:font script="Thai" typeface="Angsana New"/>
+        <a:font script="Ethi" typeface="Nyala"/>
+        <a:font script="Beng" typeface="Vrinda"/>
+        <a:font script="Gujr" typeface="Shruti"/>
+        <a:font script="Khmr" typeface="MoolBoran"/>
+        <a:font script="Knda" typeface="Tunga"/>
+        <a:font script="Guru" typeface="Raavi"/>
+        <a:font script="Cans" typeface="Euphemia"/>
+        <a:font script="Cher" typeface="Plantagenet Cherokee"/>
+        <a:font script="Yiii" typeface="Microsoft Yi Baiti"/>
+        <a:font script="Tibt" typeface="Microsoft Himalaya"/>
+        <a:font script="Thaa" typeface="MV Boli"/>
+        <a:font script="Deva" typeface="Mangal"/>
+        <a:font script="Telu" typeface="Gautami"/>
+        <a:font script="Taml" typeface="Latha"/>
+        <a:font script="Syrc" typeface="Estrangelo Edessa"/>
+        <a:font script="Orya" typeface="Kalinga"/>
+        <a:font script="Mlym" typeface="Kartika"/>
+        <a:font script="Laoo" typeface="DokChampa"/>
+        <a:font script="Sinh" typeface="Iskoola Pota"/>
+        <a:font script="Mong" typeface="Mongolian Baiti"/>
+        <a:font script="Viet" typeface="Times New Roman"/>
+        <a:font script="Uigh" typeface="Microsoft Uighur"/>
+        <a:font script="Geor" typeface="Sylfaen"/>
+        <a:font script="Armn" typeface="Arial"/>
+        <a:font script="Bugi" typeface="Leelawadee UI"/>
+        <a:font script="Bopo" typeface="Microsoft JhengHei"/>
+        <a:font script="Java" typeface="Javanese Text"/>
+        <a:font script="Lisu" typeface="Segoe UI"/>
+        <a:font script="Mymr" typeface="Myanmar Text"/>
+        <a:font script="Nkoo" typeface="Ebrima"/>
+        <a:font script="Olck" typeface="Nirmala UI"/>
+        <a:font script="Osma" typeface="Ebrima"/>
+        <a:font script="Phag" typeface="Phagspa"/>
+        <a:font script="Syrn" typeface="Estrangelo Edessa"/>
+        <a:font script="Syrj" typeface="Estrangelo Edessa"/>
+        <a:font script="Syre" typeface="Estrangelo Edessa"/>
+        <a:font script="Sora" typeface="Nirmala UI"/>
+        <a:font script="Tale" typeface="Microsoft Tai Le"/>
+        <a:font script="Talu" typeface="Microsoft New Tai Lue"/>
+        <a:font script="Tfng" typeface="Ebrima"/>
+      </a:majorFont>
+      <a:minorFont>
+        <a:latin typeface="Aptos" panose="02110004020202020204"/>
+        <a:ea typeface=""/>
+        <a:cs typeface=""/>
+        <a:font script="Jpan" typeface="游ゴシック"/>
+        <a:font script="Hang" typeface="맑은 고딕"/>
+        <a:font script="Hans" typeface="等线"/>
+        <a:font script="Hant" typeface="新細明體"/>
+        <a:font script="Arab" typeface="Arial"/>
+        <a:font script="Hebr" typeface="Arial"/>
+        <a:font script="Thai" typeface="Cordia New"/>
+        <a:font script="Ethi" typeface="Nyala"/>
+        <a:font script="Beng" typeface="Vrinda"/>
+        <a:font script="Gujr" typeface="Shruti"/>
+        <a:font script="Khmr" typeface="DaunPenh"/>
+        <a:font script="Knda" typeface="Tunga"/>
+        <a:font script="Guru" typeface="Raavi"/>
+        <a:font script="Cans" typeface="Euphemia"/>
+        <a:font script="Cher" typeface="Plantagenet Cherokee"/>
+        <a:font script="Yiii" typeface="Microsoft Yi Baiti"/>
+        <a:font script="Tibt" typeface="Microsoft Himalaya"/>
+        <a:font script="Thaa" typeface="MV Boli"/>
+        <a:font script="Deva" typeface="Mangal"/>
+        <a:font script="Telu" typeface="Gautami"/>
+        <a:font script="Taml" typeface="Latha"/>
+        <a:font script="Syrc" typeface="Estrangelo Edessa"/>
+        <a:font script="Orya" typeface="Kalinga"/>
+        <a:font script="Mlym" typeface="Kartika"/>
+        <a:font script="Laoo" typeface="DokChampa"/>
+        <a:font script="Sinh" typeface="Iskoola Pota"/>
+        <a:font script="Mong" typeface="Mongolian Baiti"/>
+        <a:font script="Viet" typeface="Arial"/>
+        <a:font script="Uigh" typeface="Microsoft Uighur"/>
+        <a:font script="Geor" typeface="Sylfaen"/>
+        <a:font script="Armn" typeface="Arial"/>
+        <a:font script="Bugi" typeface="Leelawadee UI"/>
+        <a:font script="Bopo" typeface="Microsoft JhengHei"/>
+        <a:font script="Java" typeface="Javanese Text"/>
+        <a:font script="Lisu" typeface="Segoe UI"/>
+        <a:font script="Mymr" typeface="Myanmar Text"/>
+        <a:font script="Nkoo" typeface="Ebrima"/>
+        <a:font script="Olck" typeface="Nirmala UI"/>
+        <a:font script="Osma" typeface="Ebrima"/>
+        <a:font script="Phag" typeface="Phagspa"/>
+        <a:font script="Syrn" typeface="Estrangelo Edessa"/>
+        <a:font script="Syrj" typeface="Estrangelo Edessa"/>
+        <a:font script="Syre" typeface="Estrangelo Edessa"/>
+        <a:font script="Sora" typeface="Nirmala UI"/>
+        <a:font script="Tale" typeface="Microsoft Tai Le"/>
+        <a:font script="Talu" typeface="Microsoft New Tai Lue"/>
+        <a:font script="Tfng" typeface="Ebrima"/>
+      </a:minorFont>
+    </a:fontScheme>
+    <a:fmtScheme name="Office">
+      <a:fillStyleLst>
+        <a:solidFill>
+          <a:schemeClr val="phClr"/>
+        </a:solidFill>
+        <a:gradFill rotWithShape="1">
+          <a:gsLst>
+            <a:gs pos="0">
+              <a:schemeClr val="phClr">
+                <a:lumMod val="110000"/>
+                <a:satMod val="105000"/>
+                <a:tint val="67000"/>
+              </a:schemeClr>
+            </a:gs>
+            <a:gs pos="50000">
+              <a:schemeClr val="phClr">
+                <a:lumMod val="105000"/>
+                <a:satMod val="103000"/>
+                <a:tint val="73000"/>
+              </a:schemeClr>
+            </a:gs>
+            <a:gs pos="100000">
+              <a:schemeClr val="phClr">
+                <a:lumMod val="105000"/>
+                <a:satMod val="109000"/>
+                <a:tint val="81000"/>
+              </a:schemeClr>
+            </a:gs>
+          </a:gsLst>
+          <a:lin ang="5400000" scaled="0"/>
+        </a:gradFill>
+        <a:gradFill rotWithShape="1">
+          <a:gsLst>
+            <a:gs pos="0">
+              <a:schemeClr val="phClr">
+                <a:satMod val="103000"/>
+                <a:lumMod val="102000"/>
+                <a:tint val="94000"/>
+              </a:schemeClr>
+            </a:gs>
+            <a:gs pos="50000">
+              <a:schemeClr val="phClr">
+                <a:satMod val="110000"/>
+                <a:lumMod val="100000"/>
+                <a:shade val="100000"/>
+              </a:schemeClr>
+            </a:gs>
+            <a:gs pos="100000">
+              <a:schemeClr val="phClr">
+                <a:lumMod val="99000"/>
+                <a:satMod val="120000"/>
+                <a:shade val="78000"/>
+              </a:schemeClr>
+            </a:gs>
+          </a:gsLst>
+          <a:lin ang="5400000" scaled="0"/>
+        </a:gradFill>
+      </a:fillStyleLst>
+      <a:lnStyleLst>
+        <a:ln w="12700" cap="flat" cmpd="sng" algn="ctr">
+          <a:solidFill>
+            <a:schemeClr val="phClr"/>
+          </a:solidFill>
+          <a:prstDash val="solid"/>
+          <a:miter lim="800000"/>
+        </a:ln>
+        <a:ln w="19050" cap="flat" cmpd="sng" algn="ctr">
+          <a:solidFill>
+            <a:schemeClr val="phClr"/>
+          </a:solidFill>
+          <a:prstDash val="solid"/>
+          <a:miter lim="800000"/>
+        </a:ln>
+        <a:ln w="25400" cap="flat" cmpd="sng" algn="ctr">
+          <a:solidFill>
+            <a:schemeClr val="phClr"/>
+          </a:solidFill>
+          <a:prstDash val="solid"/>
+          <a:miter lim="800000"/>
+        </a:ln>
+      </a:lnStyleLst>
+      <a:effectStyleLst>
+        <a:effectStyle>
+          <a:effectLst/>
+        </a:effectStyle>
+        <a:effectStyle>
+          <a:effectLst/>
+        </a:effectStyle>
+        <a:effectStyle>
+          <a:effectLst>
+            <a:outerShdw blurRad="57150" dist="19050" dir="5400000" algn="ctr" rotWithShape="0">
+              <a:srgbClr val="000000">
+                <a:alpha val="63000"/>
+              </a:srgbClr>
+            </a:outerShdw>
+          </a:effectLst>
+        </a:effectStyle>
+      </a:effectStyleLst>
+      <a:bgFillStyleLst>
+        <a:solidFill>
+          <a:schemeClr val="phClr"/>
+        </a:solidFill>
+        <a:solidFill>
+          <a:schemeClr val="phClr">
+            <a:tint val="95000"/>
+            <a:satMod val="170000"/>
+          </a:schemeClr>
+        </a:solidFill>
+        <a:gradFill rotWithShape="1">
+          <a:gsLst>
+            <a:gs pos="0">
+              <a:schemeClr val="phClr">
+                <a:tint val="93000"/>
+                <a:satMod val="150000"/>
+                <a:shade val="98000"/>
+                <a:lumMod val="102000"/>
+              </a:schemeClr>
+            </a:gs>
+            <a:gs pos="50000">
+              <a:schemeClr val="phClr">
+                <a:tint val="98000"/>
+                <a:satMod val="130000"/>
+                <a:shade val="90000"/>
+                <a:lumMod val="103000"/>
+              </a:schemeClr>
+            </a:gs>
+            <a:gs pos="100000">
+              <a:schemeClr val="phClr">
+                <a:shade val="63000"/>
+                <a:satMod val="120000"/>
+              </a:schemeClr>
+            </a:gs>
+          </a:gsLst>
+          <a:lin ang="5400000" scaled="0"/>
+        </a:gradFill>
+      </a:bgFillStyleLst>
+    </a:fmtScheme>
+  </a:themeElements>
+  <a:objectDefaults>
+    <a:lnDef>
+      <a:spPr/>
+      <a:bodyPr/>
+      <a:lstStyle/>
+      <a:style>
+        <a:lnRef idx="2">
+          <a:schemeClr val="accent1"/>
+        </a:lnRef>
+        <a:fillRef idx="0">
+          <a:schemeClr val="accent1"/>
+        </a:fillRef>
+        <a:effectRef idx="1">
+          <a:schemeClr val="accent1"/>
+        </a:effectRef>
+        <a:fontRef idx="minor">
+          <a:schemeClr val="tx1"/>
+        </a:fontRef>
+      </a:style>
+    </a:lnDef>
+  </a:objectDefaults>
+  <a:extraClrSchemeLst/>
+  <a:extLst>
+    <a:ext uri="{05A4C25C-085E-4340-85A3-A5531E510DB2}">
+      <thm15:themeFamily xmlns:thm15="http://schemas.microsoft.com/office/thememl/2012/main" name="Office Theme" id="{2E142A2C-CD16-42D6-873A-C26D2A0506FA}" vid="{1BDDFF52-6CD6-40A5-AB3C-68EB2F1E4D0A}"/>
+    </a:ext>
+  </a:extLst>
+</a:theme>
 </file>